--- a/PPT Review 1.pptx
+++ b/PPT Review 1.pptx
@@ -4,24 +4,32 @@
   <p:sldMasterIdLst>
     <p:sldMasterId id="2147483696" r:id="rId1"/>
   </p:sldMasterIdLst>
+  <p:notesMasterIdLst>
+    <p:notesMasterId r:id="rId24"/>
+  </p:notesMasterIdLst>
   <p:sldIdLst>
-    <p:sldId id="256" r:id="rId2"/>
+    <p:sldId id="280" r:id="rId2"/>
     <p:sldId id="257" r:id="rId3"/>
     <p:sldId id="273" r:id="rId4"/>
-    <p:sldId id="274" r:id="rId5"/>
-    <p:sldId id="258" r:id="rId6"/>
-    <p:sldId id="259" r:id="rId7"/>
-    <p:sldId id="260" r:id="rId8"/>
-    <p:sldId id="261" r:id="rId9"/>
-    <p:sldId id="262" r:id="rId10"/>
-    <p:sldId id="272" r:id="rId11"/>
-    <p:sldId id="265" r:id="rId12"/>
-    <p:sldId id="266" r:id="rId13"/>
-    <p:sldId id="267" r:id="rId14"/>
-    <p:sldId id="268" r:id="rId15"/>
-    <p:sldId id="269" r:id="rId16"/>
-    <p:sldId id="270" r:id="rId17"/>
-    <p:sldId id="271" r:id="rId18"/>
+    <p:sldId id="275" r:id="rId5"/>
+    <p:sldId id="260" r:id="rId6"/>
+    <p:sldId id="274" r:id="rId7"/>
+    <p:sldId id="258" r:id="rId8"/>
+    <p:sldId id="276" r:id="rId9"/>
+    <p:sldId id="277" r:id="rId10"/>
+    <p:sldId id="259" r:id="rId11"/>
+    <p:sldId id="261" r:id="rId12"/>
+    <p:sldId id="262" r:id="rId13"/>
+    <p:sldId id="272" r:id="rId14"/>
+    <p:sldId id="265" r:id="rId15"/>
+    <p:sldId id="266" r:id="rId16"/>
+    <p:sldId id="267" r:id="rId17"/>
+    <p:sldId id="268" r:id="rId18"/>
+    <p:sldId id="269" r:id="rId19"/>
+    <p:sldId id="270" r:id="rId20"/>
+    <p:sldId id="271" r:id="rId21"/>
+    <p:sldId id="279" r:id="rId22"/>
+    <p:sldId id="278" r:id="rId23"/>
   </p:sldIdLst>
   <p:sldSz cx="9144000" cy="6858000" type="screen4x3"/>
   <p:notesSz cx="6858000" cy="9144000"/>
@@ -137,6 +145,473 @@
     </p:ext>
   </p:extLst>
 </p:presentation>
+</file>
+
+<file path=ppt/notesMasters/notesMaster1.xml><?xml version="1.0" encoding="utf-8"?>
+<p:notesMaster xmlns:a="http://schemas.openxmlformats.org/drawingml/2006/main" xmlns:r="http://schemas.openxmlformats.org/officeDocument/2006/relationships" xmlns:p="http://schemas.openxmlformats.org/presentationml/2006/main">
+  <p:cSld>
+    <p:bg>
+      <p:bgRef idx="1001">
+        <a:schemeClr val="bg1"/>
+      </p:bgRef>
+    </p:bg>
+    <p:spTree>
+      <p:nvGrpSpPr>
+        <p:cNvPr id="1" name=""/>
+        <p:cNvGrpSpPr/>
+        <p:nvPr/>
+      </p:nvGrpSpPr>
+      <p:grpSpPr>
+        <a:xfrm>
+          <a:off x="0" y="0"/>
+          <a:ext cx="0" cy="0"/>
+          <a:chOff x="0" y="0"/>
+          <a:chExt cx="0" cy="0"/>
+        </a:xfrm>
+      </p:grpSpPr>
+      <p:sp>
+        <p:nvSpPr>
+          <p:cNvPr id="2" name="Header Placeholder 1"/>
+          <p:cNvSpPr>
+            <a:spLocks noGrp="1"/>
+          </p:cNvSpPr>
+          <p:nvPr>
+            <p:ph type="hdr" sz="quarter"/>
+          </p:nvPr>
+        </p:nvSpPr>
+        <p:spPr>
+          <a:xfrm>
+            <a:off x="0" y="0"/>
+            <a:ext cx="2971800" cy="458788"/>
+          </a:xfrm>
+          <a:prstGeom prst="rect">
+            <a:avLst/>
+          </a:prstGeom>
+        </p:spPr>
+        <p:txBody>
+          <a:bodyPr vert="horz" lIns="91440" tIns="45720" rIns="91440" bIns="45720" rtlCol="0"/>
+          <a:lstStyle>
+            <a:lvl1pPr algn="l">
+              <a:defRPr sz="1200"/>
+            </a:lvl1pPr>
+          </a:lstStyle>
+          <a:p>
+            <a:endParaRPr lang="en-IN"/>
+          </a:p>
+        </p:txBody>
+      </p:sp>
+      <p:sp>
+        <p:nvSpPr>
+          <p:cNvPr id="3" name="Date Placeholder 2"/>
+          <p:cNvSpPr>
+            <a:spLocks noGrp="1"/>
+          </p:cNvSpPr>
+          <p:nvPr>
+            <p:ph type="dt" idx="1"/>
+          </p:nvPr>
+        </p:nvSpPr>
+        <p:spPr>
+          <a:xfrm>
+            <a:off x="3884613" y="0"/>
+            <a:ext cx="2971800" cy="458788"/>
+          </a:xfrm>
+          <a:prstGeom prst="rect">
+            <a:avLst/>
+          </a:prstGeom>
+        </p:spPr>
+        <p:txBody>
+          <a:bodyPr vert="horz" lIns="91440" tIns="45720" rIns="91440" bIns="45720" rtlCol="0"/>
+          <a:lstStyle>
+            <a:lvl1pPr algn="r">
+              <a:defRPr sz="1200"/>
+            </a:lvl1pPr>
+          </a:lstStyle>
+          <a:p>
+            <a:fld id="{9AF76926-F3C4-44FE-A7E3-2A27B1BEC30B}" type="datetimeFigureOut">
+              <a:rPr lang="en-IN" smtClean="0"/>
+              <a:t>18-01-2026</a:t>
+            </a:fld>
+            <a:endParaRPr lang="en-IN"/>
+          </a:p>
+        </p:txBody>
+      </p:sp>
+      <p:sp>
+        <p:nvSpPr>
+          <p:cNvPr id="4" name="Slide Image Placeholder 3"/>
+          <p:cNvSpPr>
+            <a:spLocks noGrp="1" noRot="1" noChangeAspect="1"/>
+          </p:cNvSpPr>
+          <p:nvPr>
+            <p:ph type="sldImg" idx="2"/>
+          </p:nvPr>
+        </p:nvSpPr>
+        <p:spPr>
+          <a:xfrm>
+            <a:off x="1371600" y="1143000"/>
+            <a:ext cx="4114800" cy="3086100"/>
+          </a:xfrm>
+          <a:prstGeom prst="rect">
+            <a:avLst/>
+          </a:prstGeom>
+          <a:noFill/>
+          <a:ln w="12700">
+            <a:solidFill>
+              <a:prstClr val="black"/>
+            </a:solidFill>
+          </a:ln>
+        </p:spPr>
+        <p:txBody>
+          <a:bodyPr vert="horz" lIns="91440" tIns="45720" rIns="91440" bIns="45720" rtlCol="0" anchor="ctr"/>
+          <a:lstStyle/>
+          <a:p>
+            <a:endParaRPr lang="en-IN"/>
+          </a:p>
+        </p:txBody>
+      </p:sp>
+      <p:sp>
+        <p:nvSpPr>
+          <p:cNvPr id="5" name="Notes Placeholder 4"/>
+          <p:cNvSpPr>
+            <a:spLocks noGrp="1"/>
+          </p:cNvSpPr>
+          <p:nvPr>
+            <p:ph type="body" sz="quarter" idx="3"/>
+          </p:nvPr>
+        </p:nvSpPr>
+        <p:spPr>
+          <a:xfrm>
+            <a:off x="685800" y="4400550"/>
+            <a:ext cx="5486400" cy="3600450"/>
+          </a:xfrm>
+          <a:prstGeom prst="rect">
+            <a:avLst/>
+          </a:prstGeom>
+        </p:spPr>
+        <p:txBody>
+          <a:bodyPr vert="horz" lIns="91440" tIns="45720" rIns="91440" bIns="45720" rtlCol="0"/>
+          <a:lstStyle/>
+          <a:p>
+            <a:pPr lvl="0"/>
+            <a:r>
+              <a:rPr lang="en-US" smtClean="0"/>
+              <a:t>Edit Master text styles</a:t>
+            </a:r>
+          </a:p>
+          <a:p>
+            <a:pPr lvl="1"/>
+            <a:r>
+              <a:rPr lang="en-US" smtClean="0"/>
+              <a:t>Second level</a:t>
+            </a:r>
+          </a:p>
+          <a:p>
+            <a:pPr lvl="2"/>
+            <a:r>
+              <a:rPr lang="en-US" smtClean="0"/>
+              <a:t>Third level</a:t>
+            </a:r>
+          </a:p>
+          <a:p>
+            <a:pPr lvl="3"/>
+            <a:r>
+              <a:rPr lang="en-US" smtClean="0"/>
+              <a:t>Fourth level</a:t>
+            </a:r>
+          </a:p>
+          <a:p>
+            <a:pPr lvl="4"/>
+            <a:r>
+              <a:rPr lang="en-US" smtClean="0"/>
+              <a:t>Fifth level</a:t>
+            </a:r>
+            <a:endParaRPr lang="en-IN"/>
+          </a:p>
+        </p:txBody>
+      </p:sp>
+      <p:sp>
+        <p:nvSpPr>
+          <p:cNvPr id="6" name="Footer Placeholder 5"/>
+          <p:cNvSpPr>
+            <a:spLocks noGrp="1"/>
+          </p:cNvSpPr>
+          <p:nvPr>
+            <p:ph type="ftr" sz="quarter" idx="4"/>
+          </p:nvPr>
+        </p:nvSpPr>
+        <p:spPr>
+          <a:xfrm>
+            <a:off x="0" y="8685213"/>
+            <a:ext cx="2971800" cy="458787"/>
+          </a:xfrm>
+          <a:prstGeom prst="rect">
+            <a:avLst/>
+          </a:prstGeom>
+        </p:spPr>
+        <p:txBody>
+          <a:bodyPr vert="horz" lIns="91440" tIns="45720" rIns="91440" bIns="45720" rtlCol="0" anchor="b"/>
+          <a:lstStyle>
+            <a:lvl1pPr algn="l">
+              <a:defRPr sz="1200"/>
+            </a:lvl1pPr>
+          </a:lstStyle>
+          <a:p>
+            <a:endParaRPr lang="en-IN"/>
+          </a:p>
+        </p:txBody>
+      </p:sp>
+      <p:sp>
+        <p:nvSpPr>
+          <p:cNvPr id="7" name="Slide Number Placeholder 6"/>
+          <p:cNvSpPr>
+            <a:spLocks noGrp="1"/>
+          </p:cNvSpPr>
+          <p:nvPr>
+            <p:ph type="sldNum" sz="quarter" idx="5"/>
+          </p:nvPr>
+        </p:nvSpPr>
+        <p:spPr>
+          <a:xfrm>
+            <a:off x="3884613" y="8685213"/>
+            <a:ext cx="2971800" cy="458787"/>
+          </a:xfrm>
+          <a:prstGeom prst="rect">
+            <a:avLst/>
+          </a:prstGeom>
+        </p:spPr>
+        <p:txBody>
+          <a:bodyPr vert="horz" lIns="91440" tIns="45720" rIns="91440" bIns="45720" rtlCol="0" anchor="b"/>
+          <a:lstStyle>
+            <a:lvl1pPr algn="r">
+              <a:defRPr sz="1200"/>
+            </a:lvl1pPr>
+          </a:lstStyle>
+          <a:p>
+            <a:fld id="{8A2506B7-381B-40B9-ABCC-DD3A6A6B39DC}" type="slidenum">
+              <a:rPr lang="en-IN" smtClean="0"/>
+              <a:t>‹#›</a:t>
+            </a:fld>
+            <a:endParaRPr lang="en-IN"/>
+          </a:p>
+        </p:txBody>
+      </p:sp>
+    </p:spTree>
+    <p:extLst>
+      <p:ext uri="{BB962C8B-B14F-4D97-AF65-F5344CB8AC3E}">
+        <p14:creationId xmlns:p14="http://schemas.microsoft.com/office/powerpoint/2010/main" val="56461326"/>
+      </p:ext>
+    </p:extLst>
+  </p:cSld>
+  <p:clrMap bg1="lt1" tx1="dk1" bg2="lt2" tx2="dk2" accent1="accent1" accent2="accent2" accent3="accent3" accent4="accent4" accent5="accent5" accent6="accent6" hlink="hlink" folHlink="folHlink"/>
+  <p:notesStyle>
+    <a:lvl1pPr marL="0" algn="l" defTabSz="914400" rtl="0" eaLnBrk="1" latinLnBrk="0" hangingPunct="1">
+      <a:defRPr sz="1200" kern="1200">
+        <a:solidFill>
+          <a:schemeClr val="tx1"/>
+        </a:solidFill>
+        <a:latin typeface="+mn-lt"/>
+        <a:ea typeface="+mn-ea"/>
+        <a:cs typeface="+mn-cs"/>
+      </a:defRPr>
+    </a:lvl1pPr>
+    <a:lvl2pPr marL="457200" algn="l" defTabSz="914400" rtl="0" eaLnBrk="1" latinLnBrk="0" hangingPunct="1">
+      <a:defRPr sz="1200" kern="1200">
+        <a:solidFill>
+          <a:schemeClr val="tx1"/>
+        </a:solidFill>
+        <a:latin typeface="+mn-lt"/>
+        <a:ea typeface="+mn-ea"/>
+        <a:cs typeface="+mn-cs"/>
+      </a:defRPr>
+    </a:lvl2pPr>
+    <a:lvl3pPr marL="914400" algn="l" defTabSz="914400" rtl="0" eaLnBrk="1" latinLnBrk="0" hangingPunct="1">
+      <a:defRPr sz="1200" kern="1200">
+        <a:solidFill>
+          <a:schemeClr val="tx1"/>
+        </a:solidFill>
+        <a:latin typeface="+mn-lt"/>
+        <a:ea typeface="+mn-ea"/>
+        <a:cs typeface="+mn-cs"/>
+      </a:defRPr>
+    </a:lvl3pPr>
+    <a:lvl4pPr marL="1371600" algn="l" defTabSz="914400" rtl="0" eaLnBrk="1" latinLnBrk="0" hangingPunct="1">
+      <a:defRPr sz="1200" kern="1200">
+        <a:solidFill>
+          <a:schemeClr val="tx1"/>
+        </a:solidFill>
+        <a:latin typeface="+mn-lt"/>
+        <a:ea typeface="+mn-ea"/>
+        <a:cs typeface="+mn-cs"/>
+      </a:defRPr>
+    </a:lvl4pPr>
+    <a:lvl5pPr marL="1828800" algn="l" defTabSz="914400" rtl="0" eaLnBrk="1" latinLnBrk="0" hangingPunct="1">
+      <a:defRPr sz="1200" kern="1200">
+        <a:solidFill>
+          <a:schemeClr val="tx1"/>
+        </a:solidFill>
+        <a:latin typeface="+mn-lt"/>
+        <a:ea typeface="+mn-ea"/>
+        <a:cs typeface="+mn-cs"/>
+      </a:defRPr>
+    </a:lvl5pPr>
+    <a:lvl6pPr marL="2286000" algn="l" defTabSz="914400" rtl="0" eaLnBrk="1" latinLnBrk="0" hangingPunct="1">
+      <a:defRPr sz="1200" kern="1200">
+        <a:solidFill>
+          <a:schemeClr val="tx1"/>
+        </a:solidFill>
+        <a:latin typeface="+mn-lt"/>
+        <a:ea typeface="+mn-ea"/>
+        <a:cs typeface="+mn-cs"/>
+      </a:defRPr>
+    </a:lvl6pPr>
+    <a:lvl7pPr marL="2743200" algn="l" defTabSz="914400" rtl="0" eaLnBrk="1" latinLnBrk="0" hangingPunct="1">
+      <a:defRPr sz="1200" kern="1200">
+        <a:solidFill>
+          <a:schemeClr val="tx1"/>
+        </a:solidFill>
+        <a:latin typeface="+mn-lt"/>
+        <a:ea typeface="+mn-ea"/>
+        <a:cs typeface="+mn-cs"/>
+      </a:defRPr>
+    </a:lvl7pPr>
+    <a:lvl8pPr marL="3200400" algn="l" defTabSz="914400" rtl="0" eaLnBrk="1" latinLnBrk="0" hangingPunct="1">
+      <a:defRPr sz="1200" kern="1200">
+        <a:solidFill>
+          <a:schemeClr val="tx1"/>
+        </a:solidFill>
+        <a:latin typeface="+mn-lt"/>
+        <a:ea typeface="+mn-ea"/>
+        <a:cs typeface="+mn-cs"/>
+      </a:defRPr>
+    </a:lvl8pPr>
+    <a:lvl9pPr marL="3657600" algn="l" defTabSz="914400" rtl="0" eaLnBrk="1" latinLnBrk="0" hangingPunct="1">
+      <a:defRPr sz="1200" kern="1200">
+        <a:solidFill>
+          <a:schemeClr val="tx1"/>
+        </a:solidFill>
+        <a:latin typeface="+mn-lt"/>
+        <a:ea typeface="+mn-ea"/>
+        <a:cs typeface="+mn-cs"/>
+      </a:defRPr>
+    </a:lvl9pPr>
+  </p:notesStyle>
+</p:notesMaster>
+</file>
+
+<file path=ppt/notesSlides/notesSlide1.xml><?xml version="1.0" encoding="utf-8"?>
+<p:notes xmlns:a="http://schemas.openxmlformats.org/drawingml/2006/main" xmlns:r="http://schemas.openxmlformats.org/officeDocument/2006/relationships" xmlns:p="http://schemas.openxmlformats.org/presentationml/2006/main" showMasterSp="0" showMasterPhAnim="0">
+  <p:cSld>
+    <p:spTree>
+      <p:nvGrpSpPr>
+        <p:cNvPr id="1" name="Shape 113"/>
+        <p:cNvGrpSpPr/>
+        <p:nvPr/>
+      </p:nvGrpSpPr>
+      <p:grpSpPr>
+        <a:xfrm>
+          <a:off x="0" y="0"/>
+          <a:ext cx="0" cy="0"/>
+          <a:chOff x="0" y="0"/>
+          <a:chExt cx="0" cy="0"/>
+        </a:xfrm>
+      </p:grpSpPr>
+      <p:sp>
+        <p:nvSpPr>
+          <p:cNvPr id="114" name="Google Shape;114;p1:notes"/>
+          <p:cNvSpPr txBox="1">
+            <a:spLocks noGrp="1"/>
+          </p:cNvSpPr>
+          <p:nvPr>
+            <p:ph type="body" idx="1"/>
+          </p:nvPr>
+        </p:nvSpPr>
+        <p:spPr>
+          <a:xfrm>
+            <a:off x="685785" y="4343391"/>
+            <a:ext cx="5486386" cy="4114786"/>
+          </a:xfrm>
+          <a:prstGeom prst="rect">
+            <a:avLst/>
+          </a:prstGeom>
+          <a:noFill/>
+          <a:ln>
+            <a:noFill/>
+          </a:ln>
+        </p:spPr>
+        <p:txBody>
+          <a:bodyPr spcFirstLastPara="1" wrap="square" lIns="80152" tIns="80152" rIns="80152" bIns="80152" anchor="t" anchorCtr="0">
+            <a:noAutofit/>
+          </a:bodyPr>
+          <a:lstStyle/>
+          <a:p>
+            <a:pPr>
+              <a:buSzPts val="1100"/>
+            </a:pPr>
+            <a:endParaRPr/>
+          </a:p>
+        </p:txBody>
+      </p:sp>
+      <p:sp>
+        <p:nvSpPr>
+          <p:cNvPr id="115" name="Google Shape;115;p1:notes"/>
+          <p:cNvSpPr>
+            <a:spLocks noGrp="1" noRot="1" noChangeAspect="1"/>
+          </p:cNvSpPr>
+          <p:nvPr>
+            <p:ph type="sldImg" idx="2"/>
+          </p:nvPr>
+        </p:nvSpPr>
+        <p:spPr>
+          <a:xfrm>
+            <a:off x="1143000" y="685800"/>
+            <a:ext cx="4573588" cy="3429000"/>
+          </a:xfrm>
+          <a:custGeom>
+            <a:avLst/>
+            <a:gdLst/>
+            <a:ahLst/>
+            <a:cxnLst/>
+            <a:rect l="l" t="t" r="r" b="b"/>
+            <a:pathLst>
+              <a:path w="120000" h="120000" extrusionOk="0">
+                <a:moveTo>
+                  <a:pt x="0" y="0"/>
+                </a:moveTo>
+                <a:lnTo>
+                  <a:pt x="120000" y="0"/>
+                </a:lnTo>
+                <a:lnTo>
+                  <a:pt x="120000" y="120000"/>
+                </a:lnTo>
+                <a:lnTo>
+                  <a:pt x="0" y="120000"/>
+                </a:lnTo>
+                <a:close/>
+              </a:path>
+            </a:pathLst>
+          </a:custGeom>
+          <a:noFill/>
+          <a:ln w="9525" cap="flat" cmpd="sng">
+            <a:solidFill>
+              <a:srgbClr val="000000"/>
+            </a:solidFill>
+            <a:prstDash val="solid"/>
+            <a:round/>
+            <a:headEnd type="none" w="sm" len="sm"/>
+            <a:tailEnd type="none" w="sm" len="sm"/>
+          </a:ln>
+        </p:spPr>
+      </p:sp>
+    </p:spTree>
+    <p:extLst>
+      <p:ext uri="{BB962C8B-B14F-4D97-AF65-F5344CB8AC3E}">
+        <p14:creationId xmlns:p14="http://schemas.microsoft.com/office/powerpoint/2010/main" val="518188960"/>
+      </p:ext>
+    </p:extLst>
+  </p:cSld>
+  <p:clrMapOvr>
+    <a:masterClrMapping/>
+  </p:clrMapOvr>
+</p:notes>
 </file>
 
 <file path=ppt/slideLayouts/slideLayout1.xml><?xml version="1.0" encoding="utf-8"?>
@@ -470,7 +945,7 @@
           <a:p>
             <a:fld id="{5BCAD085-E8A6-8845-BD4E-CB4CCA059FC4}" type="datetimeFigureOut">
               <a:rPr lang="en-US" smtClean="0"/>
-              <a:t>1/14/2026</a:t>
+              <a:t>1/18/2026</a:t>
             </a:fld>
             <a:endParaRPr lang="en-US"/>
           </a:p>
@@ -794,7 +1269,7 @@
           <a:p>
             <a:fld id="{5BCAD085-E8A6-8845-BD4E-CB4CCA059FC4}" type="datetimeFigureOut">
               <a:rPr lang="en-US" smtClean="0"/>
-              <a:t>1/14/2026</a:t>
+              <a:t>1/18/2026</a:t>
             </a:fld>
             <a:endParaRPr lang="en-US"/>
           </a:p>
@@ -1042,7 +1517,7 @@
           <a:p>
             <a:fld id="{5BCAD085-E8A6-8845-BD4E-CB4CCA059FC4}" type="datetimeFigureOut">
               <a:rPr lang="en-US" smtClean="0"/>
-              <a:t>1/14/2026</a:t>
+              <a:t>1/18/2026</a:t>
             </a:fld>
             <a:endParaRPr lang="en-US"/>
           </a:p>
@@ -1381,7 +1856,7 @@
           <a:p>
             <a:fld id="{5BCAD085-E8A6-8845-BD4E-CB4CCA059FC4}" type="datetimeFigureOut">
               <a:rPr lang="en-US" smtClean="0"/>
-              <a:t>1/14/2026</a:t>
+              <a:t>1/18/2026</a:t>
             </a:fld>
             <a:endParaRPr lang="en-US"/>
           </a:p>
@@ -1728,7 +2203,7 @@
           <a:p>
             <a:fld id="{5BCAD085-E8A6-8845-BD4E-CB4CCA059FC4}" type="datetimeFigureOut">
               <a:rPr lang="en-US" smtClean="0"/>
-              <a:t>1/14/2026</a:t>
+              <a:t>1/18/2026</a:t>
             </a:fld>
             <a:endParaRPr lang="en-US"/>
           </a:p>
@@ -2102,7 +2577,7 @@
           <a:p>
             <a:fld id="{5BCAD085-E8A6-8845-BD4E-CB4CCA059FC4}" type="datetimeFigureOut">
               <a:rPr lang="en-US" smtClean="0"/>
-              <a:t>1/14/2026</a:t>
+              <a:t>1/18/2026</a:t>
             </a:fld>
             <a:endParaRPr lang="en-US"/>
           </a:p>
@@ -2572,7 +3047,7 @@
           <a:p>
             <a:fld id="{5BCAD085-E8A6-8845-BD4E-CB4CCA059FC4}" type="datetimeFigureOut">
               <a:rPr lang="en-US" smtClean="0"/>
-              <a:t>1/14/2026</a:t>
+              <a:t>1/18/2026</a:t>
             </a:fld>
             <a:endParaRPr lang="en-US"/>
           </a:p>
@@ -2782,7 +3257,7 @@
           <a:p>
             <a:fld id="{5BCAD085-E8A6-8845-BD4E-CB4CCA059FC4}" type="datetimeFigureOut">
               <a:rPr lang="en-US" smtClean="0"/>
-              <a:t>1/14/2026</a:t>
+              <a:t>1/18/2026</a:t>
             </a:fld>
             <a:endParaRPr lang="en-US"/>
           </a:p>
@@ -2993,7 +3468,7 @@
           <a:p>
             <a:fld id="{5BCAD085-E8A6-8845-BD4E-CB4CCA059FC4}" type="datetimeFigureOut">
               <a:rPr lang="en-US" smtClean="0"/>
-              <a:t>1/14/2026</a:t>
+              <a:t>1/18/2026</a:t>
             </a:fld>
             <a:endParaRPr lang="en-US"/>
           </a:p>
@@ -3225,7 +3700,7 @@
           <a:p>
             <a:fld id="{5BCAD085-E8A6-8845-BD4E-CB4CCA059FC4}" type="datetimeFigureOut">
               <a:rPr lang="en-US" smtClean="0"/>
-              <a:t>1/14/2026</a:t>
+              <a:t>1/18/2026</a:t>
             </a:fld>
             <a:endParaRPr lang="en-US"/>
           </a:p>
@@ -3473,7 +3948,7 @@
           <a:p>
             <a:fld id="{5BCAD085-E8A6-8845-BD4E-CB4CCA059FC4}" type="datetimeFigureOut">
               <a:rPr lang="en-US" smtClean="0"/>
-              <a:t>1/14/2026</a:t>
+              <a:t>1/18/2026</a:t>
             </a:fld>
             <a:endParaRPr lang="en-US"/>
           </a:p>
@@ -3776,7 +4251,7 @@
           <a:p>
             <a:fld id="{5BCAD085-E8A6-8845-BD4E-CB4CCA059FC4}" type="datetimeFigureOut">
               <a:rPr lang="en-US" smtClean="0"/>
-              <a:t>1/14/2026</a:t>
+              <a:t>1/18/2026</a:t>
             </a:fld>
             <a:endParaRPr lang="en-US"/>
           </a:p>
@@ -4158,7 +4633,7 @@
           <a:p>
             <a:fld id="{5BCAD085-E8A6-8845-BD4E-CB4CCA059FC4}" type="datetimeFigureOut">
               <a:rPr lang="en-US" smtClean="0"/>
-              <a:t>1/14/2026</a:t>
+              <a:t>1/18/2026</a:t>
             </a:fld>
             <a:endParaRPr lang="en-US"/>
           </a:p>
@@ -4312,7 +4787,7 @@
           <a:p>
             <a:fld id="{5BCAD085-E8A6-8845-BD4E-CB4CCA059FC4}" type="datetimeFigureOut">
               <a:rPr lang="en-US" smtClean="0"/>
-              <a:t>1/14/2026</a:t>
+              <a:t>1/18/2026</a:t>
             </a:fld>
             <a:endParaRPr lang="en-US"/>
           </a:p>
@@ -4438,7 +4913,7 @@
           <a:p>
             <a:fld id="{5BCAD085-E8A6-8845-BD4E-CB4CCA059FC4}" type="datetimeFigureOut">
               <a:rPr lang="en-US" smtClean="0"/>
-              <a:t>1/14/2026</a:t>
+              <a:t>1/18/2026</a:t>
             </a:fld>
             <a:endParaRPr lang="en-US"/>
           </a:p>
@@ -4693,7 +5168,7 @@
           <a:p>
             <a:fld id="{5BCAD085-E8A6-8845-BD4E-CB4CCA059FC4}" type="datetimeFigureOut">
               <a:rPr lang="en-US" smtClean="0"/>
-              <a:t>1/14/2026</a:t>
+              <a:t>1/18/2026</a:t>
             </a:fld>
             <a:endParaRPr lang="en-US"/>
           </a:p>
@@ -5007,7 +5482,7 @@
           <a:p>
             <a:fld id="{5BCAD085-E8A6-8845-BD4E-CB4CCA059FC4}" type="datetimeFigureOut">
               <a:rPr lang="en-US" smtClean="0"/>
-              <a:t>1/14/2026</a:t>
+              <a:t>1/18/2026</a:t>
             </a:fld>
             <a:endParaRPr lang="en-US"/>
           </a:p>
@@ -5358,7 +5833,7 @@
           <a:p>
             <a:fld id="{5BCAD085-E8A6-8845-BD4E-CB4CCA059FC4}" type="datetimeFigureOut">
               <a:rPr lang="en-US" smtClean="0"/>
-              <a:t>1/14/2026</a:t>
+              <a:t>1/18/2026</a:t>
             </a:fld>
             <a:endParaRPr lang="en-US"/>
           </a:p>
@@ -5889,6 +6364,1033 @@
   <p:cSld>
     <p:spTree>
       <p:nvGrpSpPr>
+        <p:cNvPr id="1" name="Shape 116"/>
+        <p:cNvGrpSpPr/>
+        <p:nvPr/>
+      </p:nvGrpSpPr>
+      <p:grpSpPr>
+        <a:xfrm>
+          <a:off x="0" y="0"/>
+          <a:ext cx="0" cy="0"/>
+          <a:chOff x="0" y="0"/>
+          <a:chExt cx="0" cy="0"/>
+        </a:xfrm>
+      </p:grpSpPr>
+      <p:sp>
+        <p:nvSpPr>
+          <p:cNvPr id="117" name="Google Shape;117;p1"/>
+          <p:cNvSpPr/>
+          <p:nvPr/>
+        </p:nvSpPr>
+        <p:spPr>
+          <a:xfrm>
+            <a:off x="559836" y="564934"/>
+            <a:ext cx="8005665" cy="5707801"/>
+          </a:xfrm>
+          <a:prstGeom prst="rect">
+            <a:avLst/>
+          </a:prstGeom>
+          <a:noFill/>
+          <a:ln w="57225" cap="flat" cmpd="sng">
+            <a:solidFill>
+              <a:srgbClr val="2E75B5"/>
+            </a:solidFill>
+            <a:prstDash val="solid"/>
+            <a:round/>
+            <a:headEnd type="none" w="sm" len="sm"/>
+            <a:tailEnd type="none" w="sm" len="sm"/>
+          </a:ln>
+        </p:spPr>
+        <p:txBody>
+          <a:bodyPr spcFirstLastPara="1" wrap="square" lIns="90000" tIns="45000" rIns="90000" bIns="45000" anchor="t" anchorCtr="0">
+            <a:spAutoFit/>
+          </a:bodyPr>
+          <a:lstStyle/>
+          <a:p>
+            <a:pPr marL="0" marR="0" lvl="0" indent="0" algn="ctr" rtl="0">
+              <a:lnSpc>
+                <a:spcPct val="100000"/>
+              </a:lnSpc>
+              <a:spcBef>
+                <a:spcPts val="0"/>
+              </a:spcBef>
+              <a:spcAft>
+                <a:spcPts val="0"/>
+              </a:spcAft>
+              <a:buClr>
+                <a:srgbClr val="000000"/>
+              </a:buClr>
+              <a:buSzPts val="1600"/>
+              <a:buFont typeface="Arial"/>
+              <a:buNone/>
+            </a:pPr>
+            <a:r>
+              <a:rPr lang="en-US" sz="1400" b="0" i="0" u="none" strike="noStrike" cap="none" dirty="0">
+                <a:solidFill>
+                  <a:srgbClr val="000000"/>
+                </a:solidFill>
+                <a:latin typeface="Times New Roman"/>
+                <a:ea typeface="Times New Roman"/>
+                <a:cs typeface="Times New Roman"/>
+                <a:sym typeface="Times New Roman"/>
+              </a:rPr>
+              <a:t> </a:t>
+            </a:r>
+          </a:p>
+          <a:p>
+            <a:pPr lvl="0" algn="ctr">
+              <a:buClr>
+                <a:srgbClr val="000000"/>
+              </a:buClr>
+              <a:buSzPts val="1600"/>
+            </a:pPr>
+            <a:r>
+              <a:rPr lang="en-US" sz="1100" dirty="0" smtClean="0">
+                <a:latin typeface="Times New Roman" panose="02020603050405020304" pitchFamily="18" charset="0"/>
+                <a:cs typeface="Times New Roman" pitchFamily="18" charset="0"/>
+              </a:rPr>
+              <a:t>A</a:t>
+            </a:r>
+            <a:br>
+              <a:rPr lang="en-US" sz="1100" dirty="0" smtClean="0">
+                <a:latin typeface="Times New Roman" panose="02020603050405020304" pitchFamily="18" charset="0"/>
+                <a:cs typeface="Times New Roman" pitchFamily="18" charset="0"/>
+              </a:rPr>
+            </a:br>
+            <a:r>
+              <a:rPr lang="en-US" sz="1400" dirty="0" smtClean="0">
+                <a:latin typeface="Times New Roman" panose="02020603050405020304" pitchFamily="18" charset="0"/>
+                <a:cs typeface="Times New Roman" pitchFamily="18" charset="0"/>
+              </a:rPr>
+              <a:t>Project Review-I Presentation </a:t>
+            </a:r>
+            <a:br>
+              <a:rPr lang="en-US" sz="1400" dirty="0" smtClean="0">
+                <a:latin typeface="Times New Roman" panose="02020603050405020304" pitchFamily="18" charset="0"/>
+                <a:cs typeface="Times New Roman" pitchFamily="18" charset="0"/>
+              </a:rPr>
+            </a:br>
+            <a:r>
+              <a:rPr lang="en-US" sz="1400" dirty="0" smtClean="0">
+                <a:latin typeface="Times New Roman" panose="02020603050405020304" pitchFamily="18" charset="0"/>
+                <a:cs typeface="Times New Roman" pitchFamily="18" charset="0"/>
+              </a:rPr>
+              <a:t>on</a:t>
+            </a:r>
+            <a:br>
+              <a:rPr lang="en-US" sz="1400" dirty="0" smtClean="0">
+                <a:latin typeface="Times New Roman" panose="02020603050405020304" pitchFamily="18" charset="0"/>
+                <a:cs typeface="Times New Roman" pitchFamily="18" charset="0"/>
+              </a:rPr>
+            </a:br>
+            <a:r>
+              <a:rPr lang="en-GB" sz="1600" b="1" dirty="0" err="1"/>
+              <a:t>BiLSTM</a:t>
+            </a:r>
+            <a:r>
+              <a:rPr lang="en-GB" sz="1600" b="1" dirty="0"/>
+              <a:t>-based Indian Legal Case Summarization and Q&amp;A System</a:t>
+            </a:r>
+            <a:endParaRPr lang="en-US" sz="1400" b="1" i="0" u="none" strike="noStrike" cap="none" dirty="0" smtClean="0">
+              <a:solidFill>
+                <a:srgbClr val="000000"/>
+              </a:solidFill>
+              <a:latin typeface="Times New Roman"/>
+              <a:ea typeface="Times New Roman"/>
+              <a:cs typeface="Times New Roman"/>
+              <a:sym typeface="Times New Roman"/>
+            </a:endParaRPr>
+          </a:p>
+          <a:p>
+            <a:pPr lvl="0" algn="ctr">
+              <a:buClr>
+                <a:srgbClr val="000000"/>
+              </a:buClr>
+              <a:buSzPts val="1600"/>
+            </a:pPr>
+            <a:r>
+              <a:rPr lang="en-US" sz="1400" b="0" i="0" u="none" strike="noStrike" cap="none" dirty="0" smtClean="0">
+                <a:solidFill>
+                  <a:srgbClr val="000000"/>
+                </a:solidFill>
+                <a:latin typeface="Times New Roman"/>
+                <a:ea typeface="Times New Roman"/>
+                <a:cs typeface="Times New Roman"/>
+                <a:sym typeface="Times New Roman"/>
+              </a:rPr>
+              <a:t>Submitted in partial fulfillment of </a:t>
+            </a:r>
+            <a:r>
+              <a:rPr lang="en-US" sz="1400" dirty="0" smtClean="0">
+                <a:latin typeface="Times New Roman" pitchFamily="18" charset="0"/>
+                <a:cs typeface="Times New Roman" pitchFamily="18" charset="0"/>
+              </a:rPr>
+              <a:t>Final Year Computer Engineering Course- Major Project </a:t>
+            </a:r>
+          </a:p>
+          <a:p>
+            <a:pPr lvl="0" algn="ctr">
+              <a:buClr>
+                <a:srgbClr val="000000"/>
+              </a:buClr>
+              <a:buSzPts val="1600"/>
+            </a:pPr>
+            <a:r>
+              <a:rPr lang="en-US" sz="1400" i="0" u="none" strike="noStrike" cap="none" dirty="0" smtClean="0">
+                <a:solidFill>
+                  <a:srgbClr val="000000"/>
+                </a:solidFill>
+                <a:latin typeface="Times New Roman"/>
+                <a:ea typeface="Times New Roman"/>
+                <a:cs typeface="Times New Roman"/>
+                <a:sym typeface="Times New Roman"/>
+              </a:rPr>
+              <a:t>In </a:t>
+            </a:r>
+            <a:endParaRPr sz="1400" i="0" u="none" strike="noStrike" cap="none" dirty="0" smtClean="0">
+              <a:solidFill>
+                <a:srgbClr val="000000"/>
+              </a:solidFill>
+              <a:latin typeface="Arial"/>
+              <a:ea typeface="Arial"/>
+              <a:cs typeface="Arial"/>
+              <a:sym typeface="Arial"/>
+            </a:endParaRPr>
+          </a:p>
+          <a:p>
+            <a:pPr marL="0" marR="0" lvl="0" indent="0" algn="ctr" rtl="0">
+              <a:lnSpc>
+                <a:spcPct val="100000"/>
+              </a:lnSpc>
+              <a:spcBef>
+                <a:spcPts val="0"/>
+              </a:spcBef>
+              <a:spcAft>
+                <a:spcPts val="0"/>
+              </a:spcAft>
+              <a:buClr>
+                <a:srgbClr val="000000"/>
+              </a:buClr>
+              <a:buSzPts val="1600"/>
+              <a:buFont typeface="Arial"/>
+              <a:buNone/>
+            </a:pPr>
+            <a:r>
+              <a:rPr lang="en-US" sz="1400" i="0" u="none" strike="noStrike" cap="none" dirty="0" smtClean="0">
+                <a:solidFill>
+                  <a:srgbClr val="000000"/>
+                </a:solidFill>
+                <a:latin typeface="Times New Roman"/>
+                <a:ea typeface="Times New Roman"/>
+                <a:cs typeface="Times New Roman"/>
+                <a:sym typeface="Times New Roman"/>
+              </a:rPr>
+              <a:t>Department of Computer Engineering</a:t>
+            </a:r>
+            <a:endParaRPr sz="1400" i="0" u="none" strike="noStrike" cap="none" dirty="0" smtClean="0">
+              <a:solidFill>
+                <a:srgbClr val="000000"/>
+              </a:solidFill>
+              <a:latin typeface="Arial"/>
+              <a:ea typeface="Arial"/>
+              <a:cs typeface="Arial"/>
+              <a:sym typeface="Arial"/>
+            </a:endParaRPr>
+          </a:p>
+          <a:p>
+            <a:pPr marL="0" marR="0" lvl="0" indent="0" algn="ctr" rtl="0">
+              <a:lnSpc>
+                <a:spcPct val="100000"/>
+              </a:lnSpc>
+              <a:spcBef>
+                <a:spcPts val="0"/>
+              </a:spcBef>
+              <a:spcAft>
+                <a:spcPts val="0"/>
+              </a:spcAft>
+              <a:buClr>
+                <a:srgbClr val="000000"/>
+              </a:buClr>
+              <a:buSzPts val="1600"/>
+              <a:buFont typeface="Arial"/>
+              <a:buNone/>
+            </a:pPr>
+            <a:r>
+              <a:rPr lang="en-US" sz="1400" i="0" u="none" strike="noStrike" cap="none" dirty="0" smtClean="0">
+                <a:solidFill>
+                  <a:srgbClr val="000000"/>
+                </a:solidFill>
+                <a:latin typeface="Times New Roman"/>
+                <a:ea typeface="Times New Roman"/>
+                <a:cs typeface="Times New Roman"/>
+                <a:sym typeface="Times New Roman"/>
+              </a:rPr>
+              <a:t>By</a:t>
+            </a:r>
+            <a:endParaRPr sz="1400" i="0" u="none" strike="noStrike" cap="none" dirty="0" smtClean="0">
+              <a:solidFill>
+                <a:srgbClr val="000000"/>
+              </a:solidFill>
+              <a:latin typeface="Arial"/>
+              <a:ea typeface="Arial"/>
+              <a:cs typeface="Arial"/>
+              <a:sym typeface="Arial"/>
+            </a:endParaRPr>
+          </a:p>
+          <a:p>
+            <a:pPr algn="ctr"/>
+            <a:r>
+              <a:rPr lang="en-IN" sz="1400" b="1" dirty="0" err="1"/>
+              <a:t>Prathmesh</a:t>
+            </a:r>
+            <a:r>
+              <a:rPr lang="en-IN" sz="1400" b="1" dirty="0"/>
+              <a:t> </a:t>
+            </a:r>
+            <a:r>
+              <a:rPr lang="en-IN" sz="1400" b="1" dirty="0" err="1"/>
+              <a:t>Dudhale</a:t>
+            </a:r>
+            <a:r>
+              <a:rPr lang="en-IN" sz="1400" b="1" dirty="0"/>
+              <a:t> </a:t>
+            </a:r>
+            <a:r>
+              <a:rPr lang="en-IN" sz="1400" b="1" dirty="0" smtClean="0"/>
+              <a:t>(122B1B078)</a:t>
+            </a:r>
+            <a:endParaRPr lang="en-IN" sz="1400" b="1" dirty="0"/>
+          </a:p>
+          <a:p>
+            <a:pPr algn="ctr"/>
+            <a:r>
+              <a:rPr lang="en-IN" sz="1400" b="1" dirty="0" smtClean="0"/>
+              <a:t>Aditya Joshi (122B1B110)</a:t>
+            </a:r>
+            <a:endParaRPr lang="en-IN" sz="1400" b="1" dirty="0"/>
+          </a:p>
+          <a:p>
+            <a:pPr algn="ctr"/>
+            <a:r>
+              <a:rPr lang="en-IN" sz="1400" b="1" dirty="0" err="1"/>
+              <a:t>Aaditesh</a:t>
+            </a:r>
+            <a:r>
+              <a:rPr lang="en-IN" sz="1400" b="1" dirty="0"/>
+              <a:t> </a:t>
+            </a:r>
+            <a:r>
+              <a:rPr lang="en-IN" sz="1400" b="1" dirty="0" err="1" smtClean="0"/>
+              <a:t>Kadu</a:t>
+            </a:r>
+            <a:r>
+              <a:rPr lang="en-IN" sz="1400" b="1" dirty="0" smtClean="0"/>
+              <a:t> (122B1B122)</a:t>
+            </a:r>
+          </a:p>
+          <a:p>
+            <a:pPr algn="ctr"/>
+            <a:r>
+              <a:rPr lang="en-IN" sz="1400" b="1" dirty="0" smtClean="0"/>
+              <a:t>Vedant Kale (122B1B124)</a:t>
+            </a:r>
+            <a:endParaRPr lang="en-IN" sz="1400" b="1" dirty="0"/>
+          </a:p>
+          <a:p>
+            <a:pPr marL="0" marR="0" lvl="0" indent="0" algn="ctr" rtl="0">
+              <a:lnSpc>
+                <a:spcPct val="100000"/>
+              </a:lnSpc>
+              <a:spcBef>
+                <a:spcPts val="0"/>
+              </a:spcBef>
+              <a:spcAft>
+                <a:spcPts val="0"/>
+              </a:spcAft>
+              <a:buClr>
+                <a:srgbClr val="000000"/>
+              </a:buClr>
+              <a:buSzPts val="1600"/>
+              <a:buFont typeface="Arial"/>
+              <a:buNone/>
+            </a:pPr>
+            <a:endParaRPr lang="en-US" sz="1400" b="0" i="0" u="none" strike="noStrike" cap="none" dirty="0" smtClean="0">
+              <a:solidFill>
+                <a:srgbClr val="000000"/>
+              </a:solidFill>
+              <a:latin typeface="Times New Roman"/>
+              <a:ea typeface="Times New Roman"/>
+              <a:cs typeface="Times New Roman"/>
+              <a:sym typeface="Times New Roman"/>
+            </a:endParaRPr>
+          </a:p>
+          <a:p>
+            <a:pPr marL="0" marR="0" lvl="0" indent="0" algn="ctr" rtl="0">
+              <a:lnSpc>
+                <a:spcPct val="100000"/>
+              </a:lnSpc>
+              <a:spcBef>
+                <a:spcPts val="0"/>
+              </a:spcBef>
+              <a:spcAft>
+                <a:spcPts val="0"/>
+              </a:spcAft>
+              <a:buClr>
+                <a:srgbClr val="000000"/>
+              </a:buClr>
+              <a:buSzPts val="1600"/>
+              <a:buFont typeface="Arial"/>
+              <a:buNone/>
+            </a:pPr>
+            <a:r>
+              <a:rPr lang="en-US" sz="1400" b="0" i="0" u="none" strike="noStrike" cap="none" dirty="0" smtClean="0">
+                <a:solidFill>
+                  <a:srgbClr val="000000"/>
+                </a:solidFill>
+                <a:latin typeface="Times New Roman"/>
+                <a:ea typeface="Times New Roman"/>
+                <a:cs typeface="Times New Roman"/>
+                <a:sym typeface="Times New Roman"/>
+              </a:rPr>
+              <a:t>Under the Guidance of </a:t>
+            </a:r>
+            <a:endParaRPr lang="en-IN" sz="1400" dirty="0" smtClean="0">
+              <a:ea typeface="Times New Roman"/>
+            </a:endParaRPr>
+          </a:p>
+          <a:p>
+            <a:pPr algn="ctr">
+              <a:buClr>
+                <a:srgbClr val="000000"/>
+              </a:buClr>
+              <a:buSzPts val="1600"/>
+            </a:pPr>
+            <a:r>
+              <a:rPr lang="en-IN" sz="1400" b="1" dirty="0" err="1" smtClean="0">
+                <a:latin typeface="Times New Roman"/>
+                <a:ea typeface="Times New Roman"/>
+                <a:cs typeface="Times New Roman"/>
+                <a:sym typeface="Times New Roman"/>
+              </a:rPr>
+              <a:t>Prof.</a:t>
+            </a:r>
+            <a:r>
+              <a:rPr lang="en-IN" sz="1400" b="1" dirty="0" smtClean="0">
+                <a:latin typeface="Times New Roman"/>
+                <a:ea typeface="Times New Roman"/>
+                <a:cs typeface="Times New Roman"/>
+                <a:sym typeface="Times New Roman"/>
+              </a:rPr>
+              <a:t> </a:t>
+            </a:r>
+            <a:r>
+              <a:rPr lang="en-GB" sz="1400" dirty="0" err="1"/>
+              <a:t>Sushma</a:t>
+            </a:r>
+            <a:r>
+              <a:rPr lang="en-GB" sz="1400" dirty="0"/>
+              <a:t> </a:t>
+            </a:r>
+            <a:r>
+              <a:rPr lang="en-GB" sz="1400" dirty="0" err="1"/>
+              <a:t>Vispute</a:t>
+            </a:r>
+            <a:endParaRPr lang="en-GB" sz="1400" dirty="0"/>
+          </a:p>
+          <a:p>
+            <a:pPr marL="0" marR="0" lvl="0" indent="0" algn="ctr" rtl="0">
+              <a:lnSpc>
+                <a:spcPct val="100000"/>
+              </a:lnSpc>
+              <a:spcBef>
+                <a:spcPts val="0"/>
+              </a:spcBef>
+              <a:spcAft>
+                <a:spcPts val="0"/>
+              </a:spcAft>
+              <a:buClr>
+                <a:srgbClr val="000000"/>
+              </a:buClr>
+              <a:buSzPts val="1600"/>
+              <a:buFont typeface="Arial"/>
+              <a:buNone/>
+            </a:pPr>
+            <a:r>
+              <a:rPr lang="en-IN" sz="1400" b="1" dirty="0" smtClean="0">
+                <a:solidFill>
+                  <a:schemeClr val="dk1"/>
+                </a:solidFill>
+                <a:latin typeface="Times New Roman"/>
+                <a:ea typeface="Times New Roman"/>
+                <a:cs typeface="Times New Roman"/>
+                <a:sym typeface="Times New Roman"/>
+              </a:rPr>
+              <a:t>______________</a:t>
+            </a:r>
+            <a:endParaRPr lang="en-IN" sz="1400" b="1" dirty="0" smtClean="0">
+              <a:solidFill>
+                <a:schemeClr val="dk1"/>
+              </a:solidFill>
+              <a:ea typeface="Times New Roman"/>
+            </a:endParaRPr>
+          </a:p>
+          <a:p>
+            <a:pPr marL="3200400" marR="0" lvl="0" indent="457200" algn="l" rtl="0">
+              <a:lnSpc>
+                <a:spcPct val="100000"/>
+              </a:lnSpc>
+              <a:spcBef>
+                <a:spcPts val="0"/>
+              </a:spcBef>
+              <a:spcAft>
+                <a:spcPts val="0"/>
+              </a:spcAft>
+              <a:buClr>
+                <a:srgbClr val="000000"/>
+              </a:buClr>
+              <a:buSzPts val="1800"/>
+              <a:buFont typeface="Arial"/>
+              <a:buNone/>
+            </a:pPr>
+            <a:r>
+              <a:rPr lang="en-US" sz="1400" b="1" i="0" u="none" strike="noStrike" cap="none" dirty="0" smtClean="0">
+                <a:solidFill>
+                  <a:srgbClr val="000000"/>
+                </a:solidFill>
+                <a:latin typeface="Times New Roman"/>
+                <a:ea typeface="Times New Roman"/>
+                <a:cs typeface="Times New Roman"/>
+                <a:sym typeface="Times New Roman"/>
+              </a:rPr>
+              <a:t>	</a:t>
+            </a:r>
+            <a:endParaRPr lang="en-US" sz="1600" b="1" i="0" u="none" strike="noStrike" cap="none" dirty="0" smtClean="0">
+              <a:solidFill>
+                <a:srgbClr val="000000"/>
+              </a:solidFill>
+              <a:latin typeface="Times New Roman"/>
+              <a:ea typeface="Times New Roman"/>
+              <a:cs typeface="Times New Roman"/>
+              <a:sym typeface="Times New Roman"/>
+            </a:endParaRPr>
+          </a:p>
+          <a:p>
+            <a:pPr marL="3200400" marR="0" lvl="0" indent="457200" algn="l" rtl="0">
+              <a:lnSpc>
+                <a:spcPct val="100000"/>
+              </a:lnSpc>
+              <a:spcBef>
+                <a:spcPts val="0"/>
+              </a:spcBef>
+              <a:spcAft>
+                <a:spcPts val="0"/>
+              </a:spcAft>
+              <a:buClr>
+                <a:srgbClr val="000000"/>
+              </a:buClr>
+              <a:buSzPts val="1800"/>
+              <a:buFont typeface="Arial"/>
+              <a:buNone/>
+            </a:pPr>
+            <a:endParaRPr sz="1600" b="0" i="0" u="none" strike="noStrike" cap="none" dirty="0" smtClean="0">
+              <a:solidFill>
+                <a:srgbClr val="000000"/>
+              </a:solidFill>
+              <a:latin typeface="Arial"/>
+              <a:ea typeface="Arial"/>
+              <a:cs typeface="Arial"/>
+              <a:sym typeface="Arial"/>
+            </a:endParaRPr>
+          </a:p>
+          <a:p>
+            <a:pPr marL="0" marR="0" lvl="0" indent="0" algn="ctr" rtl="0">
+              <a:lnSpc>
+                <a:spcPct val="100000"/>
+              </a:lnSpc>
+              <a:spcBef>
+                <a:spcPts val="0"/>
+              </a:spcBef>
+              <a:spcAft>
+                <a:spcPts val="0"/>
+              </a:spcAft>
+              <a:buClr>
+                <a:srgbClr val="000000"/>
+              </a:buClr>
+              <a:buSzPts val="1600"/>
+              <a:buFont typeface="Arial"/>
+              <a:buNone/>
+            </a:pPr>
+            <a:endParaRPr sz="1400" b="0" i="0" u="none" strike="noStrike" cap="none" dirty="0" smtClean="0">
+              <a:solidFill>
+                <a:srgbClr val="000000"/>
+              </a:solidFill>
+              <a:latin typeface="Arial"/>
+              <a:ea typeface="Arial"/>
+              <a:cs typeface="Arial"/>
+              <a:sym typeface="Arial"/>
+            </a:endParaRPr>
+          </a:p>
+          <a:p>
+            <a:pPr marL="0" marR="0" lvl="0" indent="0" algn="ctr" rtl="0">
+              <a:lnSpc>
+                <a:spcPct val="100000"/>
+              </a:lnSpc>
+              <a:spcBef>
+                <a:spcPts val="0"/>
+              </a:spcBef>
+              <a:spcAft>
+                <a:spcPts val="0"/>
+              </a:spcAft>
+              <a:buClr>
+                <a:srgbClr val="000000"/>
+              </a:buClr>
+              <a:buSzPts val="1600"/>
+              <a:buFont typeface="Arial"/>
+              <a:buNone/>
+            </a:pPr>
+            <a:endParaRPr sz="1400" b="0" i="0" u="none" strike="noStrike" cap="none" dirty="0" smtClean="0">
+              <a:solidFill>
+                <a:srgbClr val="000000"/>
+              </a:solidFill>
+              <a:latin typeface="Arial"/>
+              <a:ea typeface="Arial"/>
+              <a:cs typeface="Arial"/>
+              <a:sym typeface="Arial"/>
+            </a:endParaRPr>
+          </a:p>
+          <a:p>
+            <a:pPr marL="0" marR="0" lvl="0" indent="0" algn="ctr" rtl="0">
+              <a:lnSpc>
+                <a:spcPct val="100000"/>
+              </a:lnSpc>
+              <a:spcBef>
+                <a:spcPts val="0"/>
+              </a:spcBef>
+              <a:spcAft>
+                <a:spcPts val="0"/>
+              </a:spcAft>
+              <a:buClr>
+                <a:srgbClr val="000000"/>
+              </a:buClr>
+              <a:buSzPts val="1600"/>
+              <a:buFont typeface="Arial"/>
+              <a:buNone/>
+            </a:pPr>
+            <a:endParaRPr sz="1400" b="0" i="0" u="none" strike="noStrike" cap="none" dirty="0" smtClean="0">
+              <a:solidFill>
+                <a:srgbClr val="000000"/>
+              </a:solidFill>
+              <a:latin typeface="Arial"/>
+              <a:ea typeface="Arial"/>
+              <a:cs typeface="Arial"/>
+              <a:sym typeface="Arial"/>
+            </a:endParaRPr>
+          </a:p>
+          <a:p>
+            <a:pPr lvl="0" algn="ctr">
+              <a:buClr>
+                <a:srgbClr val="000000"/>
+              </a:buClr>
+              <a:buSzPts val="1400"/>
+            </a:pPr>
+            <a:r>
+              <a:rPr lang="en-US" sz="1400" b="1" dirty="0" smtClean="0">
+                <a:latin typeface="Times New Roman" panose="02020603050405020304" pitchFamily="18" charset="0"/>
+                <a:cs typeface="Times New Roman" panose="02020603050405020304" pitchFamily="18" charset="0"/>
+              </a:rPr>
+              <a:t>Department of Computer Engineering</a:t>
+            </a:r>
+            <a:r>
+              <a:rPr lang="en-US" sz="1100" b="1" dirty="0" smtClean="0">
+                <a:latin typeface="Times New Roman" panose="02020603050405020304" pitchFamily="18" charset="0"/>
+                <a:cs typeface="Times New Roman" panose="02020603050405020304" pitchFamily="18" charset="0"/>
+              </a:rPr>
+              <a:t/>
+            </a:r>
+            <a:br>
+              <a:rPr lang="en-US" sz="1100" b="1" dirty="0" smtClean="0">
+                <a:latin typeface="Times New Roman" panose="02020603050405020304" pitchFamily="18" charset="0"/>
+                <a:cs typeface="Times New Roman" panose="02020603050405020304" pitchFamily="18" charset="0"/>
+              </a:rPr>
+            </a:br>
+            <a:r>
+              <a:rPr lang="en-US" sz="1400" b="1" dirty="0" smtClean="0">
+                <a:latin typeface="Times New Roman" panose="02020603050405020304" pitchFamily="18" charset="0"/>
+                <a:cs typeface="Times New Roman" panose="02020603050405020304" pitchFamily="18" charset="0"/>
+              </a:rPr>
+              <a:t>PCET’s </a:t>
+            </a:r>
+            <a:r>
+              <a:rPr lang="en-US" sz="1400" b="1" dirty="0" err="1" smtClean="0">
+                <a:latin typeface="Times New Roman" panose="02020603050405020304" pitchFamily="18" charset="0"/>
+                <a:cs typeface="Times New Roman" panose="02020603050405020304" pitchFamily="18" charset="0"/>
+              </a:rPr>
+              <a:t>Pimpri</a:t>
+            </a:r>
+            <a:r>
+              <a:rPr lang="en-US" sz="1400" b="1" dirty="0" smtClean="0">
+                <a:latin typeface="Times New Roman" panose="02020603050405020304" pitchFamily="18" charset="0"/>
+                <a:cs typeface="Times New Roman" panose="02020603050405020304" pitchFamily="18" charset="0"/>
+              </a:rPr>
+              <a:t> </a:t>
+            </a:r>
+            <a:r>
+              <a:rPr lang="en-US" sz="1400" b="1" dirty="0" err="1" smtClean="0">
+                <a:latin typeface="Times New Roman" panose="02020603050405020304" pitchFamily="18" charset="0"/>
+                <a:cs typeface="Times New Roman" panose="02020603050405020304" pitchFamily="18" charset="0"/>
+              </a:rPr>
+              <a:t>Chinchwad</a:t>
+            </a:r>
+            <a:r>
+              <a:rPr lang="en-US" sz="1400" b="1" dirty="0" smtClean="0">
+                <a:latin typeface="Times New Roman" panose="02020603050405020304" pitchFamily="18" charset="0"/>
+                <a:cs typeface="Times New Roman" panose="02020603050405020304" pitchFamily="18" charset="0"/>
+              </a:rPr>
+              <a:t> College of Engineering</a:t>
+            </a:r>
+          </a:p>
+          <a:p>
+            <a:pPr lvl="0" algn="ctr">
+              <a:buClr>
+                <a:srgbClr val="000000"/>
+              </a:buClr>
+              <a:buSzPts val="1400"/>
+            </a:pPr>
+            <a:r>
+              <a:rPr lang="en-US" sz="1400" dirty="0" smtClean="0">
+                <a:latin typeface="Times New Roman" panose="02020603050405020304" pitchFamily="18" charset="0"/>
+                <a:cs typeface="Times New Roman" panose="02020603050405020304" pitchFamily="18" charset="0"/>
+              </a:rPr>
+              <a:t>(A. Y. 2025-26)</a:t>
+            </a:r>
+            <a:endParaRPr sz="1100" b="0" i="0" u="none" strike="noStrike" cap="none" dirty="0">
+              <a:solidFill>
+                <a:srgbClr val="000000"/>
+              </a:solidFill>
+              <a:latin typeface="Arial"/>
+              <a:ea typeface="Arial"/>
+              <a:cs typeface="Arial"/>
+              <a:sym typeface="Arial"/>
+            </a:endParaRPr>
+          </a:p>
+        </p:txBody>
+      </p:sp>
+      <p:sp>
+        <p:nvSpPr>
+          <p:cNvPr id="118" name="Google Shape;118;p1"/>
+          <p:cNvSpPr/>
+          <p:nvPr/>
+        </p:nvSpPr>
+        <p:spPr>
+          <a:xfrm>
+            <a:off x="-451170" y="1341360"/>
+            <a:ext cx="128250" cy="171000"/>
+          </a:xfrm>
+          <a:prstGeom prst="rect">
+            <a:avLst/>
+          </a:prstGeom>
+          <a:noFill/>
+          <a:ln>
+            <a:noFill/>
+          </a:ln>
+        </p:spPr>
+        <p:txBody>
+          <a:bodyPr spcFirstLastPara="1" wrap="square" lIns="91425" tIns="91425" rIns="91425" bIns="91425" anchor="ctr" anchorCtr="0">
+            <a:noAutofit/>
+          </a:bodyPr>
+          <a:lstStyle/>
+          <a:p>
+            <a:pPr marL="0" marR="0" lvl="0" indent="0" algn="l" rtl="0">
+              <a:lnSpc>
+                <a:spcPct val="100000"/>
+              </a:lnSpc>
+              <a:spcBef>
+                <a:spcPts val="0"/>
+              </a:spcBef>
+              <a:spcAft>
+                <a:spcPts val="0"/>
+              </a:spcAft>
+              <a:buClr>
+                <a:srgbClr val="000000"/>
+              </a:buClr>
+              <a:buSzPts val="1400"/>
+              <a:buFont typeface="Arial"/>
+              <a:buNone/>
+            </a:pPr>
+            <a:endParaRPr sz="1400" b="0" i="0" u="none" strike="noStrike" cap="none">
+              <a:solidFill>
+                <a:srgbClr val="000000"/>
+              </a:solidFill>
+              <a:latin typeface="Arial"/>
+              <a:ea typeface="Arial"/>
+              <a:cs typeface="Arial"/>
+              <a:sym typeface="Arial"/>
+            </a:endParaRPr>
+          </a:p>
+        </p:txBody>
+      </p:sp>
+      <p:sp>
+        <p:nvSpPr>
+          <p:cNvPr id="119" name="Google Shape;119;p1"/>
+          <p:cNvSpPr/>
+          <p:nvPr/>
+        </p:nvSpPr>
+        <p:spPr>
+          <a:xfrm>
+            <a:off x="2065770" y="1418760"/>
+            <a:ext cx="128250" cy="171000"/>
+          </a:xfrm>
+          <a:prstGeom prst="rect">
+            <a:avLst/>
+          </a:prstGeom>
+          <a:noFill/>
+          <a:ln>
+            <a:noFill/>
+          </a:ln>
+        </p:spPr>
+        <p:txBody>
+          <a:bodyPr spcFirstLastPara="1" wrap="square" lIns="91425" tIns="91425" rIns="91425" bIns="91425" anchor="ctr" anchorCtr="0">
+            <a:noAutofit/>
+          </a:bodyPr>
+          <a:lstStyle/>
+          <a:p>
+            <a:pPr marL="0" marR="0" lvl="0" indent="0" algn="l" rtl="0">
+              <a:lnSpc>
+                <a:spcPct val="100000"/>
+              </a:lnSpc>
+              <a:spcBef>
+                <a:spcPts val="0"/>
+              </a:spcBef>
+              <a:spcAft>
+                <a:spcPts val="0"/>
+              </a:spcAft>
+              <a:buClr>
+                <a:srgbClr val="000000"/>
+              </a:buClr>
+              <a:buSzPts val="1400"/>
+              <a:buFont typeface="Arial"/>
+              <a:buNone/>
+            </a:pPr>
+            <a:endParaRPr sz="1400" b="0" i="0" u="none" strike="noStrike" cap="none">
+              <a:solidFill>
+                <a:srgbClr val="000000"/>
+              </a:solidFill>
+              <a:latin typeface="Arial"/>
+              <a:ea typeface="Arial"/>
+              <a:cs typeface="Arial"/>
+              <a:sym typeface="Arial"/>
+            </a:endParaRPr>
+          </a:p>
+        </p:txBody>
+      </p:sp>
+      <p:sp>
+        <p:nvSpPr>
+          <p:cNvPr id="122" name="Google Shape;122;p1"/>
+          <p:cNvSpPr txBox="1"/>
+          <p:nvPr/>
+        </p:nvSpPr>
+        <p:spPr>
+          <a:xfrm>
+            <a:off x="6616004" y="6375239"/>
+            <a:ext cx="2057130" cy="364680"/>
+          </a:xfrm>
+          <a:prstGeom prst="rect">
+            <a:avLst/>
+          </a:prstGeom>
+          <a:noFill/>
+          <a:ln>
+            <a:noFill/>
+          </a:ln>
+        </p:spPr>
+        <p:txBody>
+          <a:bodyPr spcFirstLastPara="1" wrap="square" lIns="91425" tIns="45700" rIns="91425" bIns="45700" anchor="ctr" anchorCtr="0">
+            <a:noAutofit/>
+          </a:bodyPr>
+          <a:lstStyle/>
+          <a:p>
+            <a:pPr marL="0" marR="0" lvl="0" indent="0" algn="r" rtl="0">
+              <a:lnSpc>
+                <a:spcPct val="100000"/>
+              </a:lnSpc>
+              <a:spcBef>
+                <a:spcPts val="0"/>
+              </a:spcBef>
+              <a:spcAft>
+                <a:spcPts val="0"/>
+              </a:spcAft>
+              <a:buClr>
+                <a:srgbClr val="000000"/>
+              </a:buClr>
+              <a:buSzPts val="1200"/>
+              <a:buFont typeface="Arial"/>
+              <a:buNone/>
+            </a:pPr>
+            <a:fld id="{00000000-1234-1234-1234-123412341234}" type="slidenum">
+              <a:rPr lang="en-US" sz="1200" b="0" i="0" u="none" strike="noStrike" cap="none">
+                <a:solidFill>
+                  <a:srgbClr val="8B8B8B"/>
+                </a:solidFill>
+                <a:latin typeface="Calibri"/>
+                <a:ea typeface="Calibri"/>
+                <a:cs typeface="Calibri"/>
+                <a:sym typeface="Calibri"/>
+              </a:rPr>
+              <a:pPr marL="0" marR="0" lvl="0" indent="0" algn="r" rtl="0">
+                <a:lnSpc>
+                  <a:spcPct val="100000"/>
+                </a:lnSpc>
+                <a:spcBef>
+                  <a:spcPts val="0"/>
+                </a:spcBef>
+                <a:spcAft>
+                  <a:spcPts val="0"/>
+                </a:spcAft>
+                <a:buClr>
+                  <a:srgbClr val="000000"/>
+                </a:buClr>
+                <a:buSzPts val="1200"/>
+                <a:buFont typeface="Arial"/>
+                <a:buNone/>
+              </a:pPr>
+              <a:t>1</a:t>
+            </a:fld>
+            <a:endParaRPr sz="1200" b="0" i="0" u="none" strike="noStrike" cap="none" dirty="0">
+              <a:solidFill>
+                <a:srgbClr val="000000"/>
+              </a:solidFill>
+              <a:latin typeface="Times New Roman"/>
+              <a:ea typeface="Times New Roman"/>
+              <a:cs typeface="Times New Roman"/>
+              <a:sym typeface="Times New Roman"/>
+            </a:endParaRPr>
+          </a:p>
+        </p:txBody>
+      </p:sp>
+      <p:sp>
+        <p:nvSpPr>
+          <p:cNvPr id="16386" name="Rectangle 2"/>
+          <p:cNvSpPr>
+            <a:spLocks noChangeArrowheads="1"/>
+          </p:cNvSpPr>
+          <p:nvPr/>
+        </p:nvSpPr>
+        <p:spPr bwMode="auto">
+          <a:xfrm>
+            <a:off x="0" y="0"/>
+            <a:ext cx="9144000" cy="0"/>
+          </a:xfrm>
+          <a:prstGeom prst="rect">
+            <a:avLst/>
+          </a:prstGeom>
+          <a:noFill/>
+          <a:ln w="9525">
+            <a:noFill/>
+            <a:miter lim="800000"/>
+            <a:headEnd/>
+            <a:tailEnd/>
+          </a:ln>
+          <a:effectLst/>
+        </p:spPr>
+        <p:txBody>
+          <a:bodyPr vert="horz" wrap="none" lIns="91440" tIns="45720" rIns="91440" bIns="45720" numCol="1" anchor="ctr" anchorCtr="0" compatLnSpc="1">
+            <a:prstTxWarp prst="textNoShape">
+              <a:avLst/>
+            </a:prstTxWarp>
+            <a:spAutoFit/>
+          </a:bodyPr>
+          <a:lstStyle/>
+          <a:p>
+            <a:endParaRPr lang="en-US"/>
+          </a:p>
+        </p:txBody>
+      </p:sp>
+      <p:graphicFrame>
+        <p:nvGraphicFramePr>
+          <p:cNvPr id="16385" name="Object 1"/>
+          <p:cNvGraphicFramePr>
+            <a:graphicFrameLocks noChangeAspect="1"/>
+          </p:cNvGraphicFramePr>
+          <p:nvPr>
+            <p:extLst>
+              <p:ext uri="{D42A27DB-BD31-4B8C-83A1-F6EECF244321}">
+                <p14:modId xmlns:p14="http://schemas.microsoft.com/office/powerpoint/2010/main" val="1553242464"/>
+              </p:ext>
+            </p:extLst>
+          </p:nvPr>
+        </p:nvGraphicFramePr>
+        <p:xfrm>
+          <a:off x="3950283" y="4243874"/>
+          <a:ext cx="1276350" cy="1038225"/>
+        </p:xfrm>
+        <a:graphic>
+          <a:graphicData uri="http://schemas.openxmlformats.org/presentationml/2006/ole">
+            <mc:AlternateContent xmlns:mc="http://schemas.openxmlformats.org/markup-compatibility/2006">
+              <mc:Choice xmlns:v="urn:schemas-microsoft-com:vml" Requires="v">
+                <p:oleObj spid="_x0000_s4101" name="Bitmap Image" r:id="rId4" imgW="708866" imgH="606790" progId="PBrush">
+                  <p:embed/>
+                </p:oleObj>
+              </mc:Choice>
+              <mc:Fallback>
+                <p:oleObj name="Bitmap Image" r:id="rId4" imgW="708866" imgH="606790" progId="PBrush">
+                  <p:embed/>
+                  <p:pic>
+                    <p:nvPicPr>
+                      <p:cNvPr id="16385" name="Object 1"/>
+                      <p:cNvPicPr>
+                        <a:picLocks noChangeAspect="1" noChangeArrowheads="1"/>
+                      </p:cNvPicPr>
+                      <p:nvPr/>
+                    </p:nvPicPr>
+                    <p:blipFill>
+                      <a:blip r:embed="rId5">
+                        <a:extLst>
+                          <a:ext uri="{28A0092B-C50C-407E-A947-70E740481C1C}">
+                            <a14:useLocalDpi xmlns:a14="http://schemas.microsoft.com/office/drawing/2010/main" val="0"/>
+                          </a:ext>
+                        </a:extLst>
+                      </a:blip>
+                      <a:srcRect/>
+                      <a:stretch>
+                        <a:fillRect/>
+                      </a:stretch>
+                    </p:blipFill>
+                    <p:spPr bwMode="auto">
+                      <a:xfrm>
+                        <a:off x="3950283" y="4243874"/>
+                        <a:ext cx="1276350" cy="1038225"/>
+                      </a:xfrm>
+                      <a:prstGeom prst="rect">
+                        <a:avLst/>
+                      </a:prstGeom>
+                      <a:solidFill>
+                        <a:srgbClr val="FFFFFF"/>
+                      </a:solidFill>
+                    </p:spPr>
+                  </p:pic>
+                </p:oleObj>
+              </mc:Fallback>
+            </mc:AlternateContent>
+          </a:graphicData>
+        </a:graphic>
+      </p:graphicFrame>
+    </p:spTree>
+    <p:extLst>
+      <p:ext uri="{BB962C8B-B14F-4D97-AF65-F5344CB8AC3E}">
+        <p14:creationId xmlns:p14="http://schemas.microsoft.com/office/powerpoint/2010/main" val="579751700"/>
+      </p:ext>
+    </p:extLst>
+  </p:cSld>
+  <p:clrMapOvr>
+    <a:masterClrMapping/>
+  </p:clrMapOvr>
+</p:sld>
+</file>
+
+<file path=ppt/slides/slide10.xml><?xml version="1.0" encoding="utf-8"?>
+<p:sld xmlns:a="http://schemas.openxmlformats.org/drawingml/2006/main" xmlns:r="http://schemas.openxmlformats.org/officeDocument/2006/relationships" xmlns:p="http://schemas.openxmlformats.org/presentationml/2006/main">
+  <p:cSld>
+    <p:spTree>
+      <p:nvGrpSpPr>
         <p:cNvPr id="1" name=""/>
         <p:cNvGrpSpPr/>
         <p:nvPr/>
@@ -5908,44 +7410,35 @@
             <a:spLocks noGrp="1"/>
           </p:cNvSpPr>
           <p:nvPr>
-            <p:ph type="ctrTitle"/>
+            <p:ph type="title"/>
+          </p:nvPr>
+        </p:nvSpPr>
+        <p:spPr/>
+        <p:txBody>
+          <a:bodyPr/>
+          <a:lstStyle/>
+          <a:p>
+            <a:r>
+              <a:rPr dirty="0"/>
+              <a:t>Requirement Analysis</a:t>
+            </a:r>
+          </a:p>
+        </p:txBody>
+      </p:sp>
+      <p:sp>
+        <p:nvSpPr>
+          <p:cNvPr id="3" name="Content Placeholder 2"/>
+          <p:cNvSpPr>
+            <a:spLocks noGrp="1"/>
+          </p:cNvSpPr>
+          <p:nvPr>
+            <p:ph idx="1"/>
           </p:nvPr>
         </p:nvSpPr>
         <p:spPr>
           <a:xfrm>
-            <a:off x="918767" y="1662573"/>
-            <a:ext cx="7315199" cy="1515533"/>
-          </a:xfrm>
-        </p:spPr>
-        <p:txBody>
-          <a:bodyPr/>
-          <a:lstStyle/>
-          <a:p>
-            <a:r>
-              <a:rPr sz="3600" dirty="0" err="1"/>
-              <a:t>BiLSTM</a:t>
-            </a:r>
-            <a:r>
-              <a:rPr sz="3600" dirty="0"/>
-              <a:t>-based Indian Legal Case Summarization and Q&amp;A System</a:t>
-            </a:r>
-          </a:p>
-        </p:txBody>
-      </p:sp>
-      <p:sp>
-        <p:nvSpPr>
-          <p:cNvPr id="3" name="Subtitle 2"/>
-          <p:cNvSpPr>
-            <a:spLocks noGrp="1"/>
-          </p:cNvSpPr>
-          <p:nvPr>
-            <p:ph type="subTitle" idx="1"/>
-          </p:nvPr>
-        </p:nvSpPr>
-        <p:spPr>
-          <a:xfrm>
-            <a:off x="1921933" y="3601540"/>
-            <a:ext cx="5308866" cy="1377651"/>
+            <a:off x="821265" y="1911638"/>
+            <a:ext cx="7509935" cy="3444997"/>
           </a:xfrm>
         </p:spPr>
         <p:txBody>
@@ -5954,163 +7447,97 @@
           </a:bodyPr>
           <a:lstStyle/>
           <a:p>
-            <a:r>
-              <a:rPr dirty="0" smtClean="0"/>
-              <a:t>Team </a:t>
-            </a:r>
-            <a:r>
-              <a:rPr dirty="0"/>
-              <a:t>Members:</a:t>
-            </a:r>
-          </a:p>
-          <a:p>
-            <a:r>
-              <a:rPr dirty="0" err="1"/>
-              <a:t>Prathmesh</a:t>
-            </a:r>
-            <a:r>
-              <a:rPr dirty="0"/>
+            <a:endParaRPr sz="2000" dirty="0"/>
+          </a:p>
+          <a:p>
+            <a:r>
+              <a:rPr sz="2000" dirty="0"/>
+              <a:t>Functional Requirements</a:t>
+            </a:r>
+          </a:p>
+          <a:p>
+            <a:pPr lvl="1"/>
+            <a:r>
+              <a:rPr sz="1800" dirty="0"/>
+              <a:t>Input: PDF/DOCX Legal Documents.</a:t>
+            </a:r>
+          </a:p>
+          <a:p>
+            <a:pPr lvl="1"/>
+            <a:r>
+              <a:rPr sz="1800" dirty="0"/>
+              <a:t>Core: Abstractive Summarization &amp; Fact-based Q&amp;A.</a:t>
+            </a:r>
+          </a:p>
+          <a:p>
+            <a:r>
+              <a:rPr sz="2000" dirty="0"/>
+              <a:t>Non-Functional Requirements</a:t>
+            </a:r>
+          </a:p>
+          <a:p>
+            <a:pPr lvl="1"/>
+            <a:r>
+              <a:rPr sz="1800" dirty="0"/>
+              <a:t>Performance: High ROUGE-L scores </a:t>
+            </a:r>
+            <a:r>
+              <a:rPr sz="1800" dirty="0" smtClean="0"/>
+              <a:t>(&gt;</a:t>
+            </a:r>
+            <a:r>
+              <a:rPr lang="en-IN" sz="1800" dirty="0"/>
               <a:t> </a:t>
             </a:r>
             <a:r>
-              <a:rPr dirty="0" err="1"/>
-              <a:t>Dudhale</a:t>
-            </a:r>
-            <a:r>
-              <a:rPr dirty="0"/>
-              <a:t> | Aditya Joshi</a:t>
-            </a:r>
-          </a:p>
-          <a:p>
-            <a:r>
-              <a:rPr dirty="0" err="1"/>
-              <a:t>Aaditesh</a:t>
-            </a:r>
-            <a:r>
-              <a:rPr dirty="0"/>
-              <a:t> </a:t>
-            </a:r>
-            <a:r>
-              <a:rPr dirty="0" err="1"/>
-              <a:t>Kadu</a:t>
-            </a:r>
-            <a:r>
-              <a:rPr dirty="0"/>
-              <a:t> | Vedant Kale</a:t>
-            </a:r>
-          </a:p>
-          <a:p>
-            <a:endParaRPr dirty="0"/>
-          </a:p>
-        </p:txBody>
-      </p:sp>
-      <p:sp>
-        <p:nvSpPr>
-          <p:cNvPr id="4" name="Rectangle 3"/>
-          <p:cNvSpPr/>
-          <p:nvPr/>
-        </p:nvSpPr>
-        <p:spPr>
-          <a:xfrm>
-            <a:off x="4814596" y="5804439"/>
-            <a:ext cx="4572000" cy="1015663"/>
-          </a:xfrm>
-          <a:prstGeom prst="rect">
-            <a:avLst/>
-          </a:prstGeom>
-        </p:spPr>
-        <p:txBody>
-          <a:bodyPr>
-            <a:spAutoFit/>
-          </a:bodyPr>
-          <a:lstStyle/>
-          <a:p>
-            <a:r>
-              <a:rPr lang="en-GB" sz="2000" dirty="0">
-                <a:solidFill>
-                  <a:schemeClr val="bg1"/>
-                </a:solidFill>
-              </a:rPr>
-              <a:t>Guide: Mrs. </a:t>
-            </a:r>
-            <a:r>
-              <a:rPr lang="en-GB" sz="2000" dirty="0" err="1">
-                <a:solidFill>
-                  <a:schemeClr val="bg1"/>
-                </a:solidFill>
-              </a:rPr>
-              <a:t>Sushma</a:t>
-            </a:r>
-            <a:r>
-              <a:rPr lang="en-GB" sz="2000" dirty="0">
-                <a:solidFill>
-                  <a:schemeClr val="bg1"/>
-                </a:solidFill>
-              </a:rPr>
-              <a:t> </a:t>
-            </a:r>
-            <a:r>
-              <a:rPr lang="en-GB" sz="2000" dirty="0" err="1">
-                <a:solidFill>
-                  <a:schemeClr val="bg1"/>
-                </a:solidFill>
-              </a:rPr>
-              <a:t>Vispute</a:t>
-            </a:r>
-            <a:endParaRPr lang="en-GB" sz="2000" dirty="0">
-              <a:solidFill>
-                <a:schemeClr val="bg1"/>
-              </a:solidFill>
-            </a:endParaRPr>
-          </a:p>
-          <a:p>
-            <a:r>
-              <a:rPr lang="en-GB" sz="2000" dirty="0">
-                <a:solidFill>
-                  <a:schemeClr val="bg1"/>
-                </a:solidFill>
-              </a:rPr>
-              <a:t>Department of Computer Engineering</a:t>
-            </a:r>
-          </a:p>
-          <a:p>
-            <a:r>
-              <a:rPr lang="en-GB" sz="2000" dirty="0" err="1">
-                <a:solidFill>
-                  <a:schemeClr val="bg1"/>
-                </a:solidFill>
-              </a:rPr>
-              <a:t>Pimpri</a:t>
-            </a:r>
-            <a:r>
-              <a:rPr lang="en-GB" sz="2000" dirty="0">
-                <a:solidFill>
-                  <a:schemeClr val="bg1"/>
-                </a:solidFill>
-              </a:rPr>
-              <a:t> </a:t>
-            </a:r>
-            <a:r>
-              <a:rPr lang="en-GB" sz="2000" dirty="0" err="1">
-                <a:solidFill>
-                  <a:schemeClr val="bg1"/>
-                </a:solidFill>
-              </a:rPr>
-              <a:t>Chinchwad</a:t>
-            </a:r>
-            <a:r>
-              <a:rPr lang="en-GB" sz="2000" dirty="0">
-                <a:solidFill>
-                  <a:schemeClr val="bg1"/>
-                </a:solidFill>
-              </a:rPr>
-              <a:t> College of Engineering</a:t>
-            </a:r>
-            <a:endParaRPr lang="en-GB" sz="2000" dirty="0">
-              <a:solidFill>
-                <a:schemeClr val="bg1"/>
-              </a:solidFill>
-            </a:endParaRPr>
+              <a:rPr lang="en-IN" sz="1800" dirty="0" smtClean="0"/>
+              <a:t>0.70 </a:t>
+            </a:r>
+            <a:r>
+              <a:rPr sz="1800" dirty="0" smtClean="0"/>
+              <a:t>).</a:t>
+            </a:r>
+            <a:endParaRPr sz="1800" dirty="0"/>
+          </a:p>
+          <a:p>
+            <a:pPr lvl="1"/>
+            <a:r>
+              <a:rPr sz="1800" dirty="0"/>
+              <a:t>Latency: Near real-time processing (&lt;6s per doc).</a:t>
+            </a:r>
+          </a:p>
+          <a:p>
+            <a:r>
+              <a:rPr sz="2000" dirty="0"/>
+              <a:t>Dataset Requirements</a:t>
+            </a:r>
+          </a:p>
+          <a:p>
+            <a:pPr lvl="1"/>
+            <a:r>
+              <a:rPr sz="1800" dirty="0"/>
+              <a:t>Source: Supreme Court &amp; High Court </a:t>
+            </a:r>
+            <a:r>
+              <a:rPr sz="1800" dirty="0" smtClean="0"/>
+              <a:t>Judgments</a:t>
+            </a:r>
+            <a:r>
+              <a:rPr lang="en-IN" sz="1800" dirty="0" smtClean="0"/>
+              <a:t> (Web Scraping)</a:t>
+            </a:r>
+            <a:r>
+              <a:rPr sz="1800" dirty="0" smtClean="0"/>
+              <a:t>.</a:t>
+            </a:r>
+            <a:endParaRPr sz="1800" dirty="0"/>
+          </a:p>
+          <a:p>
+            <a:pPr lvl="1"/>
+            <a:r>
+              <a:rPr sz="1800" dirty="0"/>
+              <a:t>Size: 150 Documents (2000 - 50,000 words each).</a:t>
+            </a:r>
           </a:p>
         </p:txBody>
       </p:sp>
@@ -6122,7 +7549,234 @@
 </p:sld>
 </file>
 
-<file path=ppt/slides/slide10.xml><?xml version="1.0" encoding="utf-8"?>
+<file path=ppt/slides/slide11.xml><?xml version="1.0" encoding="utf-8"?>
+<p:sld xmlns:a="http://schemas.openxmlformats.org/drawingml/2006/main" xmlns:r="http://schemas.openxmlformats.org/officeDocument/2006/relationships" xmlns:p="http://schemas.openxmlformats.org/presentationml/2006/main">
+  <p:cSld>
+    <p:spTree>
+      <p:nvGrpSpPr>
+        <p:cNvPr id="1" name=""/>
+        <p:cNvGrpSpPr/>
+        <p:nvPr/>
+      </p:nvGrpSpPr>
+      <p:grpSpPr>
+        <a:xfrm>
+          <a:off x="0" y="0"/>
+          <a:ext cx="0" cy="0"/>
+          <a:chOff x="0" y="0"/>
+          <a:chExt cx="0" cy="0"/>
+        </a:xfrm>
+      </p:grpSpPr>
+      <p:sp>
+        <p:nvSpPr>
+          <p:cNvPr id="2" name="Title 1"/>
+          <p:cNvSpPr>
+            <a:spLocks noGrp="1"/>
+          </p:cNvSpPr>
+          <p:nvPr>
+            <p:ph type="title"/>
+          </p:nvPr>
+        </p:nvSpPr>
+        <p:spPr/>
+        <p:txBody>
+          <a:bodyPr/>
+          <a:lstStyle/>
+          <a:p>
+            <a:r>
+              <a:t>Project Planning Timeline</a:t>
+            </a:r>
+          </a:p>
+        </p:txBody>
+      </p:sp>
+      <p:sp>
+        <p:nvSpPr>
+          <p:cNvPr id="8" name="Rectangle 7"/>
+          <p:cNvSpPr/>
+          <p:nvPr/>
+        </p:nvSpPr>
+        <p:spPr>
+          <a:xfrm>
+            <a:off x="774440" y="1567270"/>
+            <a:ext cx="8220269" cy="4454809"/>
+          </a:xfrm>
+          <a:prstGeom prst="rect">
+            <a:avLst/>
+          </a:prstGeom>
+        </p:spPr>
+        <p:txBody>
+          <a:bodyPr wrap="square">
+            <a:spAutoFit/>
+          </a:bodyPr>
+          <a:lstStyle/>
+          <a:p>
+            <a:pPr>
+              <a:lnSpc>
+                <a:spcPct val="150000"/>
+              </a:lnSpc>
+            </a:pPr>
+            <a:endParaRPr lang="en-GB" sz="3200" dirty="0"/>
+          </a:p>
+          <a:p>
+            <a:pPr lvl="1">
+              <a:lnSpc>
+                <a:spcPct val="150000"/>
+              </a:lnSpc>
+            </a:pPr>
+            <a:r>
+              <a:rPr lang="en-GB" sz="3200" dirty="0"/>
+              <a:t>• Phase 1: Dataset + </a:t>
+            </a:r>
+            <a:r>
+              <a:rPr lang="en-GB" sz="3200" dirty="0" err="1"/>
+              <a:t>Preprocessing</a:t>
+            </a:r>
+            <a:endParaRPr lang="en-GB" sz="3200" dirty="0"/>
+          </a:p>
+          <a:p>
+            <a:pPr lvl="1">
+              <a:lnSpc>
+                <a:spcPct val="150000"/>
+              </a:lnSpc>
+            </a:pPr>
+            <a:r>
+              <a:rPr lang="en-GB" sz="3200" dirty="0"/>
+              <a:t>• Phase 2: Model Development</a:t>
+            </a:r>
+          </a:p>
+          <a:p>
+            <a:pPr lvl="1">
+              <a:lnSpc>
+                <a:spcPct val="150000"/>
+              </a:lnSpc>
+            </a:pPr>
+            <a:r>
+              <a:rPr lang="en-GB" sz="3200" dirty="0"/>
+              <a:t>• Phase 3: Evaluation &amp; Metrics</a:t>
+            </a:r>
+          </a:p>
+          <a:p>
+            <a:pPr lvl="1">
+              <a:lnSpc>
+                <a:spcPct val="150000"/>
+              </a:lnSpc>
+            </a:pPr>
+            <a:r>
+              <a:rPr lang="en-GB" sz="3200" dirty="0"/>
+              <a:t>• Phase 4: UI + Deployment</a:t>
+            </a:r>
+          </a:p>
+          <a:p>
+            <a:pPr lvl="1">
+              <a:lnSpc>
+                <a:spcPct val="150000"/>
+              </a:lnSpc>
+            </a:pPr>
+            <a:r>
+              <a:rPr lang="en-GB" sz="3200" dirty="0"/>
+              <a:t>• Phase 5: Paper publication</a:t>
+            </a:r>
+          </a:p>
+        </p:txBody>
+      </p:sp>
+    </p:spTree>
+  </p:cSld>
+  <p:clrMapOvr>
+    <a:masterClrMapping/>
+  </p:clrMapOvr>
+</p:sld>
+</file>
+
+<file path=ppt/slides/slide12.xml><?xml version="1.0" encoding="utf-8"?>
+<p:sld xmlns:a="http://schemas.openxmlformats.org/drawingml/2006/main" xmlns:r="http://schemas.openxmlformats.org/officeDocument/2006/relationships" xmlns:p="http://schemas.openxmlformats.org/presentationml/2006/main">
+  <p:cSld>
+    <p:spTree>
+      <p:nvGrpSpPr>
+        <p:cNvPr id="1" name=""/>
+        <p:cNvGrpSpPr/>
+        <p:nvPr/>
+      </p:nvGrpSpPr>
+      <p:grpSpPr>
+        <a:xfrm>
+          <a:off x="0" y="0"/>
+          <a:ext cx="0" cy="0"/>
+          <a:chOff x="0" y="0"/>
+          <a:chExt cx="0" cy="0"/>
+        </a:xfrm>
+      </p:grpSpPr>
+      <p:sp>
+        <p:nvSpPr>
+          <p:cNvPr id="2" name="Title 1"/>
+          <p:cNvSpPr>
+            <a:spLocks noGrp="1"/>
+          </p:cNvSpPr>
+          <p:nvPr>
+            <p:ph type="title"/>
+          </p:nvPr>
+        </p:nvSpPr>
+        <p:spPr>
+          <a:xfrm>
+            <a:off x="682342" y="2692276"/>
+            <a:ext cx="3632202" cy="1371600"/>
+          </a:xfrm>
+        </p:spPr>
+        <p:txBody>
+          <a:bodyPr>
+            <a:noAutofit/>
+          </a:bodyPr>
+          <a:lstStyle/>
+          <a:p>
+            <a:r>
+              <a:rPr sz="4400" dirty="0"/>
+              <a:t>System Architecture</a:t>
+            </a:r>
+          </a:p>
+        </p:txBody>
+      </p:sp>
+      <p:pic>
+        <p:nvPicPr>
+          <p:cNvPr id="17" name="Picture 16"/>
+          <p:cNvPicPr>
+            <a:picLocks noChangeAspect="1"/>
+          </p:cNvPicPr>
+          <p:nvPr/>
+        </p:nvPicPr>
+        <p:blipFill>
+          <a:blip r:embed="rId2"/>
+          <a:stretch>
+            <a:fillRect/>
+          </a:stretch>
+        </p:blipFill>
+        <p:spPr>
+          <a:xfrm>
+            <a:off x="4520133" y="696967"/>
+            <a:ext cx="2647149" cy="5362218"/>
+          </a:xfrm>
+          <a:prstGeom prst="roundRect">
+            <a:avLst>
+              <a:gd name="adj" fmla="val 8594"/>
+            </a:avLst>
+          </a:prstGeom>
+          <a:solidFill>
+            <a:srgbClr val="FFFFFF">
+              <a:shade val="85000"/>
+            </a:srgbClr>
+          </a:solidFill>
+          <a:ln>
+            <a:noFill/>
+          </a:ln>
+          <a:effectLst>
+            <a:reflection blurRad="12700" stA="38000" endPos="28000" dist="5000" dir="5400000" sy="-100000" algn="bl" rotWithShape="0"/>
+          </a:effectLst>
+        </p:spPr>
+      </p:pic>
+    </p:spTree>
+  </p:cSld>
+  <p:clrMapOvr>
+    <a:masterClrMapping/>
+  </p:clrMapOvr>
+</p:sld>
+</file>
+
+<file path=ppt/slides/slide13.xml><?xml version="1.0" encoding="utf-8"?>
 <p:sld xmlns:a="http://schemas.openxmlformats.org/drawingml/2006/main" xmlns:r="http://schemas.openxmlformats.org/officeDocument/2006/relationships" xmlns:p="http://schemas.openxmlformats.org/presentationml/2006/main">
   <p:cSld>
     <p:spTree>
@@ -6226,620 +7880,6 @@
 </p:sld>
 </file>
 
-<file path=ppt/slides/slide11.xml><?xml version="1.0" encoding="utf-8"?>
-<p:sld xmlns:a="http://schemas.openxmlformats.org/drawingml/2006/main" xmlns:r="http://schemas.openxmlformats.org/officeDocument/2006/relationships" xmlns:p="http://schemas.openxmlformats.org/presentationml/2006/main">
-  <p:cSld>
-    <p:spTree>
-      <p:nvGrpSpPr>
-        <p:cNvPr id="1" name=""/>
-        <p:cNvGrpSpPr/>
-        <p:nvPr/>
-      </p:nvGrpSpPr>
-      <p:grpSpPr>
-        <a:xfrm>
-          <a:off x="0" y="0"/>
-          <a:ext cx="0" cy="0"/>
-          <a:chOff x="0" y="0"/>
-          <a:chExt cx="0" cy="0"/>
-        </a:xfrm>
-      </p:grpSpPr>
-      <p:sp>
-        <p:nvSpPr>
-          <p:cNvPr id="2" name="Title 1"/>
-          <p:cNvSpPr>
-            <a:spLocks noGrp="1"/>
-          </p:cNvSpPr>
-          <p:nvPr>
-            <p:ph type="title"/>
-          </p:nvPr>
-        </p:nvSpPr>
-        <p:spPr/>
-        <p:txBody>
-          <a:bodyPr/>
-          <a:lstStyle/>
-          <a:p>
-            <a:r>
-              <a:t>Dataset Design &amp; Preprocessing</a:t>
-            </a:r>
-          </a:p>
-        </p:txBody>
-      </p:sp>
-      <p:sp>
-        <p:nvSpPr>
-          <p:cNvPr id="3" name="Content Placeholder 2"/>
-          <p:cNvSpPr>
-            <a:spLocks noGrp="1"/>
-          </p:cNvSpPr>
-          <p:nvPr>
-            <p:ph idx="1"/>
-          </p:nvPr>
-        </p:nvSpPr>
-        <p:spPr>
-          <a:xfrm>
-            <a:off x="980920" y="1892633"/>
-            <a:ext cx="7556589" cy="3444997"/>
-          </a:xfrm>
-        </p:spPr>
-        <p:txBody>
-          <a:bodyPr>
-            <a:noAutofit/>
-          </a:bodyPr>
-          <a:lstStyle/>
-          <a:p>
-            <a:endParaRPr dirty="0"/>
-          </a:p>
-          <a:p>
-            <a:r>
-              <a:rPr dirty="0"/>
-              <a:t>Dataset Composition</a:t>
-            </a:r>
-          </a:p>
-          <a:p>
-            <a:pPr lvl="1"/>
-            <a:r>
-              <a:rPr sz="1800" dirty="0"/>
-              <a:t>Total Documents: 150 (Indian Legal Context)</a:t>
-            </a:r>
-          </a:p>
-          <a:p>
-            <a:pPr lvl="1"/>
-            <a:r>
-              <a:rPr sz="1800" dirty="0"/>
-              <a:t>Split: 120 Training / 30 Testing.</a:t>
-            </a:r>
-          </a:p>
-          <a:p>
-            <a:pPr lvl="1"/>
-            <a:r>
-              <a:rPr sz="1800" dirty="0"/>
-              <a:t>Types: Criminal, Civil, Constitutional, Corporate Law.</a:t>
-            </a:r>
-          </a:p>
-          <a:p>
-            <a:r>
-              <a:rPr dirty="0"/>
-              <a:t>Preprocessing Steps</a:t>
-            </a:r>
-          </a:p>
-          <a:p>
-            <a:pPr lvl="1"/>
-            <a:r>
-              <a:rPr sz="1800" dirty="0"/>
-              <a:t>Text Cleaning: Regex removal of special characters/non-alphanumeric.</a:t>
-            </a:r>
-          </a:p>
-          <a:p>
-            <a:pPr lvl="1"/>
-            <a:r>
-              <a:rPr sz="1800" dirty="0"/>
-              <a:t>Tokenization: Word-level tokenization (Vocab limit: 20,000).</a:t>
-            </a:r>
-          </a:p>
-          <a:p>
-            <a:pPr lvl="1"/>
-            <a:r>
-              <a:rPr sz="1800" dirty="0"/>
-              <a:t>Padding: Max Text Length = 400, Max Summary Length = 60.</a:t>
-            </a:r>
-          </a:p>
-        </p:txBody>
-      </p:sp>
-    </p:spTree>
-  </p:cSld>
-  <p:clrMapOvr>
-    <a:masterClrMapping/>
-  </p:clrMapOvr>
-</p:sld>
-</file>
-
-<file path=ppt/slides/slide12.xml><?xml version="1.0" encoding="utf-8"?>
-<p:sld xmlns:a="http://schemas.openxmlformats.org/drawingml/2006/main" xmlns:r="http://schemas.openxmlformats.org/officeDocument/2006/relationships" xmlns:p="http://schemas.openxmlformats.org/presentationml/2006/main">
-  <p:cSld>
-    <p:spTree>
-      <p:nvGrpSpPr>
-        <p:cNvPr id="1" name=""/>
-        <p:cNvGrpSpPr/>
-        <p:nvPr/>
-      </p:nvGrpSpPr>
-      <p:grpSpPr>
-        <a:xfrm>
-          <a:off x="0" y="0"/>
-          <a:ext cx="0" cy="0"/>
-          <a:chOff x="0" y="0"/>
-          <a:chExt cx="0" cy="0"/>
-        </a:xfrm>
-      </p:grpSpPr>
-      <p:sp>
-        <p:nvSpPr>
-          <p:cNvPr id="2" name="Title 1"/>
-          <p:cNvSpPr>
-            <a:spLocks noGrp="1"/>
-          </p:cNvSpPr>
-          <p:nvPr>
-            <p:ph type="title"/>
-          </p:nvPr>
-        </p:nvSpPr>
-        <p:spPr>
-          <a:xfrm>
-            <a:off x="1176865" y="473343"/>
-            <a:ext cx="6798735" cy="1303867"/>
-          </a:xfrm>
-        </p:spPr>
-        <p:txBody>
-          <a:bodyPr/>
-          <a:lstStyle/>
-          <a:p>
-            <a:r>
-              <a:rPr dirty="0"/>
-              <a:t>Tools &amp; Technologies Stack</a:t>
-            </a:r>
-          </a:p>
-        </p:txBody>
-      </p:sp>
-      <p:sp>
-        <p:nvSpPr>
-          <p:cNvPr id="3" name="Rectangle 2"/>
-          <p:cNvSpPr/>
-          <p:nvPr/>
-        </p:nvSpPr>
-        <p:spPr>
-          <a:xfrm>
-            <a:off x="918632" y="1777210"/>
-            <a:ext cx="3657600" cy="1828800"/>
-          </a:xfrm>
-          <a:prstGeom prst="rect">
-            <a:avLst/>
-          </a:prstGeom>
-        </p:spPr>
-        <p:style>
-          <a:lnRef idx="1">
-            <a:schemeClr val="accent1"/>
-          </a:lnRef>
-          <a:fillRef idx="3">
-            <a:schemeClr val="accent1"/>
-          </a:fillRef>
-          <a:effectRef idx="2">
-            <a:schemeClr val="accent1"/>
-          </a:effectRef>
-          <a:fontRef idx="minor">
-            <a:schemeClr val="lt1"/>
-          </a:fontRef>
-        </p:style>
-        <p:txBody>
-          <a:bodyPr rtlCol="0" anchor="ctr"/>
-          <a:lstStyle/>
-          <a:p>
-            <a:r>
-              <a:rPr sz="2000" dirty="0"/>
-              <a:t>Languages &amp; Core</a:t>
-            </a:r>
-          </a:p>
-          <a:p>
-            <a:endParaRPr sz="2000" dirty="0"/>
-          </a:p>
-          <a:p>
-            <a:r>
-              <a:rPr sz="2000" dirty="0"/>
-              <a:t>Python 3.12</a:t>
-            </a:r>
-          </a:p>
-          <a:p>
-            <a:r>
-              <a:rPr sz="2000" dirty="0" err="1"/>
-              <a:t>NumPy</a:t>
-            </a:r>
-            <a:endParaRPr sz="2000" dirty="0"/>
-          </a:p>
-          <a:p>
-            <a:r>
-              <a:rPr sz="2000" dirty="0"/>
-              <a:t>Pandas</a:t>
-            </a:r>
-          </a:p>
-        </p:txBody>
-      </p:sp>
-      <p:sp>
-        <p:nvSpPr>
-          <p:cNvPr id="4" name="Rectangle 3"/>
-          <p:cNvSpPr/>
-          <p:nvPr/>
-        </p:nvSpPr>
-        <p:spPr>
-          <a:xfrm>
-            <a:off x="4576232" y="1777210"/>
-            <a:ext cx="3657600" cy="1828800"/>
-          </a:xfrm>
-          <a:prstGeom prst="rect">
-            <a:avLst/>
-          </a:prstGeom>
-        </p:spPr>
-        <p:style>
-          <a:lnRef idx="1">
-            <a:schemeClr val="accent1"/>
-          </a:lnRef>
-          <a:fillRef idx="3">
-            <a:schemeClr val="accent1"/>
-          </a:fillRef>
-          <a:effectRef idx="2">
-            <a:schemeClr val="accent1"/>
-          </a:effectRef>
-          <a:fontRef idx="minor">
-            <a:schemeClr val="lt1"/>
-          </a:fontRef>
-        </p:style>
-        <p:txBody>
-          <a:bodyPr rtlCol="0" anchor="ctr"/>
-          <a:lstStyle/>
-          <a:p>
-            <a:r>
-              <a:rPr sz="2000" dirty="0"/>
-              <a:t>Deep Learning</a:t>
-            </a:r>
-          </a:p>
-          <a:p>
-            <a:endParaRPr sz="2000" dirty="0"/>
-          </a:p>
-          <a:p>
-            <a:r>
-              <a:rPr sz="2000" dirty="0" err="1"/>
-              <a:t>TensorFlow</a:t>
-            </a:r>
-            <a:r>
-              <a:rPr sz="2000" dirty="0"/>
-              <a:t> / </a:t>
-            </a:r>
-            <a:r>
-              <a:rPr sz="2000" dirty="0" err="1"/>
-              <a:t>Keras</a:t>
-            </a:r>
-            <a:endParaRPr sz="2000" dirty="0"/>
-          </a:p>
-          <a:p>
-            <a:r>
-              <a:rPr sz="2000" dirty="0" err="1"/>
-              <a:t>GloVe</a:t>
-            </a:r>
-            <a:r>
-              <a:rPr sz="2000" dirty="0"/>
-              <a:t> </a:t>
-            </a:r>
-            <a:r>
-              <a:rPr sz="2000" dirty="0" err="1"/>
-              <a:t>Embeddings</a:t>
-            </a:r>
-            <a:endParaRPr sz="2000" dirty="0"/>
-          </a:p>
-          <a:p>
-            <a:r>
-              <a:rPr sz="2000" dirty="0" err="1"/>
-              <a:t>Scikit</a:t>
-            </a:r>
-            <a:r>
-              <a:rPr sz="2000" dirty="0"/>
-              <a:t>-Learn</a:t>
-            </a:r>
-          </a:p>
-        </p:txBody>
-      </p:sp>
-      <p:sp>
-        <p:nvSpPr>
-          <p:cNvPr id="5" name="Rectangle 4"/>
-          <p:cNvSpPr/>
-          <p:nvPr/>
-        </p:nvSpPr>
-        <p:spPr>
-          <a:xfrm>
-            <a:off x="918632" y="3606010"/>
-            <a:ext cx="3657600" cy="1828800"/>
-          </a:xfrm>
-          <a:prstGeom prst="rect">
-            <a:avLst/>
-          </a:prstGeom>
-        </p:spPr>
-        <p:style>
-          <a:lnRef idx="1">
-            <a:schemeClr val="accent1"/>
-          </a:lnRef>
-          <a:fillRef idx="3">
-            <a:schemeClr val="accent1"/>
-          </a:fillRef>
-          <a:effectRef idx="2">
-            <a:schemeClr val="accent1"/>
-          </a:effectRef>
-          <a:fontRef idx="minor">
-            <a:schemeClr val="lt1"/>
-          </a:fontRef>
-        </p:style>
-        <p:txBody>
-          <a:bodyPr rtlCol="0" anchor="ctr"/>
-          <a:lstStyle/>
-          <a:p>
-            <a:r>
-              <a:rPr sz="2000" dirty="0"/>
-              <a:t>Backend &amp; Database</a:t>
-            </a:r>
-          </a:p>
-          <a:p>
-            <a:endParaRPr sz="2000" dirty="0"/>
-          </a:p>
-          <a:p>
-            <a:r>
-              <a:rPr sz="2000" dirty="0"/>
-              <a:t>Flask (Python)</a:t>
-            </a:r>
-          </a:p>
-          <a:p>
-            <a:r>
-              <a:rPr sz="2000" dirty="0"/>
-              <a:t>MongoDB Atlas</a:t>
-            </a:r>
-          </a:p>
-          <a:p>
-            <a:r>
-              <a:rPr sz="2000" dirty="0"/>
-              <a:t>Pickle (Serialization)</a:t>
-            </a:r>
-          </a:p>
-        </p:txBody>
-      </p:sp>
-      <p:sp>
-        <p:nvSpPr>
-          <p:cNvPr id="6" name="Rectangle 5"/>
-          <p:cNvSpPr/>
-          <p:nvPr/>
-        </p:nvSpPr>
-        <p:spPr>
-          <a:xfrm>
-            <a:off x="4576232" y="3606010"/>
-            <a:ext cx="3657600" cy="1828800"/>
-          </a:xfrm>
-          <a:prstGeom prst="rect">
-            <a:avLst/>
-          </a:prstGeom>
-        </p:spPr>
-        <p:style>
-          <a:lnRef idx="1">
-            <a:schemeClr val="accent1"/>
-          </a:lnRef>
-          <a:fillRef idx="3">
-            <a:schemeClr val="accent1"/>
-          </a:fillRef>
-          <a:effectRef idx="2">
-            <a:schemeClr val="accent1"/>
-          </a:effectRef>
-          <a:fontRef idx="minor">
-            <a:schemeClr val="lt1"/>
-          </a:fontRef>
-        </p:style>
-        <p:txBody>
-          <a:bodyPr rtlCol="0" anchor="ctr"/>
-          <a:lstStyle/>
-          <a:p>
-            <a:r>
-              <a:rPr sz="2000" dirty="0"/>
-              <a:t>Infrastructure</a:t>
-            </a:r>
-          </a:p>
-          <a:p>
-            <a:endParaRPr sz="2000" dirty="0"/>
-          </a:p>
-          <a:p>
-            <a:r>
-              <a:rPr sz="2000" dirty="0"/>
-              <a:t>Google </a:t>
-            </a:r>
-            <a:r>
-              <a:rPr sz="2000" dirty="0" err="1"/>
-              <a:t>Colab</a:t>
-            </a:r>
-            <a:r>
-              <a:rPr sz="2000" dirty="0"/>
-              <a:t> (T4 GPU)</a:t>
-            </a:r>
-          </a:p>
-          <a:p>
-            <a:r>
-              <a:rPr sz="2000" dirty="0"/>
-              <a:t>CUDA 11.3</a:t>
-            </a:r>
-          </a:p>
-        </p:txBody>
-      </p:sp>
-    </p:spTree>
-  </p:cSld>
-  <p:clrMapOvr>
-    <a:masterClrMapping/>
-  </p:clrMapOvr>
-</p:sld>
-</file>
-
-<file path=ppt/slides/slide13.xml><?xml version="1.0" encoding="utf-8"?>
-<p:sld xmlns:a="http://schemas.openxmlformats.org/drawingml/2006/main" xmlns:r="http://schemas.openxmlformats.org/officeDocument/2006/relationships" xmlns:p="http://schemas.openxmlformats.org/presentationml/2006/main">
-  <p:cSld>
-    <p:spTree>
-      <p:nvGrpSpPr>
-        <p:cNvPr id="1" name=""/>
-        <p:cNvGrpSpPr/>
-        <p:nvPr/>
-      </p:nvGrpSpPr>
-      <p:grpSpPr>
-        <a:xfrm>
-          <a:off x="0" y="0"/>
-          <a:ext cx="0" cy="0"/>
-          <a:chOff x="0" y="0"/>
-          <a:chExt cx="0" cy="0"/>
-        </a:xfrm>
-      </p:grpSpPr>
-      <p:sp>
-        <p:nvSpPr>
-          <p:cNvPr id="2" name="Title 1"/>
-          <p:cNvSpPr>
-            <a:spLocks noGrp="1"/>
-          </p:cNvSpPr>
-          <p:nvPr>
-            <p:ph type="title"/>
-          </p:nvPr>
-        </p:nvSpPr>
-        <p:spPr>
-          <a:xfrm>
-            <a:off x="615821" y="915337"/>
-            <a:ext cx="7903028" cy="1303867"/>
-          </a:xfrm>
-        </p:spPr>
-        <p:txBody>
-          <a:bodyPr>
-            <a:normAutofit fontScale="90000"/>
-          </a:bodyPr>
-          <a:lstStyle/>
-          <a:p>
-            <a:r>
-              <a:rPr dirty="0"/>
-              <a:t>Algorithm: Stacked </a:t>
-            </a:r>
-            <a:r>
-              <a:rPr dirty="0" err="1"/>
-              <a:t>BiLSTM</a:t>
-            </a:r>
-            <a:r>
-              <a:rPr dirty="0"/>
-              <a:t> + Attention</a:t>
-            </a:r>
-          </a:p>
-        </p:txBody>
-      </p:sp>
-      <p:sp>
-        <p:nvSpPr>
-          <p:cNvPr id="3" name="Content Placeholder 2"/>
-          <p:cNvSpPr>
-            <a:spLocks noGrp="1"/>
-          </p:cNvSpPr>
-          <p:nvPr>
-            <p:ph idx="1"/>
-          </p:nvPr>
-        </p:nvSpPr>
-        <p:spPr>
-          <a:xfrm>
-            <a:off x="840963" y="1864711"/>
-            <a:ext cx="7677886" cy="3444997"/>
-          </a:xfrm>
-        </p:spPr>
-        <p:txBody>
-          <a:bodyPr>
-            <a:noAutofit/>
-          </a:bodyPr>
-          <a:lstStyle/>
-          <a:p>
-            <a:endParaRPr sz="2000" dirty="0"/>
-          </a:p>
-          <a:p>
-            <a:r>
-              <a:rPr sz="2000" dirty="0"/>
-              <a:t>Encoder</a:t>
-            </a:r>
-          </a:p>
-          <a:p>
-            <a:pPr lvl="1"/>
-            <a:r>
-              <a:rPr dirty="0"/>
-              <a:t>Input: Tokenized Sequence (400)</a:t>
-            </a:r>
-          </a:p>
-          <a:p>
-            <a:pPr lvl="1"/>
-            <a:r>
-              <a:rPr dirty="0"/>
-              <a:t>Layers: Embedding (</a:t>
-            </a:r>
-            <a:r>
-              <a:rPr dirty="0" err="1"/>
-              <a:t>GloVe</a:t>
-            </a:r>
-            <a:r>
-              <a:rPr dirty="0"/>
-              <a:t>) -&gt; </a:t>
-            </a:r>
-            <a:r>
-              <a:rPr dirty="0" err="1"/>
-              <a:t>BiLSTM</a:t>
-            </a:r>
-            <a:r>
-              <a:rPr dirty="0"/>
-              <a:t> (Layer 1) -&gt; </a:t>
-            </a:r>
-            <a:r>
-              <a:rPr dirty="0" err="1"/>
-              <a:t>LayerNorm</a:t>
-            </a:r>
-            <a:r>
-              <a:rPr dirty="0"/>
-              <a:t> -&gt; </a:t>
-            </a:r>
-            <a:r>
-              <a:rPr dirty="0" err="1"/>
-              <a:t>BiLSTM</a:t>
-            </a:r>
-            <a:r>
-              <a:rPr dirty="0"/>
-              <a:t> (Layer 2)</a:t>
-            </a:r>
-          </a:p>
-          <a:p>
-            <a:pPr lvl="1"/>
-            <a:r>
-              <a:rPr dirty="0"/>
-              <a:t>Output: Forward &amp; Backward Hidden States</a:t>
-            </a:r>
-          </a:p>
-          <a:p>
-            <a:r>
-              <a:rPr sz="2000" dirty="0"/>
-              <a:t>Decoder with Attention</a:t>
-            </a:r>
-          </a:p>
-          <a:p>
-            <a:pPr lvl="1"/>
-            <a:r>
-              <a:rPr dirty="0"/>
-              <a:t>Context Vector: Calculated via Attention Weights on Encoder States.</a:t>
-            </a:r>
-          </a:p>
-          <a:p>
-            <a:pPr lvl="1"/>
-            <a:r>
-              <a:rPr dirty="0"/>
-              <a:t>Generation: LSTM Decoder predicts next word using Context Vector + Previous Word.</a:t>
-            </a:r>
-          </a:p>
-        </p:txBody>
-      </p:sp>
-    </p:spTree>
-  </p:cSld>
-  <p:clrMapOvr>
-    <a:masterClrMapping/>
-  </p:clrMapOvr>
-</p:sld>
-</file>
-
 <file path=ppt/slides/slide14.xml><?xml version="1.0" encoding="utf-8"?>
 <p:sld xmlns:a="http://schemas.openxmlformats.org/drawingml/2006/main" xmlns:r="http://schemas.openxmlformats.org/officeDocument/2006/relationships" xmlns:p="http://schemas.openxmlformats.org/presentationml/2006/main">
   <p:cSld>
@@ -6873,8 +7913,7 @@
           <a:lstStyle/>
           <a:p>
             <a:r>
-              <a:rPr dirty="0"/>
-              <a:t>Implementation Details (50%)</a:t>
+              <a:t>Dataset Design &amp; Preprocessing</a:t>
             </a:r>
           </a:p>
         </p:txBody>
@@ -6891,8 +7930,8 @@
         </p:nvSpPr>
         <p:spPr>
           <a:xfrm>
-            <a:off x="662473" y="1781009"/>
-            <a:ext cx="8070979" cy="3444997"/>
+            <a:off x="980920" y="1892633"/>
+            <a:ext cx="7556589" cy="3444997"/>
           </a:xfrm>
         </p:spPr>
         <p:txBody>
@@ -6901,73 +7940,60 @@
           </a:bodyPr>
           <a:lstStyle/>
           <a:p>
-            <a:endParaRPr sz="2800" dirty="0"/>
-          </a:p>
-          <a:p>
-            <a:r>
-              <a:rPr sz="2800" dirty="0"/>
-              <a:t>Model Specifications:</a:t>
+            <a:endParaRPr dirty="0"/>
+          </a:p>
+          <a:p>
+            <a:r>
+              <a:rPr dirty="0"/>
+              <a:t>Dataset Composition</a:t>
             </a:r>
           </a:p>
           <a:p>
             <a:pPr lvl="1"/>
             <a:r>
+              <a:rPr sz="1800" dirty="0"/>
+              <a:t>Total Documents: 150 (Indian Legal Context)</a:t>
+            </a:r>
+          </a:p>
+          <a:p>
+            <a:pPr lvl="1"/>
+            <a:r>
+              <a:rPr sz="1800" dirty="0"/>
+              <a:t>Split: 120 Training / 30 Testing.</a:t>
+            </a:r>
+          </a:p>
+          <a:p>
+            <a:pPr lvl="1"/>
+            <a:r>
+              <a:rPr sz="1800" dirty="0"/>
+              <a:t>Types: Criminal, Civil, Constitutional, Corporate Law.</a:t>
+            </a:r>
+          </a:p>
+          <a:p>
+            <a:r>
               <a:rPr dirty="0"/>
-              <a:t>Total </a:t>
-            </a:r>
-            <a:r>
-              <a:rPr dirty="0" err="1"/>
-              <a:t>Params</a:t>
-            </a:r>
-            <a:r>
-              <a:rPr dirty="0"/>
-              <a:t>: 3,897,996 (Trainable)</a:t>
+              <a:t>Preprocessing Steps</a:t>
             </a:r>
           </a:p>
           <a:p>
             <a:pPr lvl="1"/>
             <a:r>
-              <a:rPr dirty="0"/>
-              <a:t>Embedding Dim: 100 | Hidden Units: 256</a:t>
+              <a:rPr sz="1800" dirty="0"/>
+              <a:t>Text Cleaning: Regex removal of special characters/non-alphanumeric.</a:t>
             </a:r>
           </a:p>
           <a:p>
             <a:pPr lvl="1"/>
             <a:r>
-              <a:rPr dirty="0"/>
-              <a:t>Optimizer: Adam (LR=0.001) | Loss: Sparse Categorical </a:t>
-            </a:r>
-            <a:r>
-              <a:rPr dirty="0" err="1"/>
-              <a:t>Crossentropy</a:t>
-            </a:r>
-            <a:endParaRPr dirty="0"/>
-          </a:p>
-          <a:p>
-            <a:r>
-              <a:rPr sz="2800" dirty="0"/>
-              <a:t>Training Progress:</a:t>
+              <a:rPr sz="1800" dirty="0"/>
+              <a:t>Tokenization: Word-level tokenization (Vocab limit: 20,000).</a:t>
             </a:r>
           </a:p>
           <a:p>
             <a:pPr lvl="1"/>
             <a:r>
-              <a:rPr dirty="0"/>
-              <a:t>Epochs: 25</a:t>
-            </a:r>
-          </a:p>
-          <a:p>
-            <a:pPr lvl="1"/>
-            <a:r>
-              <a:rPr dirty="0"/>
-              <a:t>Initial Loss: 5.02 -&gt; Final Loss: 0.47</a:t>
-            </a:r>
-          </a:p>
-          <a:p>
-            <a:pPr lvl="1"/>
-            <a:r>
-              <a:rPr dirty="0"/>
-              <a:t>Initial Accuracy: 9.6% -&gt; Final Accuracy: 86.3%</a:t>
+              <a:rPr sz="1800" dirty="0"/>
+              <a:t>Padding: Max Text Length = 400, Max Summary Length = 60.</a:t>
             </a:r>
           </a:p>
         </p:txBody>
@@ -7007,156 +8033,288 @@
             <p:ph type="title"/>
           </p:nvPr>
         </p:nvSpPr>
-        <p:spPr/>
-        <p:txBody>
-          <a:bodyPr/>
-          <a:lstStyle/>
-          <a:p>
-            <a:r>
-              <a:t>Testing &amp; Validation Results</a:t>
-            </a:r>
-          </a:p>
-        </p:txBody>
-      </p:sp>
-      <p:sp>
-        <p:nvSpPr>
-          <p:cNvPr id="3" name="Content Placeholder 2"/>
-          <p:cNvSpPr>
-            <a:spLocks noGrp="1"/>
-          </p:cNvSpPr>
-          <p:nvPr>
-            <p:ph idx="1"/>
-          </p:nvPr>
-        </p:nvSpPr>
         <p:spPr>
           <a:xfrm>
-            <a:off x="699797" y="1874315"/>
-            <a:ext cx="8677468" cy="3444997"/>
+            <a:off x="1176865" y="473343"/>
+            <a:ext cx="6798735" cy="1303867"/>
           </a:xfrm>
         </p:spPr>
         <p:txBody>
-          <a:bodyPr>
-            <a:noAutofit/>
-          </a:bodyPr>
-          <a:lstStyle/>
-          <a:p>
-            <a:pPr marL="0" indent="0">
-              <a:buNone/>
-            </a:pPr>
-            <a:endParaRPr dirty="0"/>
-          </a:p>
+          <a:bodyPr/>
+          <a:lstStyle/>
           <a:p>
             <a:r>
               <a:rPr dirty="0"/>
-              <a:t>Summarization Metrics (Evaluation on 40 Docs)</a:t>
-            </a:r>
-          </a:p>
-          <a:p>
-            <a:pPr lvl="1"/>
-            <a:r>
-              <a:rPr sz="1800" dirty="0"/>
-              <a:t>ROUGE-L Score: </a:t>
-            </a:r>
-            <a:r>
-              <a:rPr sz="1800" dirty="0" smtClean="0"/>
-              <a:t>0.7</a:t>
-            </a:r>
-            <a:r>
-              <a:rPr lang="en-IN" sz="1800" dirty="0" smtClean="0"/>
-              <a:t>038</a:t>
-            </a:r>
-            <a:r>
-              <a:rPr sz="1800" dirty="0" smtClean="0"/>
+              <a:t>Tools &amp; Technologies Stack</a:t>
+            </a:r>
+          </a:p>
+        </p:txBody>
+      </p:sp>
+      <p:sp>
+        <p:nvSpPr>
+          <p:cNvPr id="3" name="Rectangle 2"/>
+          <p:cNvSpPr/>
+          <p:nvPr/>
+        </p:nvSpPr>
+        <p:spPr>
+          <a:xfrm>
+            <a:off x="918632" y="1777210"/>
+            <a:ext cx="3657600" cy="1828800"/>
+          </a:xfrm>
+          <a:prstGeom prst="rect">
+            <a:avLst/>
+          </a:prstGeom>
+        </p:spPr>
+        <p:style>
+          <a:lnRef idx="1">
+            <a:schemeClr val="accent1"/>
+          </a:lnRef>
+          <a:fillRef idx="3">
+            <a:schemeClr val="accent1"/>
+          </a:fillRef>
+          <a:effectRef idx="2">
+            <a:schemeClr val="accent1"/>
+          </a:effectRef>
+          <a:fontRef idx="minor">
+            <a:schemeClr val="lt1"/>
+          </a:fontRef>
+        </p:style>
+        <p:txBody>
+          <a:bodyPr rtlCol="0" anchor="ctr"/>
+          <a:lstStyle/>
+          <a:p>
+            <a:r>
+              <a:rPr sz="2000" dirty="0"/>
+              <a:t>Languages &amp; Core</a:t>
+            </a:r>
+          </a:p>
+          <a:p>
+            <a:endParaRPr sz="2000" dirty="0"/>
+          </a:p>
+          <a:p>
+            <a:r>
+              <a:rPr sz="2000" dirty="0"/>
+              <a:t>Python 3.12</a:t>
+            </a:r>
+          </a:p>
+          <a:p>
+            <a:r>
+              <a:rPr sz="2000" dirty="0" err="1"/>
+              <a:t>NumPy</a:t>
+            </a:r>
+            <a:endParaRPr sz="2000" dirty="0"/>
+          </a:p>
+          <a:p>
+            <a:r>
+              <a:rPr sz="2000" dirty="0"/>
+              <a:t>Pandas</a:t>
+            </a:r>
+          </a:p>
+        </p:txBody>
+      </p:sp>
+      <p:sp>
+        <p:nvSpPr>
+          <p:cNvPr id="4" name="Rectangle 3"/>
+          <p:cNvSpPr/>
+          <p:nvPr/>
+        </p:nvSpPr>
+        <p:spPr>
+          <a:xfrm>
+            <a:off x="4576232" y="1777210"/>
+            <a:ext cx="3657600" cy="1828800"/>
+          </a:xfrm>
+          <a:prstGeom prst="rect">
+            <a:avLst/>
+          </a:prstGeom>
+        </p:spPr>
+        <p:style>
+          <a:lnRef idx="1">
+            <a:schemeClr val="accent1"/>
+          </a:lnRef>
+          <a:fillRef idx="3">
+            <a:schemeClr val="accent1"/>
+          </a:fillRef>
+          <a:effectRef idx="2">
+            <a:schemeClr val="accent1"/>
+          </a:effectRef>
+          <a:fontRef idx="minor">
+            <a:schemeClr val="lt1"/>
+          </a:fontRef>
+        </p:style>
+        <p:txBody>
+          <a:bodyPr rtlCol="0" anchor="ctr"/>
+          <a:lstStyle/>
+          <a:p>
+            <a:r>
+              <a:rPr sz="2000" dirty="0"/>
+              <a:t>Deep Learning</a:t>
+            </a:r>
+          </a:p>
+          <a:p>
+            <a:endParaRPr sz="2000" dirty="0"/>
+          </a:p>
+          <a:p>
+            <a:r>
+              <a:rPr sz="2000" dirty="0" err="1"/>
+              <a:t>TensorFlow</a:t>
+            </a:r>
+            <a:r>
+              <a:rPr sz="2000" dirty="0"/>
+              <a:t> / </a:t>
+            </a:r>
+            <a:r>
+              <a:rPr sz="2000" dirty="0" err="1"/>
+              <a:t>Keras</a:t>
+            </a:r>
+            <a:endParaRPr sz="2000" dirty="0"/>
+          </a:p>
+          <a:p>
+            <a:r>
+              <a:rPr sz="2000" dirty="0" err="1"/>
+              <a:t>GloVe</a:t>
+            </a:r>
+            <a:r>
+              <a:rPr sz="2000" dirty="0"/>
               <a:t> </a:t>
             </a:r>
             <a:r>
-              <a:rPr sz="1800" dirty="0"/>
-              <a:t>(High semantic overlap)</a:t>
-            </a:r>
-          </a:p>
-          <a:p>
-            <a:pPr lvl="1"/>
-            <a:r>
-              <a:rPr sz="1800" dirty="0"/>
-              <a:t>BLEU Score: </a:t>
-            </a:r>
-            <a:r>
-              <a:rPr sz="1800" dirty="0" smtClean="0"/>
-              <a:t>0.</a:t>
-            </a:r>
-            <a:r>
-              <a:rPr lang="en-IN" sz="1800" dirty="0" smtClean="0"/>
-              <a:t>5041</a:t>
-            </a:r>
-            <a:r>
-              <a:rPr sz="1800" dirty="0" smtClean="0"/>
-              <a:t>(Translation </a:t>
-            </a:r>
-            <a:r>
-              <a:rPr sz="1800" dirty="0"/>
-              <a:t>quality)</a:t>
-            </a:r>
-          </a:p>
-          <a:p>
-            <a:r>
-              <a:rPr dirty="0"/>
-              <a:t>Q&amp;A Performance</a:t>
-            </a:r>
-          </a:p>
-          <a:p>
-            <a:pPr lvl="1"/>
-            <a:r>
-              <a:rPr sz="1800" dirty="0"/>
-              <a:t>F1-Score: </a:t>
-            </a:r>
-            <a:r>
-              <a:rPr sz="1800" dirty="0" smtClean="0"/>
-              <a:t>7</a:t>
-            </a:r>
-            <a:r>
-              <a:rPr lang="en-IN" sz="1800" dirty="0" smtClean="0"/>
-              <a:t>3</a:t>
-            </a:r>
-            <a:r>
-              <a:rPr sz="1800" dirty="0" smtClean="0"/>
-              <a:t>.</a:t>
-            </a:r>
-            <a:r>
-              <a:rPr lang="en-IN" sz="1800" dirty="0" smtClean="0"/>
-              <a:t>03</a:t>
-            </a:r>
-            <a:r>
-              <a:rPr sz="1800" dirty="0" smtClean="0"/>
-              <a:t>%</a:t>
-            </a:r>
-            <a:endParaRPr sz="1800" dirty="0"/>
-          </a:p>
-          <a:p>
-            <a:r>
-              <a:rPr dirty="0" smtClean="0"/>
-              <a:t>System </a:t>
-            </a:r>
-            <a:r>
-              <a:rPr dirty="0"/>
-              <a:t>Performance</a:t>
-            </a:r>
-          </a:p>
-          <a:p>
-            <a:pPr lvl="1"/>
-            <a:r>
-              <a:rPr sz="1800" dirty="0" err="1"/>
-              <a:t>Avg</a:t>
-            </a:r>
-            <a:r>
-              <a:rPr sz="1800" dirty="0"/>
-              <a:t> Processing Time: 5.1 seconds/document</a:t>
-            </a:r>
-          </a:p>
-          <a:p>
-            <a:pPr lvl="1"/>
-            <a:r>
-              <a:rPr sz="1800" dirty="0"/>
-              <a:t>Throughput: ~702 documents/hour</a:t>
+              <a:rPr sz="2000" dirty="0" err="1"/>
+              <a:t>Embeddings</a:t>
+            </a:r>
+            <a:endParaRPr sz="2000" dirty="0"/>
+          </a:p>
+          <a:p>
+            <a:r>
+              <a:rPr sz="2000" dirty="0" err="1"/>
+              <a:t>Scikit</a:t>
+            </a:r>
+            <a:r>
+              <a:rPr sz="2000" dirty="0"/>
+              <a:t>-Learn</a:t>
+            </a:r>
+          </a:p>
+        </p:txBody>
+      </p:sp>
+      <p:sp>
+        <p:nvSpPr>
+          <p:cNvPr id="5" name="Rectangle 4"/>
+          <p:cNvSpPr/>
+          <p:nvPr/>
+        </p:nvSpPr>
+        <p:spPr>
+          <a:xfrm>
+            <a:off x="918632" y="3606010"/>
+            <a:ext cx="3657600" cy="1828800"/>
+          </a:xfrm>
+          <a:prstGeom prst="rect">
+            <a:avLst/>
+          </a:prstGeom>
+        </p:spPr>
+        <p:style>
+          <a:lnRef idx="1">
+            <a:schemeClr val="accent1"/>
+          </a:lnRef>
+          <a:fillRef idx="3">
+            <a:schemeClr val="accent1"/>
+          </a:fillRef>
+          <a:effectRef idx="2">
+            <a:schemeClr val="accent1"/>
+          </a:effectRef>
+          <a:fontRef idx="minor">
+            <a:schemeClr val="lt1"/>
+          </a:fontRef>
+        </p:style>
+        <p:txBody>
+          <a:bodyPr rtlCol="0" anchor="ctr"/>
+          <a:lstStyle/>
+          <a:p>
+            <a:r>
+              <a:rPr sz="2000" dirty="0"/>
+              <a:t>Backend &amp; Database</a:t>
+            </a:r>
+          </a:p>
+          <a:p>
+            <a:endParaRPr sz="2000" dirty="0"/>
+          </a:p>
+          <a:p>
+            <a:r>
+              <a:rPr sz="2000" dirty="0"/>
+              <a:t>Flask (Python)</a:t>
+            </a:r>
+          </a:p>
+          <a:p>
+            <a:r>
+              <a:rPr sz="2000" dirty="0"/>
+              <a:t>MongoDB Atlas</a:t>
+            </a:r>
+          </a:p>
+          <a:p>
+            <a:r>
+              <a:rPr sz="2000" dirty="0"/>
+              <a:t>Pickle (Serialization)</a:t>
+            </a:r>
+          </a:p>
+        </p:txBody>
+      </p:sp>
+      <p:sp>
+        <p:nvSpPr>
+          <p:cNvPr id="6" name="Rectangle 5"/>
+          <p:cNvSpPr/>
+          <p:nvPr/>
+        </p:nvSpPr>
+        <p:spPr>
+          <a:xfrm>
+            <a:off x="4576232" y="3606010"/>
+            <a:ext cx="3657600" cy="1828800"/>
+          </a:xfrm>
+          <a:prstGeom prst="rect">
+            <a:avLst/>
+          </a:prstGeom>
+        </p:spPr>
+        <p:style>
+          <a:lnRef idx="1">
+            <a:schemeClr val="accent1"/>
+          </a:lnRef>
+          <a:fillRef idx="3">
+            <a:schemeClr val="accent1"/>
+          </a:fillRef>
+          <a:effectRef idx="2">
+            <a:schemeClr val="accent1"/>
+          </a:effectRef>
+          <a:fontRef idx="minor">
+            <a:schemeClr val="lt1"/>
+          </a:fontRef>
+        </p:style>
+        <p:txBody>
+          <a:bodyPr rtlCol="0" anchor="ctr"/>
+          <a:lstStyle/>
+          <a:p>
+            <a:r>
+              <a:rPr sz="2000" dirty="0"/>
+              <a:t>Infrastructure</a:t>
+            </a:r>
+          </a:p>
+          <a:p>
+            <a:endParaRPr sz="2000" dirty="0"/>
+          </a:p>
+          <a:p>
+            <a:r>
+              <a:rPr sz="2000" dirty="0"/>
+              <a:t>Google </a:t>
+            </a:r>
+            <a:r>
+              <a:rPr sz="2000" dirty="0" err="1"/>
+              <a:t>Colab</a:t>
+            </a:r>
+            <a:r>
+              <a:rPr sz="2000" dirty="0"/>
+              <a:t> (T4 GPU)</a:t>
+            </a:r>
+          </a:p>
+          <a:p>
+            <a:r>
+              <a:rPr sz="2000" dirty="0"/>
+              <a:t>CUDA 11.3</a:t>
             </a:r>
           </a:p>
         </p:txBody>
@@ -7196,31 +8354,47 @@
             <p:ph type="title"/>
           </p:nvPr>
         </p:nvSpPr>
-        <p:spPr/>
-        <p:txBody>
-          <a:bodyPr/>
-          <a:lstStyle/>
-          <a:p>
-            <a:r>
-              <a:t>Research Paper Publication</a:t>
-            </a:r>
-          </a:p>
-        </p:txBody>
-      </p:sp>
-      <p:sp>
-        <p:nvSpPr>
-          <p:cNvPr id="3" name="Content Placeholder 2"/>
-          <p:cNvSpPr>
-            <a:spLocks noGrp="1"/>
-          </p:cNvSpPr>
-          <p:nvPr>
-            <p:ph idx="1"/>
-          </p:nvPr>
-        </p:nvSpPr>
         <p:spPr>
           <a:xfrm>
-            <a:off x="849087" y="1919831"/>
-            <a:ext cx="7707084" cy="3444997"/>
+            <a:off x="615821" y="915337"/>
+            <a:ext cx="7903028" cy="1303867"/>
+          </a:xfrm>
+        </p:spPr>
+        <p:txBody>
+          <a:bodyPr>
+            <a:normAutofit fontScale="90000"/>
+          </a:bodyPr>
+          <a:lstStyle/>
+          <a:p>
+            <a:r>
+              <a:rPr dirty="0"/>
+              <a:t>Algorithm: Stacked </a:t>
+            </a:r>
+            <a:r>
+              <a:rPr dirty="0" err="1"/>
+              <a:t>BiLSTM</a:t>
+            </a:r>
+            <a:r>
+              <a:rPr dirty="0"/>
+              <a:t> + Attention</a:t>
+            </a:r>
+          </a:p>
+        </p:txBody>
+      </p:sp>
+      <p:sp>
+        <p:nvSpPr>
+          <p:cNvPr id="3" name="Content Placeholder 2"/>
+          <p:cNvSpPr>
+            <a:spLocks noGrp="1"/>
+          </p:cNvSpPr>
+          <p:nvPr>
+            <p:ph idx="1"/>
+          </p:nvPr>
+        </p:nvSpPr>
+        <p:spPr>
+          <a:xfrm>
+            <a:off x="840963" y="1864711"/>
+            <a:ext cx="7677886" cy="3444997"/>
           </a:xfrm>
         </p:spPr>
         <p:txBody>
@@ -7229,117 +8403,85 @@
           </a:bodyPr>
           <a:lstStyle/>
           <a:p>
-            <a:endParaRPr dirty="0"/>
+            <a:endParaRPr sz="2000" dirty="0"/>
           </a:p>
           <a:p>
             <a:r>
               <a:rPr sz="2000" dirty="0"/>
-              <a:t>Title:</a:t>
+              <a:t>Encoder</a:t>
             </a:r>
           </a:p>
           <a:p>
             <a:pPr lvl="1"/>
             <a:r>
-              <a:rPr sz="1800" dirty="0"/>
-              <a:t>"</a:t>
-            </a:r>
-            <a:r>
-              <a:rPr sz="1800" dirty="0" err="1"/>
+              <a:rPr dirty="0"/>
+              <a:t>Input: Tokenized Sequence (400)</a:t>
+            </a:r>
+          </a:p>
+          <a:p>
+            <a:pPr lvl="1"/>
+            <a:r>
+              <a:rPr dirty="0"/>
+              <a:t>Layers: Embedding (</a:t>
+            </a:r>
+            <a:r>
+              <a:rPr dirty="0" err="1"/>
+              <a:t>GloVe</a:t>
+            </a:r>
+            <a:r>
+              <a:rPr dirty="0"/>
+              <a:t>) -&gt; </a:t>
+            </a:r>
+            <a:r>
+              <a:rPr dirty="0" err="1"/>
               <a:t>BiLSTM</a:t>
             </a:r>
             <a:r>
-              <a:rPr sz="1800" dirty="0"/>
-              <a:t>-Based Indian Legal Case Summarization and Q&amp;A: A Baseline Implementation with Transformer Extension"</a:t>
+              <a:rPr dirty="0"/>
+              <a:t> (Layer 1) -&gt; </a:t>
+            </a:r>
+            <a:r>
+              <a:rPr dirty="0" err="1"/>
+              <a:t>LayerNorm</a:t>
+            </a:r>
+            <a:r>
+              <a:rPr dirty="0"/>
+              <a:t> -&gt; </a:t>
+            </a:r>
+            <a:r>
+              <a:rPr dirty="0" err="1"/>
+              <a:t>BiLSTM</a:t>
+            </a:r>
+            <a:r>
+              <a:rPr dirty="0"/>
+              <a:t> (Layer 2)</a:t>
+            </a:r>
+          </a:p>
+          <a:p>
+            <a:pPr lvl="1"/>
+            <a:r>
+              <a:rPr dirty="0"/>
+              <a:t>Output: Forward &amp; Backward Hidden States</a:t>
             </a:r>
           </a:p>
           <a:p>
             <a:r>
               <a:rPr sz="2000" dirty="0"/>
-              <a:t>Authors:</a:t>
+              <a:t>Decoder with Attention</a:t>
             </a:r>
           </a:p>
           <a:p>
             <a:pPr lvl="1"/>
             <a:r>
-              <a:rPr lang="en-IN" sz="1800" dirty="0" err="1" smtClean="0"/>
-              <a:t>Sushma</a:t>
-            </a:r>
-            <a:r>
-              <a:rPr lang="en-IN" sz="1800" dirty="0" smtClean="0"/>
-              <a:t> </a:t>
-            </a:r>
-            <a:r>
-              <a:rPr lang="en-IN" sz="1800" dirty="0" err="1" smtClean="0"/>
-              <a:t>Vispute</a:t>
-            </a:r>
-            <a:r>
-              <a:rPr lang="en-IN" sz="1800" dirty="0" smtClean="0"/>
-              <a:t> Mam, </a:t>
-            </a:r>
-            <a:r>
-              <a:rPr sz="1800" dirty="0" err="1" smtClean="0"/>
-              <a:t>Prathmesh</a:t>
-            </a:r>
-            <a:r>
-              <a:rPr sz="1800" dirty="0" smtClean="0"/>
-              <a:t> </a:t>
-            </a:r>
-            <a:r>
-              <a:rPr sz="1800" dirty="0" err="1"/>
-              <a:t>Dudhale</a:t>
-            </a:r>
-            <a:r>
-              <a:rPr sz="1800" dirty="0"/>
-              <a:t>, Aditya Joshi, </a:t>
-            </a:r>
-            <a:r>
-              <a:rPr sz="1800" dirty="0" err="1"/>
-              <a:t>Aaditesh</a:t>
-            </a:r>
-            <a:r>
-              <a:rPr sz="1800" dirty="0"/>
-              <a:t> </a:t>
-            </a:r>
-            <a:r>
-              <a:rPr sz="1800" dirty="0" err="1"/>
-              <a:t>Kadu</a:t>
-            </a:r>
-            <a:r>
-              <a:rPr sz="1800" dirty="0"/>
-              <a:t>, Vedant Kale</a:t>
-            </a:r>
-          </a:p>
-          <a:p>
-            <a:r>
-              <a:rPr sz="2000" dirty="0"/>
-              <a:t>Abstract Summary:</a:t>
+              <a:rPr dirty="0"/>
+              <a:t>Context Vector: Calculated via Attention Weights on Encoder States.</a:t>
             </a:r>
           </a:p>
           <a:p>
             <a:pPr lvl="1"/>
             <a:r>
-              <a:rPr sz="1800" dirty="0"/>
-              <a:t>Proposes a comprehensive system based on </a:t>
-            </a:r>
-            <a:r>
-              <a:rPr sz="1800" dirty="0" err="1"/>
-              <a:t>BiLSTM</a:t>
-            </a:r>
-            <a:r>
-              <a:rPr sz="1800" dirty="0"/>
-              <a:t> for processing legal documents, tested on 150 documents. Establishes a solid baseline (ROUGE-L </a:t>
-            </a:r>
-            <a:r>
-              <a:rPr lang="en-IN" sz="1800" dirty="0"/>
-              <a:t>0.7038 </a:t>
-            </a:r>
-            <a:r>
-              <a:rPr sz="1800" dirty="0" smtClean="0"/>
-              <a:t>) </a:t>
-            </a:r>
-            <a:r>
-              <a:rPr sz="1800" dirty="0"/>
-              <a:t>while identifying the need for Transformer architectures for complex reasoning.</a:t>
+              <a:rPr dirty="0"/>
+              <a:t>Generation: LSTM Decoder predicts next word using Context Vector + Previous Word.</a:t>
             </a:r>
           </a:p>
         </p:txBody>
@@ -7385,7 +8527,8 @@
           <a:lstStyle/>
           <a:p>
             <a:r>
-              <a:t>Conclusion &amp; Future Work</a:t>
+              <a:rPr dirty="0"/>
+              <a:t>Implementation Details (50%)</a:t>
             </a:r>
           </a:p>
         </p:txBody>
@@ -7402,8 +8545,8 @@
         </p:nvSpPr>
         <p:spPr>
           <a:xfrm>
-            <a:off x="596727" y="2060926"/>
-            <a:ext cx="7959012" cy="3444997"/>
+            <a:off x="662473" y="1781009"/>
+            <a:ext cx="8070979" cy="3444997"/>
           </a:xfrm>
         </p:spPr>
         <p:txBody>
@@ -7412,19 +8555,360 @@
           </a:bodyPr>
           <a:lstStyle/>
           <a:p>
+            <a:endParaRPr sz="2800" dirty="0"/>
+          </a:p>
+          <a:p>
+            <a:r>
+              <a:rPr sz="2800" dirty="0"/>
+              <a:t>Model Specifications:</a:t>
+            </a:r>
+          </a:p>
+          <a:p>
+            <a:pPr lvl="1"/>
+            <a:r>
+              <a:rPr dirty="0"/>
+              <a:t>Total </a:t>
+            </a:r>
+            <a:r>
+              <a:rPr dirty="0" err="1"/>
+              <a:t>Params</a:t>
+            </a:r>
+            <a:r>
+              <a:rPr dirty="0"/>
+              <a:t>: 3,897,996 (Trainable)</a:t>
+            </a:r>
+          </a:p>
+          <a:p>
+            <a:pPr lvl="1"/>
+            <a:r>
+              <a:rPr dirty="0"/>
+              <a:t>Embedding Dim: 100 | Hidden Units: 256</a:t>
+            </a:r>
+          </a:p>
+          <a:p>
+            <a:pPr lvl="1"/>
+            <a:r>
+              <a:rPr dirty="0"/>
+              <a:t>Optimizer: Adam (LR=0.001) | Loss: Sparse Categorical </a:t>
+            </a:r>
+            <a:r>
+              <a:rPr dirty="0" err="1"/>
+              <a:t>Crossentropy</a:t>
+            </a:r>
             <a:endParaRPr dirty="0"/>
           </a:p>
           <a:p>
             <a:r>
+              <a:rPr sz="2800" dirty="0"/>
+              <a:t>Training Progress:</a:t>
+            </a:r>
+          </a:p>
+          <a:p>
+            <a:pPr lvl="1"/>
+            <a:r>
               <a:rPr dirty="0"/>
-              <a:t>Conclusion</a:t>
+              <a:t>Epochs: 25</a:t>
             </a:r>
           </a:p>
           <a:p>
             <a:pPr lvl="1"/>
             <a:r>
+              <a:rPr dirty="0"/>
+              <a:t>Initial Loss: 5.02 -&gt; Final Loss: 0.47</a:t>
+            </a:r>
+          </a:p>
+          <a:p>
+            <a:pPr lvl="1"/>
+            <a:r>
+              <a:rPr dirty="0"/>
+              <a:t>Initial Accuracy: 9.6% -&gt; Final Accuracy: 86.3%</a:t>
+            </a:r>
+          </a:p>
+        </p:txBody>
+      </p:sp>
+    </p:spTree>
+  </p:cSld>
+  <p:clrMapOvr>
+    <a:masterClrMapping/>
+  </p:clrMapOvr>
+</p:sld>
+</file>
+
+<file path=ppt/slides/slide18.xml><?xml version="1.0" encoding="utf-8"?>
+<p:sld xmlns:a="http://schemas.openxmlformats.org/drawingml/2006/main" xmlns:r="http://schemas.openxmlformats.org/officeDocument/2006/relationships" xmlns:p="http://schemas.openxmlformats.org/presentationml/2006/main">
+  <p:cSld>
+    <p:spTree>
+      <p:nvGrpSpPr>
+        <p:cNvPr id="1" name=""/>
+        <p:cNvGrpSpPr/>
+        <p:nvPr/>
+      </p:nvGrpSpPr>
+      <p:grpSpPr>
+        <a:xfrm>
+          <a:off x="0" y="0"/>
+          <a:ext cx="0" cy="0"/>
+          <a:chOff x="0" y="0"/>
+          <a:chExt cx="0" cy="0"/>
+        </a:xfrm>
+      </p:grpSpPr>
+      <p:sp>
+        <p:nvSpPr>
+          <p:cNvPr id="2" name="Title 1"/>
+          <p:cNvSpPr>
+            <a:spLocks noGrp="1"/>
+          </p:cNvSpPr>
+          <p:nvPr>
+            <p:ph type="title"/>
+          </p:nvPr>
+        </p:nvSpPr>
+        <p:spPr/>
+        <p:txBody>
+          <a:bodyPr/>
+          <a:lstStyle/>
+          <a:p>
+            <a:r>
+              <a:t>Testing &amp; Validation Results</a:t>
+            </a:r>
+          </a:p>
+        </p:txBody>
+      </p:sp>
+      <p:sp>
+        <p:nvSpPr>
+          <p:cNvPr id="3" name="Content Placeholder 2"/>
+          <p:cNvSpPr>
+            <a:spLocks noGrp="1"/>
+          </p:cNvSpPr>
+          <p:nvPr>
+            <p:ph idx="1"/>
+          </p:nvPr>
+        </p:nvSpPr>
+        <p:spPr>
+          <a:xfrm>
+            <a:off x="699797" y="1874315"/>
+            <a:ext cx="8677468" cy="3444997"/>
+          </a:xfrm>
+        </p:spPr>
+        <p:txBody>
+          <a:bodyPr>
+            <a:noAutofit/>
+          </a:bodyPr>
+          <a:lstStyle/>
+          <a:p>
+            <a:pPr marL="0" indent="0">
+              <a:buNone/>
+            </a:pPr>
+            <a:endParaRPr dirty="0"/>
+          </a:p>
+          <a:p>
+            <a:r>
+              <a:rPr dirty="0"/>
+              <a:t>Summarization Metrics (Evaluation on </a:t>
+            </a:r>
+            <a:r>
+              <a:rPr lang="en-IN" dirty="0" smtClean="0"/>
+              <a:t>25</a:t>
+            </a:r>
+            <a:r>
+              <a:rPr dirty="0" smtClean="0"/>
+              <a:t> </a:t>
+            </a:r>
+            <a:r>
+              <a:rPr dirty="0"/>
+              <a:t>Docs)</a:t>
+            </a:r>
+          </a:p>
+          <a:p>
+            <a:pPr lvl="1"/>
+            <a:r>
               <a:rPr sz="1800" dirty="0"/>
-              <a:t>Successfully implemented a production-ready </a:t>
+              <a:t>ROUGE-L Score: </a:t>
+            </a:r>
+            <a:r>
+              <a:rPr sz="1800" dirty="0" smtClean="0"/>
+              <a:t>0.7</a:t>
+            </a:r>
+            <a:r>
+              <a:rPr lang="en-IN" sz="1800" dirty="0" smtClean="0"/>
+              <a:t>038</a:t>
+            </a:r>
+            <a:r>
+              <a:rPr sz="1800" dirty="0" smtClean="0"/>
+              <a:t> </a:t>
+            </a:r>
+            <a:r>
+              <a:rPr sz="1800" dirty="0"/>
+              <a:t>(High semantic overlap)</a:t>
+            </a:r>
+          </a:p>
+          <a:p>
+            <a:pPr lvl="1"/>
+            <a:r>
+              <a:rPr sz="1800" dirty="0"/>
+              <a:t>BLEU Score: </a:t>
+            </a:r>
+            <a:r>
+              <a:rPr sz="1800" dirty="0" smtClean="0"/>
+              <a:t>0.</a:t>
+            </a:r>
+            <a:r>
+              <a:rPr lang="en-IN" sz="1800" dirty="0" smtClean="0"/>
+              <a:t>5041</a:t>
+            </a:r>
+            <a:r>
+              <a:rPr sz="1800" dirty="0" smtClean="0"/>
+              <a:t>(Translation </a:t>
+            </a:r>
+            <a:r>
+              <a:rPr sz="1800" dirty="0"/>
+              <a:t>quality)</a:t>
+            </a:r>
+          </a:p>
+          <a:p>
+            <a:r>
+              <a:rPr dirty="0"/>
+              <a:t>Q&amp;A Performance</a:t>
+            </a:r>
+          </a:p>
+          <a:p>
+            <a:pPr lvl="1"/>
+            <a:r>
+              <a:rPr sz="1800" dirty="0"/>
+              <a:t>F1-Score: </a:t>
+            </a:r>
+            <a:r>
+              <a:rPr sz="1800" dirty="0" smtClean="0"/>
+              <a:t>7</a:t>
+            </a:r>
+            <a:r>
+              <a:rPr lang="en-IN" sz="1800" dirty="0" smtClean="0"/>
+              <a:t>3</a:t>
+            </a:r>
+            <a:r>
+              <a:rPr sz="1800" dirty="0" smtClean="0"/>
+              <a:t>.</a:t>
+            </a:r>
+            <a:r>
+              <a:rPr lang="en-IN" sz="1800" dirty="0" smtClean="0"/>
+              <a:t>03</a:t>
+            </a:r>
+            <a:r>
+              <a:rPr sz="1800" dirty="0" smtClean="0"/>
+              <a:t>%</a:t>
+            </a:r>
+            <a:endParaRPr sz="1800" dirty="0"/>
+          </a:p>
+          <a:p>
+            <a:r>
+              <a:rPr dirty="0" smtClean="0"/>
+              <a:t>System </a:t>
+            </a:r>
+            <a:r>
+              <a:rPr dirty="0"/>
+              <a:t>Performance</a:t>
+            </a:r>
+          </a:p>
+          <a:p>
+            <a:pPr lvl="1"/>
+            <a:r>
+              <a:rPr sz="1800" dirty="0" err="1"/>
+              <a:t>Avg</a:t>
+            </a:r>
+            <a:r>
+              <a:rPr sz="1800" dirty="0"/>
+              <a:t> Processing Time: 5.1 seconds/document</a:t>
+            </a:r>
+          </a:p>
+          <a:p>
+            <a:pPr lvl="1"/>
+            <a:r>
+              <a:rPr sz="1800" dirty="0"/>
+              <a:t>Throughput: ~702 documents/hour</a:t>
+            </a:r>
+          </a:p>
+        </p:txBody>
+      </p:sp>
+    </p:spTree>
+  </p:cSld>
+  <p:clrMapOvr>
+    <a:masterClrMapping/>
+  </p:clrMapOvr>
+</p:sld>
+</file>
+
+<file path=ppt/slides/slide19.xml><?xml version="1.0" encoding="utf-8"?>
+<p:sld xmlns:a="http://schemas.openxmlformats.org/drawingml/2006/main" xmlns:r="http://schemas.openxmlformats.org/officeDocument/2006/relationships" xmlns:p="http://schemas.openxmlformats.org/presentationml/2006/main">
+  <p:cSld>
+    <p:spTree>
+      <p:nvGrpSpPr>
+        <p:cNvPr id="1" name=""/>
+        <p:cNvGrpSpPr/>
+        <p:nvPr/>
+      </p:nvGrpSpPr>
+      <p:grpSpPr>
+        <a:xfrm>
+          <a:off x="0" y="0"/>
+          <a:ext cx="0" cy="0"/>
+          <a:chOff x="0" y="0"/>
+          <a:chExt cx="0" cy="0"/>
+        </a:xfrm>
+      </p:grpSpPr>
+      <p:sp>
+        <p:nvSpPr>
+          <p:cNvPr id="2" name="Title 1"/>
+          <p:cNvSpPr>
+            <a:spLocks noGrp="1"/>
+          </p:cNvSpPr>
+          <p:nvPr>
+            <p:ph type="title"/>
+          </p:nvPr>
+        </p:nvSpPr>
+        <p:spPr/>
+        <p:txBody>
+          <a:bodyPr/>
+          <a:lstStyle/>
+          <a:p>
+            <a:r>
+              <a:rPr dirty="0"/>
+              <a:t>Research Paper Publication</a:t>
+            </a:r>
+          </a:p>
+        </p:txBody>
+      </p:sp>
+      <p:sp>
+        <p:nvSpPr>
+          <p:cNvPr id="3" name="Content Placeholder 2"/>
+          <p:cNvSpPr>
+            <a:spLocks noGrp="1"/>
+          </p:cNvSpPr>
+          <p:nvPr>
+            <p:ph idx="1"/>
+          </p:nvPr>
+        </p:nvSpPr>
+        <p:spPr>
+          <a:xfrm>
+            <a:off x="849087" y="1807863"/>
+            <a:ext cx="7707084" cy="3444997"/>
+          </a:xfrm>
+        </p:spPr>
+        <p:txBody>
+          <a:bodyPr>
+            <a:noAutofit/>
+          </a:bodyPr>
+          <a:lstStyle/>
+          <a:p>
+            <a:endParaRPr dirty="0"/>
+          </a:p>
+          <a:p>
+            <a:r>
+              <a:rPr sz="2000" dirty="0"/>
+              <a:t>Title:</a:t>
+            </a:r>
+          </a:p>
+          <a:p>
+            <a:pPr lvl="1"/>
+            <a:r>
+              <a:rPr sz="1800" dirty="0"/>
+              <a:t>"</a:t>
             </a:r>
             <a:r>
               <a:rPr sz="1800" dirty="0" err="1"/>
@@ -7432,69 +8916,97 @@
             </a:r>
             <a:r>
               <a:rPr sz="1800" dirty="0"/>
-              <a:t> Legal AI system.</a:t>
+              <a:t>-Based Indian Legal Case Summarization and Q&amp;A: A Baseline Implementation with Transformer Extension"</a:t>
+            </a:r>
+          </a:p>
+          <a:p>
+            <a:r>
+              <a:rPr sz="2000" dirty="0"/>
+              <a:t>Authors:</a:t>
             </a:r>
           </a:p>
           <a:p>
             <a:pPr lvl="1"/>
             <a:r>
-              <a:rPr sz="1800" dirty="0"/>
-              <a:t>Verified performance with </a:t>
-            </a:r>
-            <a:r>
-              <a:rPr sz="1800" dirty="0" smtClean="0"/>
-              <a:t>ROUGE-L</a:t>
+              <a:rPr lang="en-IN" sz="1800" dirty="0" err="1" smtClean="0"/>
+              <a:t>Sushma</a:t>
             </a:r>
             <a:r>
               <a:rPr lang="en-IN" sz="1800" dirty="0" smtClean="0"/>
               <a:t> </a:t>
             </a:r>
             <a:r>
-              <a:rPr lang="en-IN" sz="1800" dirty="0"/>
-              <a:t>0.7038</a:t>
+              <a:rPr lang="en-IN" sz="1800" dirty="0" err="1" smtClean="0"/>
+              <a:t>Vispute</a:t>
+            </a:r>
+            <a:r>
+              <a:rPr lang="en-IN" sz="1800" dirty="0" smtClean="0"/>
+              <a:t> Mam, </a:t>
+            </a:r>
+            <a:r>
+              <a:rPr sz="1800" dirty="0" err="1" smtClean="0"/>
+              <a:t>Prathmesh</a:t>
             </a:r>
             <a:r>
               <a:rPr sz="1800" dirty="0" smtClean="0"/>
               <a:t> </a:t>
             </a:r>
             <a:r>
+              <a:rPr sz="1800" dirty="0" err="1"/>
+              <a:t>Dudhale</a:t>
+            </a:r>
+            <a:r>
               <a:rPr sz="1800" dirty="0"/>
-              <a:t>and high practitioner utility (Likert 3.74/5).</a:t>
-            </a:r>
-          </a:p>
-          <a:p>
-            <a:r>
-              <a:rPr dirty="0"/>
-              <a:t>Future Work</a:t>
+              <a:t>, Aditya Joshi, </a:t>
+            </a:r>
+            <a:r>
+              <a:rPr sz="1800" dirty="0" err="1"/>
+              <a:t>Aaditesh</a:t>
+            </a:r>
+            <a:r>
+              <a:rPr sz="1800" dirty="0"/>
+              <a:t> </a:t>
+            </a:r>
+            <a:r>
+              <a:rPr sz="1800" dirty="0" err="1"/>
+              <a:t>Kadu</a:t>
+            </a:r>
+            <a:r>
+              <a:rPr sz="1800" dirty="0"/>
+              <a:t>, Vedant Kale</a:t>
+            </a:r>
+          </a:p>
+          <a:p>
+            <a:r>
+              <a:rPr sz="2000" dirty="0"/>
+              <a:t>Abstract Summary:</a:t>
             </a:r>
           </a:p>
           <a:p>
             <a:pPr lvl="1"/>
             <a:r>
               <a:rPr sz="1800" dirty="0"/>
-              <a:t>Transformer Upgrade: Integrate LLMs (GPT-4/</a:t>
+              <a:t>Proposes a comprehensive system based on </a:t>
             </a:r>
             <a:r>
               <a:rPr sz="1800" dirty="0" err="1"/>
-              <a:t>LLaMA</a:t>
+              <a:t>BiLSTM</a:t>
             </a:r>
             <a:r>
               <a:rPr sz="1800" dirty="0"/>
-              <a:t>) for better reasoning.</a:t>
-            </a:r>
-          </a:p>
-          <a:p>
-            <a:pPr lvl="1"/>
+              <a:t> for processing legal documents, tested on 150 documents. Establishes a solid baseline (ROUGE-L </a:t>
+            </a:r>
+            <a:r>
+              <a:rPr lang="en-IN" sz="1800" dirty="0"/>
+              <a:t>0.7038 </a:t>
+            </a:r>
+            <a:r>
+              <a:rPr sz="1800" dirty="0" smtClean="0"/>
+              <a:t>) </a:t>
+            </a:r>
             <a:r>
               <a:rPr sz="1800" dirty="0"/>
-              <a:t>RAG Integration: Retrieval-Augmented Generation for citing specific laws.</a:t>
-            </a:r>
-          </a:p>
-          <a:p>
-            <a:pPr lvl="1"/>
-            <a:r>
-              <a:rPr sz="1800" dirty="0"/>
-              <a:t>Multimodal Support: Handling scanned images/handwritten notes.</a:t>
+              <a:t>while identifying the need for Transformer architectures for complex reasoning.</a:t>
             </a:r>
           </a:p>
         </p:txBody>
@@ -7534,8 +9046,8 @@
         </p:nvSpPr>
         <p:spPr bwMode="auto">
           <a:xfrm>
-            <a:off x="1390262" y="1522035"/>
-            <a:ext cx="5206481" cy="4401205"/>
+            <a:off x="1390262" y="3461027"/>
+            <a:ext cx="5206481" cy="523220"/>
           </a:xfrm>
           <a:prstGeom prst="rect">
             <a:avLst/>
@@ -7599,288 +9111,15 @@
               <a:buChar char="•"/>
               <a:tabLst/>
             </a:pPr>
-            <a:r>
-              <a:rPr kumimoji="0" lang="en-US" altLang="en-US" sz="2800" b="0" i="0" u="none" strike="noStrike" cap="none" normalizeH="0" baseline="0" dirty="0" smtClean="0">
-                <a:ln>
-                  <a:noFill/>
-                </a:ln>
-                <a:solidFill>
-                  <a:schemeClr val="tx1"/>
-                </a:solidFill>
-                <a:effectLst/>
-              </a:rPr>
-              <a:t>Problem Statement</a:t>
-            </a:r>
-          </a:p>
-          <a:p>
-            <a:pPr marL="0" marR="0" lvl="0" indent="0" algn="l" defTabSz="914400" rtl="0" eaLnBrk="0" fontAlgn="base" latinLnBrk="0" hangingPunct="0">
-              <a:lnSpc>
-                <a:spcPct val="100000"/>
-              </a:lnSpc>
-              <a:spcBef>
-                <a:spcPct val="0"/>
-              </a:spcBef>
-              <a:spcAft>
-                <a:spcPct val="0"/>
-              </a:spcAft>
-              <a:buClrTx/>
-              <a:buSzTx/>
-              <a:buFontTx/>
-              <a:buChar char="•"/>
-              <a:tabLst/>
-            </a:pPr>
-            <a:r>
-              <a:rPr kumimoji="0" lang="en-US" altLang="en-US" sz="2800" b="0" i="0" u="none" strike="noStrike" cap="none" normalizeH="0" baseline="0" dirty="0" smtClean="0">
-                <a:ln>
-                  <a:noFill/>
-                </a:ln>
-                <a:solidFill>
-                  <a:schemeClr val="tx1"/>
-                </a:solidFill>
-                <a:effectLst/>
-              </a:rPr>
-              <a:t>Literature Survey</a:t>
-            </a:r>
-          </a:p>
-          <a:p>
-            <a:pPr marL="0" marR="0" lvl="0" indent="0" algn="l" defTabSz="914400" rtl="0" eaLnBrk="0" fontAlgn="base" latinLnBrk="0" hangingPunct="0">
-              <a:lnSpc>
-                <a:spcPct val="100000"/>
-              </a:lnSpc>
-              <a:spcBef>
-                <a:spcPct val="0"/>
-              </a:spcBef>
-              <a:spcAft>
-                <a:spcPct val="0"/>
-              </a:spcAft>
-              <a:buClrTx/>
-              <a:buSzTx/>
-              <a:buFontTx/>
-              <a:buChar char="•"/>
-              <a:tabLst/>
-            </a:pPr>
-            <a:r>
-              <a:rPr kumimoji="0" lang="en-US" altLang="en-US" sz="2800" b="0" i="0" u="none" strike="noStrike" cap="none" normalizeH="0" baseline="0" dirty="0" smtClean="0">
-                <a:ln>
-                  <a:noFill/>
-                </a:ln>
-                <a:solidFill>
-                  <a:schemeClr val="tx1"/>
-                </a:solidFill>
-                <a:effectLst/>
-              </a:rPr>
-              <a:t>Objectives</a:t>
-            </a:r>
-          </a:p>
-          <a:p>
-            <a:pPr marL="0" marR="0" lvl="0" indent="0" algn="l" defTabSz="914400" rtl="0" eaLnBrk="0" fontAlgn="base" latinLnBrk="0" hangingPunct="0">
-              <a:lnSpc>
-                <a:spcPct val="100000"/>
-              </a:lnSpc>
-              <a:spcBef>
-                <a:spcPct val="0"/>
-              </a:spcBef>
-              <a:spcAft>
-                <a:spcPct val="0"/>
-              </a:spcAft>
-              <a:buClrTx/>
-              <a:buSzTx/>
-              <a:buFontTx/>
-              <a:buChar char="•"/>
-              <a:tabLst/>
-            </a:pPr>
-            <a:r>
-              <a:rPr kumimoji="0" lang="en-US" altLang="en-US" sz="2800" b="0" i="0" u="none" strike="noStrike" cap="none" normalizeH="0" baseline="0" dirty="0" smtClean="0">
-                <a:ln>
-                  <a:noFill/>
-                </a:ln>
-                <a:solidFill>
-                  <a:schemeClr val="tx1"/>
-                </a:solidFill>
-                <a:effectLst/>
-              </a:rPr>
-              <a:t>Project Timeline</a:t>
-            </a:r>
-          </a:p>
-          <a:p>
-            <a:pPr marL="0" marR="0" lvl="0" indent="0" algn="l" defTabSz="914400" rtl="0" eaLnBrk="0" fontAlgn="base" latinLnBrk="0" hangingPunct="0">
-              <a:lnSpc>
-                <a:spcPct val="100000"/>
-              </a:lnSpc>
-              <a:spcBef>
-                <a:spcPct val="0"/>
-              </a:spcBef>
-              <a:spcAft>
-                <a:spcPct val="0"/>
-              </a:spcAft>
-              <a:buClrTx/>
-              <a:buSzTx/>
-              <a:buFontTx/>
-              <a:buChar char="•"/>
-              <a:tabLst/>
-            </a:pPr>
-            <a:r>
-              <a:rPr kumimoji="0" lang="en-US" altLang="en-US" sz="2800" b="0" i="0" u="none" strike="noStrike" cap="none" normalizeH="0" baseline="0" dirty="0" smtClean="0">
-                <a:ln>
-                  <a:noFill/>
-                </a:ln>
-                <a:solidFill>
-                  <a:schemeClr val="tx1"/>
-                </a:solidFill>
-                <a:effectLst/>
-              </a:rPr>
-              <a:t>System Architecture</a:t>
-            </a:r>
-          </a:p>
-          <a:p>
-            <a:pPr marL="0" marR="0" lvl="0" indent="0" algn="l" defTabSz="914400" rtl="0" eaLnBrk="0" fontAlgn="base" latinLnBrk="0" hangingPunct="0">
-              <a:lnSpc>
-                <a:spcPct val="100000"/>
-              </a:lnSpc>
-              <a:spcBef>
-                <a:spcPct val="0"/>
-              </a:spcBef>
-              <a:spcAft>
-                <a:spcPct val="0"/>
-              </a:spcAft>
-              <a:buClrTx/>
-              <a:buSzTx/>
-              <a:buFontTx/>
-              <a:buChar char="•"/>
-              <a:tabLst/>
-            </a:pPr>
-            <a:r>
-              <a:rPr kumimoji="0" lang="en-US" altLang="en-US" sz="2800" b="0" i="0" u="none" strike="noStrike" cap="none" normalizeH="0" baseline="0" dirty="0" smtClean="0">
-                <a:ln>
-                  <a:noFill/>
-                </a:ln>
-                <a:solidFill>
-                  <a:schemeClr val="tx1"/>
-                </a:solidFill>
-                <a:effectLst/>
-              </a:rPr>
-              <a:t>Tools &amp; Technologies</a:t>
-            </a:r>
-          </a:p>
-          <a:p>
-            <a:pPr marL="0" marR="0" lvl="0" indent="0" algn="l" defTabSz="914400" rtl="0" eaLnBrk="0" fontAlgn="base" latinLnBrk="0" hangingPunct="0">
-              <a:lnSpc>
-                <a:spcPct val="100000"/>
-              </a:lnSpc>
-              <a:spcBef>
-                <a:spcPct val="0"/>
-              </a:spcBef>
-              <a:spcAft>
-                <a:spcPct val="0"/>
-              </a:spcAft>
-              <a:buClrTx/>
-              <a:buSzTx/>
-              <a:buFontTx/>
-              <a:buChar char="•"/>
-              <a:tabLst/>
-            </a:pPr>
-            <a:r>
-              <a:rPr kumimoji="0" lang="en-US" altLang="en-US" sz="2800" b="0" i="0" u="none" strike="noStrike" cap="none" normalizeH="0" baseline="0" dirty="0" smtClean="0">
-                <a:ln>
-                  <a:noFill/>
-                </a:ln>
-                <a:solidFill>
-                  <a:schemeClr val="tx1"/>
-                </a:solidFill>
-                <a:effectLst/>
-              </a:rPr>
-              <a:t>Module Implementation</a:t>
-            </a:r>
-          </a:p>
-          <a:p>
-            <a:pPr marL="0" marR="0" lvl="0" indent="0" algn="l" defTabSz="914400" rtl="0" eaLnBrk="0" fontAlgn="base" latinLnBrk="0" hangingPunct="0">
-              <a:lnSpc>
-                <a:spcPct val="100000"/>
-              </a:lnSpc>
-              <a:spcBef>
-                <a:spcPct val="0"/>
-              </a:spcBef>
-              <a:spcAft>
-                <a:spcPct val="0"/>
-              </a:spcAft>
-              <a:buClrTx/>
-              <a:buSzTx/>
-              <a:buFontTx/>
-              <a:buChar char="•"/>
-              <a:tabLst/>
-            </a:pPr>
-            <a:r>
-              <a:rPr kumimoji="0" lang="en-US" altLang="en-US" sz="2800" b="0" i="0" u="none" strike="noStrike" cap="none" normalizeH="0" baseline="0" dirty="0" smtClean="0">
-                <a:ln>
-                  <a:noFill/>
-                </a:ln>
-                <a:solidFill>
-                  <a:schemeClr val="tx1"/>
-                </a:solidFill>
-                <a:effectLst/>
-              </a:rPr>
-              <a:t>Testing &amp; Validation</a:t>
-            </a:r>
-          </a:p>
-          <a:p>
-            <a:pPr marL="0" marR="0" lvl="0" indent="0" algn="l" defTabSz="914400" rtl="0" eaLnBrk="0" fontAlgn="base" latinLnBrk="0" hangingPunct="0">
-              <a:lnSpc>
-                <a:spcPct val="100000"/>
-              </a:lnSpc>
-              <a:spcBef>
-                <a:spcPct val="0"/>
-              </a:spcBef>
-              <a:spcAft>
-                <a:spcPct val="0"/>
-              </a:spcAft>
-              <a:buClrTx/>
-              <a:buSzTx/>
-              <a:buFontTx/>
-              <a:buChar char="•"/>
-              <a:tabLst/>
-            </a:pPr>
-            <a:r>
-              <a:rPr kumimoji="0" lang="en-US" altLang="en-US" sz="2800" b="0" i="0" u="none" strike="noStrike" cap="none" normalizeH="0" baseline="0" dirty="0" smtClean="0">
-                <a:ln>
-                  <a:noFill/>
-                </a:ln>
-                <a:solidFill>
-                  <a:schemeClr val="tx1"/>
-                </a:solidFill>
-                <a:effectLst/>
-              </a:rPr>
-              <a:t>Paper Publication Details</a:t>
-            </a:r>
-          </a:p>
-          <a:p>
-            <a:pPr marL="0" marR="0" lvl="0" indent="0" algn="l" defTabSz="914400" rtl="0" eaLnBrk="0" fontAlgn="base" latinLnBrk="0" hangingPunct="0">
-              <a:lnSpc>
-                <a:spcPct val="100000"/>
-              </a:lnSpc>
-              <a:spcBef>
-                <a:spcPct val="0"/>
-              </a:spcBef>
-              <a:spcAft>
-                <a:spcPct val="0"/>
-              </a:spcAft>
-              <a:buClrTx/>
-              <a:buSzTx/>
-              <a:buFontTx/>
-              <a:buChar char="•"/>
-              <a:tabLst/>
-            </a:pPr>
-            <a:r>
-              <a:rPr kumimoji="0" lang="en-US" altLang="en-US" sz="2800" b="0" i="0" u="none" strike="noStrike" cap="none" normalizeH="0" baseline="0" dirty="0" smtClean="0">
-                <a:ln>
-                  <a:noFill/>
-                </a:ln>
-                <a:solidFill>
-                  <a:schemeClr val="tx1"/>
-                </a:solidFill>
-                <a:effectLst/>
-              </a:rPr>
-              <a:t>Conclusion</a:t>
-            </a:r>
+            <a:endParaRPr kumimoji="0" lang="en-US" altLang="en-US" sz="2800" b="0" i="0" u="none" strike="noStrike" cap="none" normalizeH="0" baseline="0" dirty="0" smtClean="0">
+              <a:ln>
+                <a:noFill/>
+              </a:ln>
+              <a:solidFill>
+                <a:schemeClr val="tx1"/>
+              </a:solidFill>
+              <a:effectLst/>
+            </a:endParaRPr>
           </a:p>
         </p:txBody>
       </p:sp>
@@ -7894,7 +9133,7 @@
         </p:nvSpPr>
         <p:spPr>
           <a:xfrm>
-            <a:off x="1176866" y="766047"/>
+            <a:off x="1111552" y="626088"/>
             <a:ext cx="6798734" cy="1303867"/>
           </a:xfrm>
           <a:prstGeom prst="rect">
@@ -7991,7 +9230,628 @@
           </a:p>
         </p:txBody>
       </p:sp>
+      <p:sp>
+        <p:nvSpPr>
+          <p:cNvPr id="8" name="Rectangle 7"/>
+          <p:cNvSpPr/>
+          <p:nvPr/>
+        </p:nvSpPr>
+        <p:spPr>
+          <a:xfrm>
+            <a:off x="1390262" y="1522034"/>
+            <a:ext cx="4572000" cy="4401205"/>
+          </a:xfrm>
+          <a:prstGeom prst="rect">
+            <a:avLst/>
+          </a:prstGeom>
+        </p:spPr>
+        <p:txBody>
+          <a:bodyPr>
+            <a:spAutoFit/>
+          </a:bodyPr>
+          <a:lstStyle/>
+          <a:p>
+            <a:pPr lvl="0" defTabSz="914400" eaLnBrk="0" fontAlgn="base" hangingPunct="0">
+              <a:spcBef>
+                <a:spcPct val="0"/>
+              </a:spcBef>
+              <a:spcAft>
+                <a:spcPct val="0"/>
+              </a:spcAft>
+              <a:buFontTx/>
+              <a:buChar char="•"/>
+            </a:pPr>
+            <a:r>
+              <a:rPr lang="en-US" altLang="en-US" sz="2800" dirty="0">
+                <a:latin typeface="+mj-lt"/>
+              </a:rPr>
+              <a:t>Problem Statement </a:t>
+            </a:r>
+          </a:p>
+          <a:p>
+            <a:pPr lvl="0" defTabSz="914400" eaLnBrk="0" fontAlgn="base" hangingPunct="0">
+              <a:spcBef>
+                <a:spcPct val="0"/>
+              </a:spcBef>
+              <a:spcAft>
+                <a:spcPct val="0"/>
+              </a:spcAft>
+              <a:buFontTx/>
+              <a:buChar char="•"/>
+            </a:pPr>
+            <a:r>
+              <a:rPr lang="en-US" altLang="en-US" sz="2800" dirty="0">
+                <a:latin typeface="+mj-lt"/>
+              </a:rPr>
+              <a:t>Literature Survey </a:t>
+            </a:r>
+          </a:p>
+          <a:p>
+            <a:pPr lvl="0" defTabSz="914400" eaLnBrk="0" fontAlgn="base" hangingPunct="0">
+              <a:spcBef>
+                <a:spcPct val="0"/>
+              </a:spcBef>
+              <a:spcAft>
+                <a:spcPct val="0"/>
+              </a:spcAft>
+              <a:buFontTx/>
+              <a:buChar char="•"/>
+            </a:pPr>
+            <a:r>
+              <a:rPr lang="en-US" altLang="en-US" sz="2800" dirty="0">
+                <a:latin typeface="+mj-lt"/>
+              </a:rPr>
+              <a:t>Objectives </a:t>
+            </a:r>
+          </a:p>
+          <a:p>
+            <a:pPr lvl="0" defTabSz="914400" eaLnBrk="0" fontAlgn="base" hangingPunct="0">
+              <a:spcBef>
+                <a:spcPct val="0"/>
+              </a:spcBef>
+              <a:spcAft>
+                <a:spcPct val="0"/>
+              </a:spcAft>
+              <a:buFontTx/>
+              <a:buChar char="•"/>
+            </a:pPr>
+            <a:r>
+              <a:rPr lang="en-US" altLang="en-US" sz="2800" dirty="0">
+                <a:latin typeface="+mj-lt"/>
+              </a:rPr>
+              <a:t>Project Timeline </a:t>
+            </a:r>
+          </a:p>
+          <a:p>
+            <a:pPr lvl="0" defTabSz="914400" eaLnBrk="0" fontAlgn="base" hangingPunct="0">
+              <a:spcBef>
+                <a:spcPct val="0"/>
+              </a:spcBef>
+              <a:spcAft>
+                <a:spcPct val="0"/>
+              </a:spcAft>
+              <a:buFontTx/>
+              <a:buChar char="•"/>
+            </a:pPr>
+            <a:r>
+              <a:rPr lang="en-US" altLang="en-US" sz="2800" dirty="0">
+                <a:latin typeface="+mj-lt"/>
+              </a:rPr>
+              <a:t>System Architecture </a:t>
+            </a:r>
+          </a:p>
+          <a:p>
+            <a:pPr lvl="0" defTabSz="914400" eaLnBrk="0" fontAlgn="base" hangingPunct="0">
+              <a:spcBef>
+                <a:spcPct val="0"/>
+              </a:spcBef>
+              <a:spcAft>
+                <a:spcPct val="0"/>
+              </a:spcAft>
+              <a:buFontTx/>
+              <a:buChar char="•"/>
+            </a:pPr>
+            <a:r>
+              <a:rPr lang="en-US" altLang="en-US" sz="2800" dirty="0">
+                <a:latin typeface="+mj-lt"/>
+              </a:rPr>
+              <a:t>Tools &amp; Technologies </a:t>
+            </a:r>
+          </a:p>
+          <a:p>
+            <a:pPr lvl="0" defTabSz="914400" eaLnBrk="0" fontAlgn="base" hangingPunct="0">
+              <a:spcBef>
+                <a:spcPct val="0"/>
+              </a:spcBef>
+              <a:spcAft>
+                <a:spcPct val="0"/>
+              </a:spcAft>
+              <a:buFontTx/>
+              <a:buChar char="•"/>
+            </a:pPr>
+            <a:r>
+              <a:rPr lang="en-US" altLang="en-US" sz="2800" dirty="0">
+                <a:latin typeface="+mj-lt"/>
+              </a:rPr>
+              <a:t>Module Implementation </a:t>
+            </a:r>
+          </a:p>
+          <a:p>
+            <a:pPr lvl="0" defTabSz="914400" eaLnBrk="0" fontAlgn="base" hangingPunct="0">
+              <a:spcBef>
+                <a:spcPct val="0"/>
+              </a:spcBef>
+              <a:spcAft>
+                <a:spcPct val="0"/>
+              </a:spcAft>
+              <a:buFontTx/>
+              <a:buChar char="•"/>
+            </a:pPr>
+            <a:r>
+              <a:rPr lang="en-US" altLang="en-US" sz="2800" dirty="0">
+                <a:latin typeface="+mj-lt"/>
+              </a:rPr>
+              <a:t>Testing &amp; Validation </a:t>
+            </a:r>
+          </a:p>
+          <a:p>
+            <a:pPr lvl="0" defTabSz="914400" eaLnBrk="0" fontAlgn="base" hangingPunct="0">
+              <a:spcBef>
+                <a:spcPct val="0"/>
+              </a:spcBef>
+              <a:spcAft>
+                <a:spcPct val="0"/>
+              </a:spcAft>
+              <a:buFontTx/>
+              <a:buChar char="•"/>
+            </a:pPr>
+            <a:r>
+              <a:rPr lang="en-US" altLang="en-US" sz="2800" dirty="0">
+                <a:latin typeface="+mj-lt"/>
+              </a:rPr>
+              <a:t>Paper Publication Details </a:t>
+            </a:r>
+          </a:p>
+          <a:p>
+            <a:pPr lvl="0" defTabSz="914400" eaLnBrk="0" fontAlgn="base" hangingPunct="0">
+              <a:spcBef>
+                <a:spcPct val="0"/>
+              </a:spcBef>
+              <a:spcAft>
+                <a:spcPct val="0"/>
+              </a:spcAft>
+              <a:buFontTx/>
+              <a:buChar char="•"/>
+            </a:pPr>
+            <a:r>
+              <a:rPr lang="en-US" altLang="en-US" sz="2800" dirty="0">
+                <a:latin typeface="+mj-lt"/>
+              </a:rPr>
+              <a:t>Conclusion </a:t>
+            </a:r>
+          </a:p>
+        </p:txBody>
+      </p:sp>
     </p:spTree>
+  </p:cSld>
+  <p:clrMapOvr>
+    <a:masterClrMapping/>
+  </p:clrMapOvr>
+  <p:timing>
+    <p:tnLst>
+      <p:par>
+        <p:cTn id="1" dur="indefinite" restart="never" nodeType="tmRoot"/>
+      </p:par>
+    </p:tnLst>
+  </p:timing>
+</p:sld>
+</file>
+
+<file path=ppt/slides/slide20.xml><?xml version="1.0" encoding="utf-8"?>
+<p:sld xmlns:a="http://schemas.openxmlformats.org/drawingml/2006/main" xmlns:r="http://schemas.openxmlformats.org/officeDocument/2006/relationships" xmlns:p="http://schemas.openxmlformats.org/presentationml/2006/main">
+  <p:cSld>
+    <p:spTree>
+      <p:nvGrpSpPr>
+        <p:cNvPr id="1" name=""/>
+        <p:cNvGrpSpPr/>
+        <p:nvPr/>
+      </p:nvGrpSpPr>
+      <p:grpSpPr>
+        <a:xfrm>
+          <a:off x="0" y="0"/>
+          <a:ext cx="0" cy="0"/>
+          <a:chOff x="0" y="0"/>
+          <a:chExt cx="0" cy="0"/>
+        </a:xfrm>
+      </p:grpSpPr>
+      <p:sp>
+        <p:nvSpPr>
+          <p:cNvPr id="2" name="Title 1"/>
+          <p:cNvSpPr>
+            <a:spLocks noGrp="1"/>
+          </p:cNvSpPr>
+          <p:nvPr>
+            <p:ph type="title"/>
+          </p:nvPr>
+        </p:nvSpPr>
+        <p:spPr/>
+        <p:txBody>
+          <a:bodyPr/>
+          <a:lstStyle/>
+          <a:p>
+            <a:r>
+              <a:t>Conclusion &amp; Future Work</a:t>
+            </a:r>
+          </a:p>
+        </p:txBody>
+      </p:sp>
+      <p:sp>
+        <p:nvSpPr>
+          <p:cNvPr id="3" name="Content Placeholder 2"/>
+          <p:cNvSpPr>
+            <a:spLocks noGrp="1"/>
+          </p:cNvSpPr>
+          <p:nvPr>
+            <p:ph idx="1"/>
+          </p:nvPr>
+        </p:nvSpPr>
+        <p:spPr>
+          <a:xfrm>
+            <a:off x="596727" y="1808999"/>
+            <a:ext cx="7959012" cy="3444997"/>
+          </a:xfrm>
+        </p:spPr>
+        <p:txBody>
+          <a:bodyPr>
+            <a:noAutofit/>
+          </a:bodyPr>
+          <a:lstStyle/>
+          <a:p>
+            <a:endParaRPr sz="2800" dirty="0"/>
+          </a:p>
+          <a:p>
+            <a:r>
+              <a:rPr sz="2800" dirty="0"/>
+              <a:t>Conclusion</a:t>
+            </a:r>
+          </a:p>
+          <a:p>
+            <a:pPr lvl="1"/>
+            <a:r>
+              <a:rPr dirty="0"/>
+              <a:t>Successfully implemented a </a:t>
+            </a:r>
+            <a:r>
+              <a:rPr dirty="0" err="1" smtClean="0"/>
+              <a:t>BiLSTM</a:t>
+            </a:r>
+            <a:r>
+              <a:rPr dirty="0" smtClean="0"/>
+              <a:t> </a:t>
+            </a:r>
+            <a:r>
+              <a:rPr dirty="0"/>
+              <a:t>Legal AI system.</a:t>
+            </a:r>
+          </a:p>
+          <a:p>
+            <a:pPr lvl="1"/>
+            <a:r>
+              <a:rPr dirty="0"/>
+              <a:t>Verified performance with </a:t>
+            </a:r>
+            <a:r>
+              <a:rPr dirty="0" smtClean="0"/>
+              <a:t>ROUGE-L</a:t>
+            </a:r>
+            <a:r>
+              <a:rPr lang="en-IN" dirty="0" smtClean="0"/>
+              <a:t> </a:t>
+            </a:r>
+            <a:r>
+              <a:rPr lang="en-IN" dirty="0"/>
+              <a:t>0.7038</a:t>
+            </a:r>
+            <a:r>
+              <a:rPr dirty="0" smtClean="0"/>
+              <a:t> </a:t>
+            </a:r>
+            <a:r>
+              <a:rPr dirty="0"/>
+              <a:t>and high practitioner utility (Likert 3.74/5).</a:t>
+            </a:r>
+          </a:p>
+          <a:p>
+            <a:r>
+              <a:rPr sz="2800" dirty="0"/>
+              <a:t>Future Work</a:t>
+            </a:r>
+          </a:p>
+          <a:p>
+            <a:pPr lvl="1"/>
+            <a:r>
+              <a:rPr dirty="0"/>
+              <a:t>Transformer Upgrade: Integrate LLMs (GPT-4/</a:t>
+            </a:r>
+            <a:r>
+              <a:rPr dirty="0" err="1"/>
+              <a:t>LLaMA</a:t>
+            </a:r>
+            <a:r>
+              <a:rPr dirty="0"/>
+              <a:t>) for better reasoning.</a:t>
+            </a:r>
+          </a:p>
+          <a:p>
+            <a:pPr lvl="1"/>
+            <a:r>
+              <a:rPr dirty="0"/>
+              <a:t>RAG Integration: Retrieval-Augmented Generation for citing specific laws</a:t>
+            </a:r>
+            <a:r>
+              <a:rPr dirty="0" smtClean="0"/>
+              <a:t>.</a:t>
+            </a:r>
+            <a:endParaRPr dirty="0"/>
+          </a:p>
+        </p:txBody>
+      </p:sp>
+    </p:spTree>
+  </p:cSld>
+  <p:clrMapOvr>
+    <a:masterClrMapping/>
+  </p:clrMapOvr>
+</p:sld>
+</file>
+
+<file path=ppt/slides/slide21.xml><?xml version="1.0" encoding="utf-8"?>
+<p:sld xmlns:a="http://schemas.openxmlformats.org/drawingml/2006/main" xmlns:r="http://schemas.openxmlformats.org/officeDocument/2006/relationships" xmlns:p="http://schemas.openxmlformats.org/presentationml/2006/main">
+  <p:cSld>
+    <p:spTree>
+      <p:nvGrpSpPr>
+        <p:cNvPr id="1" name=""/>
+        <p:cNvGrpSpPr/>
+        <p:nvPr/>
+      </p:nvGrpSpPr>
+      <p:grpSpPr>
+        <a:xfrm>
+          <a:off x="0" y="0"/>
+          <a:ext cx="0" cy="0"/>
+          <a:chOff x="0" y="0"/>
+          <a:chExt cx="0" cy="0"/>
+        </a:xfrm>
+      </p:grpSpPr>
+      <p:sp>
+        <p:nvSpPr>
+          <p:cNvPr id="2" name="Title 1"/>
+          <p:cNvSpPr>
+            <a:spLocks noGrp="1"/>
+          </p:cNvSpPr>
+          <p:nvPr>
+            <p:ph type="title"/>
+          </p:nvPr>
+        </p:nvSpPr>
+        <p:spPr/>
+        <p:txBody>
+          <a:bodyPr/>
+          <a:lstStyle/>
+          <a:p>
+            <a:r>
+              <a:rPr lang="en-IN" dirty="0" smtClean="0"/>
+              <a:t>References</a:t>
+            </a:r>
+            <a:endParaRPr dirty="0"/>
+          </a:p>
+        </p:txBody>
+      </p:sp>
+      <p:sp>
+        <p:nvSpPr>
+          <p:cNvPr id="3" name="Content Placeholder 2"/>
+          <p:cNvSpPr>
+            <a:spLocks noGrp="1"/>
+          </p:cNvSpPr>
+          <p:nvPr>
+            <p:ph idx="1"/>
+          </p:nvPr>
+        </p:nvSpPr>
+        <p:spPr>
+          <a:xfrm>
+            <a:off x="787789" y="2574110"/>
+            <a:ext cx="7731061" cy="3444997"/>
+          </a:xfrm>
+        </p:spPr>
+        <p:txBody>
+          <a:bodyPr>
+            <a:noAutofit/>
+          </a:bodyPr>
+          <a:lstStyle/>
+          <a:p>
+            <a:pPr marL="0" indent="0">
+              <a:buNone/>
+            </a:pPr>
+            <a:r>
+              <a:rPr lang="en-IN" sz="1800" dirty="0"/>
+              <a:t>[1] S. K. Nigam, S. K. Mishra, A. K. Mishra, N. Shallum, and A. Bhattacharya,</a:t>
+            </a:r>
+            <a:br>
+              <a:rPr lang="en-IN" sz="1800" dirty="0"/>
+            </a:br>
+            <a:r>
+              <a:rPr lang="en-IN" sz="1800" dirty="0"/>
+              <a:t>“</a:t>
+            </a:r>
+            <a:r>
+              <a:rPr lang="en-IN" sz="1800" b="1" dirty="0"/>
+              <a:t>Legal Question-Answering in the Indian Context: Efficacy, Challenges, and Potential of Modern AI Models</a:t>
+            </a:r>
+            <a:r>
+              <a:rPr lang="en-IN" sz="1800" dirty="0"/>
+              <a:t>,” </a:t>
+            </a:r>
+            <a:r>
+              <a:rPr lang="en-IN" sz="1800" i="1" dirty="0" err="1"/>
+              <a:t>arXiv</a:t>
+            </a:r>
+            <a:r>
+              <a:rPr lang="en-IN" sz="1800" i="1" dirty="0"/>
+              <a:t> preprint arXiv:2309.14735</a:t>
+            </a:r>
+            <a:r>
+              <a:rPr lang="en-IN" sz="1800" dirty="0"/>
+              <a:t>, 2023.</a:t>
+            </a:r>
+          </a:p>
+          <a:p>
+            <a:pPr marL="0" indent="0">
+              <a:buNone/>
+            </a:pPr>
+            <a:r>
+              <a:rPr lang="en-IN" sz="1800" dirty="0"/>
+              <a:t>[2] S. </a:t>
+            </a:r>
+            <a:r>
+              <a:rPr lang="en-IN" sz="1800" dirty="0" err="1"/>
+              <a:t>Akter</a:t>
+            </a:r>
+            <a:r>
+              <a:rPr lang="en-IN" sz="1800" dirty="0"/>
+              <a:t>, E. Cano, C. Weber, and M. </a:t>
+            </a:r>
+            <a:r>
+              <a:rPr lang="en-IN" sz="1800" dirty="0" err="1"/>
+              <a:t>Dobler</a:t>
+            </a:r>
+            <a:r>
+              <a:rPr lang="en-IN" sz="1800" dirty="0"/>
+              <a:t>,</a:t>
+            </a:r>
+            <a:br>
+              <a:rPr lang="en-IN" sz="1800" dirty="0"/>
+            </a:br>
+            <a:r>
+              <a:rPr lang="en-IN" sz="1800" dirty="0"/>
+              <a:t>“</a:t>
+            </a:r>
+            <a:r>
+              <a:rPr lang="en-IN" sz="1800" b="1" dirty="0"/>
+              <a:t>A Comprehensive Survey on Legal Text Summarization: Techniques, Datasets, and Challenges</a:t>
+            </a:r>
+            <a:r>
+              <a:rPr lang="en-IN" sz="1800" dirty="0"/>
+              <a:t>,” </a:t>
+            </a:r>
+            <a:r>
+              <a:rPr lang="en-IN" sz="1800" i="1" dirty="0" err="1"/>
+              <a:t>arXiv</a:t>
+            </a:r>
+            <a:r>
+              <a:rPr lang="en-IN" sz="1800" i="1" dirty="0"/>
+              <a:t> preprint</a:t>
+            </a:r>
+            <a:r>
+              <a:rPr lang="en-IN" sz="1800" dirty="0"/>
+              <a:t>, 2025.</a:t>
+            </a:r>
+          </a:p>
+          <a:p>
+            <a:pPr marL="0" indent="0">
+              <a:buNone/>
+            </a:pPr>
+            <a:r>
+              <a:rPr lang="en-IN" sz="1800" dirty="0"/>
+              <a:t>[3] R. Sharma et al.,</a:t>
+            </a:r>
+            <a:br>
+              <a:rPr lang="en-IN" sz="1800" dirty="0"/>
+            </a:br>
+            <a:r>
+              <a:rPr lang="en-IN" sz="1800" dirty="0"/>
+              <a:t>“</a:t>
+            </a:r>
+            <a:r>
+              <a:rPr lang="en-IN" sz="1800" b="1" dirty="0"/>
+              <a:t>Legal and Financial Document Summarization Using Transformer-Based Architectures</a:t>
+            </a:r>
+            <a:r>
+              <a:rPr lang="en-IN" sz="1800" dirty="0"/>
+              <a:t>,” </a:t>
+            </a:r>
+            <a:r>
+              <a:rPr lang="en-IN" sz="1800" i="1" dirty="0"/>
+              <a:t>Open Access International Journal of Science and Engineering</a:t>
+            </a:r>
+            <a:r>
+              <a:rPr lang="en-IN" sz="1800" dirty="0"/>
+              <a:t>, vol. 9, no. 8, pp. 1–15, 2024.</a:t>
+            </a:r>
+          </a:p>
+        </p:txBody>
+      </p:sp>
+    </p:spTree>
+    <p:extLst>
+      <p:ext uri="{BB962C8B-B14F-4D97-AF65-F5344CB8AC3E}">
+        <p14:creationId xmlns:p14="http://schemas.microsoft.com/office/powerpoint/2010/main" val="1415995717"/>
+      </p:ext>
+    </p:extLst>
+  </p:cSld>
+  <p:clrMapOvr>
+    <a:masterClrMapping/>
+  </p:clrMapOvr>
+</p:sld>
+</file>
+
+<file path=ppt/slides/slide22.xml><?xml version="1.0" encoding="utf-8"?>
+<p:sld xmlns:a="http://schemas.openxmlformats.org/drawingml/2006/main" xmlns:r="http://schemas.openxmlformats.org/officeDocument/2006/relationships" xmlns:p="http://schemas.openxmlformats.org/presentationml/2006/main">
+  <p:cSld>
+    <p:spTree>
+      <p:nvGrpSpPr>
+        <p:cNvPr id="1" name=""/>
+        <p:cNvGrpSpPr/>
+        <p:nvPr/>
+      </p:nvGrpSpPr>
+      <p:grpSpPr>
+        <a:xfrm>
+          <a:off x="0" y="0"/>
+          <a:ext cx="0" cy="0"/>
+          <a:chOff x="0" y="0"/>
+          <a:chExt cx="0" cy="0"/>
+        </a:xfrm>
+      </p:grpSpPr>
+      <p:sp>
+        <p:nvSpPr>
+          <p:cNvPr id="6" name="Rectangle 5"/>
+          <p:cNvSpPr/>
+          <p:nvPr/>
+        </p:nvSpPr>
+        <p:spPr>
+          <a:xfrm>
+            <a:off x="883183" y="2581861"/>
+            <a:ext cx="7129901" cy="1862048"/>
+          </a:xfrm>
+          <a:prstGeom prst="rect">
+            <a:avLst/>
+          </a:prstGeom>
+        </p:spPr>
+        <p:txBody>
+          <a:bodyPr wrap="none">
+            <a:spAutoFit/>
+          </a:bodyPr>
+          <a:lstStyle/>
+          <a:p>
+            <a:r>
+              <a:rPr lang="en-GB" sz="11500" b="1" dirty="0"/>
+              <a:t>Thank You</a:t>
+            </a:r>
+            <a:endParaRPr lang="en-GB" sz="11500" b="1" dirty="0"/>
+          </a:p>
+        </p:txBody>
+      </p:sp>
+    </p:spTree>
+    <p:extLst>
+      <p:ext uri="{BB962C8B-B14F-4D97-AF65-F5344CB8AC3E}">
+        <p14:creationId xmlns:p14="http://schemas.microsoft.com/office/powerpoint/2010/main" val="1393593965"/>
+      </p:ext>
+    </p:extLst>
   </p:cSld>
   <p:clrMapOvr>
     <a:masterClrMapping/>
@@ -8118,12 +9978,16 @@
         </p:nvSpPr>
         <p:spPr/>
         <p:txBody>
-          <a:bodyPr/>
-          <a:lstStyle/>
-          <a:p>
-            <a:r>
-              <a:t>Project Topic &amp; Complexity</a:t>
-            </a:r>
+          <a:bodyPr>
+            <a:normAutofit/>
+          </a:bodyPr>
+          <a:lstStyle/>
+          <a:p>
+            <a:r>
+              <a:rPr lang="en-IN" sz="4800" dirty="0" smtClean="0"/>
+              <a:t>Motivation</a:t>
+            </a:r>
+            <a:endParaRPr sz="4800" dirty="0"/>
           </a:p>
         </p:txBody>
       </p:sp>
@@ -8139,8 +10003,8 @@
         </p:nvSpPr>
         <p:spPr>
           <a:xfrm>
-            <a:off x="522082" y="2312854"/>
-            <a:ext cx="8108301" cy="3444997"/>
+            <a:off x="867747" y="2396829"/>
+            <a:ext cx="7604449" cy="3444997"/>
           </a:xfrm>
         </p:spPr>
         <p:txBody>
@@ -8149,82 +10013,87 @@
           </a:bodyPr>
           <a:lstStyle/>
           <a:p>
-            <a:r>
-              <a:rPr sz="2000" dirty="0"/>
-              <a:t>Project Topic</a:t>
-            </a:r>
-          </a:p>
-          <a:p>
-            <a:pPr lvl="1"/>
-            <a:r>
-              <a:rPr sz="1800" dirty="0"/>
-              <a:t>Automated processing of Indian legal documents (Judgments, Case Briefs) using Deep Learning.</a:t>
-            </a:r>
-          </a:p>
-          <a:p>
-            <a:r>
-              <a:rPr sz="2000" dirty="0"/>
-              <a:t>Complexity of Work</a:t>
-            </a:r>
-          </a:p>
-          <a:p>
-            <a:pPr lvl="1"/>
-            <a:r>
-              <a:rPr sz="1800" dirty="0"/>
-              <a:t>Implementation of </a:t>
-            </a:r>
-            <a:r>
-              <a:rPr sz="1800" dirty="0" err="1"/>
-              <a:t>BiLSTM</a:t>
-            </a:r>
-            <a:r>
-              <a:rPr sz="1800" dirty="0"/>
-              <a:t> Encoder-Decoder architecture with Attention Mechanism.</a:t>
-            </a:r>
-          </a:p>
-          <a:p>
-            <a:pPr lvl="1"/>
-            <a:r>
-              <a:rPr sz="1800" dirty="0"/>
-              <a:t>Custom NLP pipeline: Tokenization, </a:t>
-            </a:r>
-            <a:r>
-              <a:rPr sz="1800" dirty="0" err="1"/>
-              <a:t>GloVe</a:t>
-            </a:r>
-            <a:r>
-              <a:rPr sz="1800" dirty="0"/>
-              <a:t> </a:t>
-            </a:r>
-            <a:r>
-              <a:rPr sz="1800" dirty="0" err="1"/>
-              <a:t>Embeddings</a:t>
-            </a:r>
-            <a:r>
-              <a:rPr sz="1800" dirty="0"/>
-              <a:t> (300d), Sequence Padding.</a:t>
-            </a:r>
-          </a:p>
-          <a:p>
-            <a:r>
-              <a:rPr sz="2000" dirty="0" smtClean="0"/>
-              <a:t>Sustainability</a:t>
-            </a:r>
-            <a:endParaRPr sz="2000" dirty="0"/>
-          </a:p>
-          <a:p>
-            <a:pPr lvl="1"/>
-            <a:r>
-              <a:rPr sz="1800" dirty="0"/>
-              <a:t>Modular architecture allows future integration of Transformers (BERT/GPT).</a:t>
-            </a:r>
+            <a:pPr marL="0" indent="0">
+              <a:buNone/>
+            </a:pPr>
+            <a:r>
+              <a:rPr lang="en-GB" sz="2800" b="1" dirty="0"/>
+              <a:t>Why This Project Matters</a:t>
+            </a:r>
+          </a:p>
+          <a:p>
+            <a:r>
+              <a:rPr lang="en-GB" dirty="0" smtClean="0"/>
+              <a:t>⚖ </a:t>
+            </a:r>
+            <a:r>
+              <a:rPr lang="en-GB" dirty="0"/>
+              <a:t>Indian courts generate </a:t>
+            </a:r>
+            <a:r>
+              <a:rPr lang="en-GB" b="1" dirty="0"/>
+              <a:t>millions of pages annually</a:t>
+            </a:r>
+            <a:endParaRPr lang="en-GB" dirty="0"/>
+          </a:p>
+          <a:p>
+            <a:r>
+              <a:rPr lang="en-GB" dirty="0"/>
+              <a:t>👨</a:t>
+            </a:r>
+            <a:r>
+              <a:rPr lang="en-GB" dirty="0" smtClean="0"/>
+              <a:t>‍ Lawyers </a:t>
+            </a:r>
+            <a:r>
+              <a:rPr lang="en-GB" dirty="0"/>
+              <a:t>spend </a:t>
+            </a:r>
+            <a:r>
+              <a:rPr lang="en-GB" b="1" dirty="0"/>
+              <a:t>30–40% time</a:t>
+            </a:r>
+            <a:r>
+              <a:rPr lang="en-GB" dirty="0"/>
+              <a:t> on document reading &amp; research</a:t>
+            </a:r>
+          </a:p>
+          <a:p>
+            <a:r>
+              <a:rPr lang="en-GB" dirty="0"/>
+              <a:t>📚 Law students struggle with </a:t>
+            </a:r>
+            <a:r>
+              <a:rPr lang="en-GB" b="1" dirty="0"/>
+              <a:t>quick understanding of judgments</a:t>
+            </a:r>
+            <a:endParaRPr lang="en-GB" dirty="0"/>
+          </a:p>
+          <a:p>
+            <a:r>
+              <a:rPr lang="en-GB" dirty="0"/>
+              <a:t>🚀 </a:t>
+            </a:r>
+            <a:r>
+              <a:rPr lang="en-GB" dirty="0" err="1"/>
+              <a:t>LegalTech</a:t>
+            </a:r>
+            <a:r>
+              <a:rPr lang="en-GB" dirty="0"/>
+              <a:t> adoption in India is </a:t>
+            </a:r>
+            <a:r>
+              <a:rPr lang="en-GB" b="1" dirty="0"/>
+              <a:t>still in early stages</a:t>
+            </a:r>
+            <a:endParaRPr lang="en-GB" dirty="0"/>
           </a:p>
         </p:txBody>
       </p:sp>
     </p:spTree>
     <p:extLst>
       <p:ext uri="{BB962C8B-B14F-4D97-AF65-F5344CB8AC3E}">
-        <p14:creationId xmlns:p14="http://schemas.microsoft.com/office/powerpoint/2010/main" val="3797270530"/>
+        <p14:creationId xmlns:p14="http://schemas.microsoft.com/office/powerpoint/2010/main" val="922467354"/>
       </p:ext>
     </p:extLst>
   </p:cSld>
@@ -8267,8 +10136,7 @@
           <a:lstStyle/>
           <a:p>
             <a:r>
-              <a:rPr dirty="0"/>
-              <a:t>Literature Survey</a:t>
+              <a:t>Project Objectives</a:t>
             </a:r>
           </a:p>
         </p:txBody>
@@ -8285,8 +10153,8 @@
         </p:nvSpPr>
         <p:spPr>
           <a:xfrm>
-            <a:off x="732020" y="2004600"/>
-            <a:ext cx="7688425" cy="3444997"/>
+            <a:off x="797335" y="2435017"/>
+            <a:ext cx="7557796" cy="3444997"/>
           </a:xfrm>
         </p:spPr>
         <p:txBody>
@@ -8295,60 +10163,63 @@
           </a:bodyPr>
           <a:lstStyle/>
           <a:p>
-            <a:endParaRPr dirty="0"/>
-          </a:p>
-          <a:p>
-            <a:r>
-              <a:rPr dirty="0"/>
-              <a:t>Key Foundation: Nigam et al. (2023)</a:t>
-            </a:r>
-          </a:p>
-          <a:p>
-            <a:pPr lvl="1"/>
-            <a:r>
-              <a:rPr dirty="0"/>
-              <a:t>Analyzed AI for Indian Legal Q&amp;A; highlighted complexity of Indian criminal justice system.</a:t>
-            </a:r>
-          </a:p>
-          <a:p>
-            <a:r>
-              <a:rPr dirty="0"/>
-              <a:t>Legal Summarization: </a:t>
-            </a:r>
-            <a:r>
-              <a:rPr dirty="0" err="1"/>
-              <a:t>Akter</a:t>
-            </a:r>
-            <a:r>
-              <a:rPr dirty="0"/>
-              <a:t> et al. (2025)</a:t>
-            </a:r>
-          </a:p>
-          <a:p>
-            <a:pPr lvl="1"/>
-            <a:r>
-              <a:rPr dirty="0"/>
-              <a:t>Identified gaps in domain-centric benchmarking for legal texts.</a:t>
-            </a:r>
-          </a:p>
-          <a:p>
-            <a:r>
-              <a:rPr dirty="0"/>
-              <a:t>Research Gaps Addressed</a:t>
-            </a:r>
-          </a:p>
-          <a:p>
-            <a:pPr lvl="1"/>
-            <a:r>
-              <a:rPr dirty="0"/>
-              <a:t>Lack of baseline systems specifically for Indian Legal Datasets.</a:t>
-            </a:r>
-          </a:p>
-          <a:p>
-            <a:pPr lvl="1"/>
-            <a:r>
-              <a:rPr dirty="0"/>
-              <a:t>Absence of production-ready interfaces for legal practitioners.</a:t>
+            <a:r>
+              <a:rPr lang="en-GB" b="1" dirty="0" smtClean="0"/>
+              <a:t>To </a:t>
+            </a:r>
+            <a:r>
+              <a:rPr lang="en-GB" b="1" dirty="0" err="1"/>
+              <a:t>analyze</a:t>
+            </a:r>
+            <a:r>
+              <a:rPr lang="en-GB" dirty="0"/>
+              <a:t> the challenges in processing Indian legal documents using NLP.</a:t>
+            </a:r>
+          </a:p>
+          <a:p>
+            <a:r>
+              <a:rPr lang="en-GB" b="1" dirty="0"/>
+              <a:t>To collect</a:t>
+            </a:r>
+            <a:r>
+              <a:rPr lang="en-GB" dirty="0"/>
+              <a:t> and </a:t>
+            </a:r>
+            <a:r>
+              <a:rPr lang="en-GB" dirty="0" err="1"/>
+              <a:t>preprocess</a:t>
+            </a:r>
+            <a:r>
+              <a:rPr lang="en-GB" dirty="0"/>
+              <a:t> Indian legal judgments and case briefs.</a:t>
+            </a:r>
+          </a:p>
+          <a:p>
+            <a:r>
+              <a:rPr lang="en-GB" b="1" dirty="0"/>
+              <a:t>To design</a:t>
+            </a:r>
+            <a:r>
+              <a:rPr lang="en-GB" dirty="0"/>
+              <a:t> a </a:t>
+            </a:r>
+            <a:r>
+              <a:rPr lang="en-GB" dirty="0" err="1"/>
+              <a:t>BiLSTM</a:t>
+            </a:r>
+            <a:r>
+              <a:rPr lang="en-GB" dirty="0"/>
+              <a:t> Encoder–Decoder architecture with attention.</a:t>
+            </a:r>
+          </a:p>
+          <a:p>
+            <a:r>
+              <a:rPr lang="en-GB" b="1" dirty="0"/>
+              <a:t>To identify</a:t>
+            </a:r>
+            <a:r>
+              <a:rPr lang="en-GB" dirty="0"/>
+              <a:t> performance limitations and propose Transformer-based extensions.</a:t>
             </a:r>
           </a:p>
         </p:txBody>
@@ -8394,9 +10265,10 @@
           <a:lstStyle/>
           <a:p>
             <a:r>
-              <a:rPr dirty="0"/>
-              <a:t>Requirement Analysis</a:t>
-            </a:r>
+              <a:rPr lang="en-GB" dirty="0" smtClean="0"/>
+              <a:t>Scope and Feasibility</a:t>
+            </a:r>
+            <a:endParaRPr dirty="0"/>
           </a:p>
         </p:txBody>
       </p:sp>
@@ -8412,8 +10284,8 @@
         </p:nvSpPr>
         <p:spPr>
           <a:xfrm>
-            <a:off x="821265" y="1911638"/>
-            <a:ext cx="7509935" cy="3444997"/>
+            <a:off x="1035699" y="1855654"/>
+            <a:ext cx="8108301" cy="3444997"/>
           </a:xfrm>
         </p:spPr>
         <p:txBody>
@@ -8422,101 +10294,55 @@
           </a:bodyPr>
           <a:lstStyle/>
           <a:p>
-            <a:endParaRPr sz="2000" dirty="0"/>
-          </a:p>
-          <a:p>
-            <a:r>
-              <a:rPr sz="2000" dirty="0"/>
-              <a:t>Functional Requirements</a:t>
+            <a:endParaRPr lang="en-GB" sz="2800" b="1" dirty="0"/>
+          </a:p>
+          <a:p>
+            <a:r>
+              <a:rPr lang="en-GB" sz="2800" dirty="0"/>
+              <a:t>Summarization of:</a:t>
             </a:r>
           </a:p>
           <a:p>
             <a:pPr lvl="1"/>
             <a:r>
-              <a:rPr sz="1800" dirty="0"/>
-              <a:t>Input: PDF/DOCX Legal Documents.</a:t>
+              <a:rPr lang="en-GB" sz="2400" dirty="0"/>
+              <a:t>Supreme Court Judgments</a:t>
             </a:r>
           </a:p>
           <a:p>
             <a:pPr lvl="1"/>
             <a:r>
-              <a:rPr sz="1800" dirty="0"/>
-              <a:t>Core: Abstractive Summarization &amp; Fact-based Q&amp;A.</a:t>
-            </a:r>
-          </a:p>
-          <a:p>
-            <a:r>
-              <a:rPr sz="2000" dirty="0"/>
-              <a:t>Non-Functional Requirements</a:t>
+              <a:rPr lang="en-GB" sz="2400" dirty="0"/>
+              <a:t>High Court Judgments</a:t>
             </a:r>
           </a:p>
           <a:p>
             <a:pPr lvl="1"/>
             <a:r>
-              <a:rPr sz="1800" dirty="0"/>
-              <a:t>Performance: High ROUGE-L scores </a:t>
-            </a:r>
-            <a:r>
-              <a:rPr sz="1800" dirty="0" smtClean="0"/>
-              <a:t>(&gt;</a:t>
-            </a:r>
-            <a:r>
-              <a:rPr lang="en-IN" sz="1800" dirty="0"/>
-              <a:t> </a:t>
-            </a:r>
-            <a:r>
-              <a:rPr lang="en-IN" sz="1800" dirty="0" smtClean="0"/>
-              <a:t>0.70 </a:t>
-            </a:r>
-            <a:r>
-              <a:rPr sz="1800" dirty="0" smtClean="0"/>
-              <a:t>).</a:t>
-            </a:r>
-            <a:endParaRPr sz="1800" dirty="0"/>
-          </a:p>
-          <a:p>
-            <a:pPr lvl="1"/>
-            <a:r>
-              <a:rPr sz="1800" dirty="0"/>
-              <a:t>Latency: Near real-time processing (&lt;6s per doc).</a:t>
-            </a:r>
-          </a:p>
-          <a:p>
-            <a:r>
-              <a:rPr sz="2000" dirty="0"/>
-              <a:t>Dataset Requirements</a:t>
-            </a:r>
-          </a:p>
-          <a:p>
-            <a:pPr lvl="1"/>
-            <a:r>
-              <a:rPr sz="1800" dirty="0"/>
-              <a:t>Source: Supreme Court &amp; High Court </a:t>
-            </a:r>
-            <a:r>
-              <a:rPr sz="1800" dirty="0" smtClean="0"/>
-              <a:t>Judgments</a:t>
-            </a:r>
-            <a:r>
-              <a:rPr lang="en-IN" sz="1800" dirty="0" smtClean="0"/>
-              <a:t> (Web Scraping)</a:t>
-            </a:r>
-            <a:r>
-              <a:rPr sz="1800" dirty="0" smtClean="0"/>
-              <a:t>.</a:t>
-            </a:r>
-            <a:endParaRPr sz="1800" dirty="0"/>
-          </a:p>
-          <a:p>
-            <a:pPr lvl="1"/>
-            <a:r>
-              <a:rPr sz="1800" dirty="0"/>
-              <a:t>Size: 150 Documents (2000 - 50,000 words each).</a:t>
+              <a:rPr lang="en-GB" sz="2400" dirty="0"/>
+              <a:t>Statutory Documents</a:t>
+            </a:r>
+          </a:p>
+          <a:p>
+            <a:r>
+              <a:rPr lang="en-GB" sz="2800" dirty="0"/>
+              <a:t>Fact-based legal Q&amp;A</a:t>
+            </a:r>
+          </a:p>
+          <a:p>
+            <a:r>
+              <a:rPr lang="en-GB" sz="2800" dirty="0"/>
+              <a:t>English-language legal documents only</a:t>
             </a:r>
           </a:p>
         </p:txBody>
       </p:sp>
     </p:spTree>
+    <p:extLst>
+      <p:ext uri="{BB962C8B-B14F-4D97-AF65-F5344CB8AC3E}">
+        <p14:creationId xmlns:p14="http://schemas.microsoft.com/office/powerpoint/2010/main" val="3797270530"/>
+      </p:ext>
+    </p:extLst>
   </p:cSld>
   <p:clrMapOvr>
     <a:masterClrMapping/>
@@ -8557,7 +10383,8 @@
           <a:lstStyle/>
           <a:p>
             <a:r>
-              <a:t>Project Objectives</a:t>
+              <a:rPr dirty="0"/>
+              <a:t>Literature Survey</a:t>
             </a:r>
           </a:p>
         </p:txBody>
@@ -8574,8 +10401,8 @@
         </p:nvSpPr>
         <p:spPr>
           <a:xfrm>
-            <a:off x="774441" y="1567270"/>
-            <a:ext cx="7557796" cy="3444997"/>
+            <a:off x="1176866" y="2443139"/>
+            <a:ext cx="7688425" cy="3444997"/>
           </a:xfrm>
         </p:spPr>
         <p:txBody>
@@ -8584,70 +10411,68 @@
           </a:bodyPr>
           <a:lstStyle/>
           <a:p>
-            <a:pPr marL="0" indent="0">
-              <a:lnSpc>
-                <a:spcPct val="150000"/>
-              </a:lnSpc>
-              <a:buNone/>
-            </a:pPr>
-            <a:endParaRPr lang="en-GB" sz="3200" dirty="0"/>
-          </a:p>
-          <a:p>
-            <a:pPr marL="457200" lvl="1" indent="0">
-              <a:lnSpc>
-                <a:spcPct val="150000"/>
-              </a:lnSpc>
-              <a:buNone/>
-            </a:pPr>
-            <a:r>
-              <a:rPr lang="en-GB" sz="2800" dirty="0"/>
-              <a:t>• Automate summarization of Indian legal docs</a:t>
-            </a:r>
-          </a:p>
-          <a:p>
-            <a:pPr marL="457200" lvl="1" indent="0">
-              <a:lnSpc>
-                <a:spcPct val="150000"/>
-              </a:lnSpc>
-              <a:buNone/>
-            </a:pPr>
-            <a:r>
-              <a:rPr lang="en-GB" sz="2800" dirty="0"/>
-              <a:t>• Provide Q&amp;A from legal judgements</a:t>
-            </a:r>
-          </a:p>
-          <a:p>
-            <a:pPr marL="457200" lvl="1" indent="0">
-              <a:lnSpc>
-                <a:spcPct val="150000"/>
-              </a:lnSpc>
-              <a:buNone/>
-            </a:pPr>
-            <a:r>
-              <a:rPr lang="en-GB" sz="2800" dirty="0"/>
-              <a:t>• Use </a:t>
-            </a:r>
-            <a:r>
-              <a:rPr lang="en-GB" sz="2800" dirty="0" err="1"/>
-              <a:t>BiLSTM+Attention</a:t>
-            </a:r>
-            <a:r>
-              <a:rPr lang="en-GB" sz="2800" dirty="0"/>
-              <a:t> for baseline model</a:t>
-            </a:r>
-          </a:p>
-          <a:p>
-            <a:pPr marL="457200" lvl="1" indent="0">
-              <a:lnSpc>
-                <a:spcPct val="150000"/>
-              </a:lnSpc>
-              <a:buNone/>
-            </a:pPr>
-            <a:r>
-              <a:rPr lang="en-GB" sz="2800" dirty="0"/>
-              <a:t>• Ensure measurable accuracy &amp; performance</a:t>
-            </a:r>
-            <a:endParaRPr lang="en-GB" sz="2800" dirty="0"/>
+            <a:r>
+              <a:rPr lang="en-IN" sz="2800" dirty="0" smtClean="0"/>
+              <a:t>Legal </a:t>
+            </a:r>
+            <a:r>
+              <a:rPr lang="en-IN" sz="2800" dirty="0"/>
+              <a:t>Q&amp;A systems in Indian context</a:t>
+            </a:r>
+          </a:p>
+          <a:p>
+            <a:r>
+              <a:rPr lang="en-IN" sz="2800" dirty="0"/>
+              <a:t>Legal document summarization techniques</a:t>
+            </a:r>
+          </a:p>
+          <a:p>
+            <a:r>
+              <a:rPr lang="en-IN" sz="2800" dirty="0" err="1"/>
+              <a:t>BiLSTM</a:t>
+            </a:r>
+            <a:r>
+              <a:rPr lang="en-IN" sz="2800" dirty="0"/>
+              <a:t> vs Transformer-based architectures</a:t>
+            </a:r>
+          </a:p>
+          <a:p>
+            <a:r>
+              <a:rPr lang="en-IN" sz="2800" dirty="0"/>
+              <a:t>RAG and multilingual legal datasets</a:t>
+            </a:r>
+          </a:p>
+          <a:p>
+            <a:r>
+              <a:rPr lang="en-IN" sz="2800" dirty="0"/>
+              <a:t>📚 </a:t>
+            </a:r>
+            <a:r>
+              <a:rPr lang="en-IN" sz="2800" b="1" dirty="0"/>
+              <a:t>Total Papers Reviewed:</a:t>
+            </a:r>
+            <a:r>
+              <a:rPr lang="en-IN" sz="2800" dirty="0"/>
+              <a:t> 15</a:t>
+            </a:r>
+            <a:r>
+              <a:rPr lang="en-IN" sz="2800" dirty="0" smtClean="0"/>
+              <a:t>+</a:t>
+            </a:r>
+          </a:p>
+          <a:p>
+            <a:r>
+              <a:rPr lang="en-IN" sz="2800" dirty="0" smtClean="0"/>
+              <a:t>📆 </a:t>
+            </a:r>
+            <a:r>
+              <a:rPr lang="en-IN" sz="2800" b="1" dirty="0"/>
+              <a:t>Year Range:</a:t>
+            </a:r>
+            <a:r>
+              <a:rPr lang="en-IN" sz="2800" dirty="0"/>
+              <a:t> 2021 – 2025</a:t>
+            </a:r>
           </a:p>
         </p:txBody>
       </p:sp>
@@ -8683,112 +10508,276 @@
             <a:spLocks noGrp="1"/>
           </p:cNvSpPr>
           <p:nvPr>
-            <p:ph type="title"/>
-          </p:nvPr>
-        </p:nvSpPr>
-        <p:spPr/>
-        <p:txBody>
-          <a:bodyPr/>
-          <a:lstStyle/>
-          <a:p>
-            <a:r>
-              <a:t>Project Planning Timeline</a:t>
-            </a:r>
-          </a:p>
-        </p:txBody>
-      </p:sp>
-      <p:sp>
-        <p:nvSpPr>
-          <p:cNvPr id="8" name="Rectangle 7"/>
-          <p:cNvSpPr/>
-          <p:nvPr/>
+            <p:ph type="title" idx="4294967295"/>
+          </p:nvPr>
         </p:nvSpPr>
         <p:spPr>
           <a:xfrm>
-            <a:off x="774440" y="1567270"/>
-            <a:ext cx="8220269" cy="4454809"/>
+            <a:off x="1150420" y="497584"/>
+            <a:ext cx="6799262" cy="1303337"/>
           </a:xfrm>
-          <a:prstGeom prst="rect">
-            <a:avLst/>
-          </a:prstGeom>
         </p:spPr>
         <p:txBody>
-          <a:bodyPr wrap="square">
-            <a:spAutoFit/>
-          </a:bodyPr>
-          <a:lstStyle/>
-          <a:p>
-            <a:pPr>
-              <a:lnSpc>
-                <a:spcPct val="150000"/>
-              </a:lnSpc>
-            </a:pPr>
-            <a:endParaRPr lang="en-GB" sz="3200" dirty="0"/>
-          </a:p>
-          <a:p>
-            <a:pPr lvl="1">
-              <a:lnSpc>
-                <a:spcPct val="150000"/>
-              </a:lnSpc>
-            </a:pPr>
-            <a:r>
-              <a:rPr lang="en-GB" sz="3200" dirty="0"/>
-              <a:t>• Phase 1: Dataset + </a:t>
-            </a:r>
-            <a:r>
-              <a:rPr lang="en-GB" sz="3200" dirty="0" err="1"/>
-              <a:t>Preprocessing</a:t>
-            </a:r>
-            <a:endParaRPr lang="en-GB" sz="3200" dirty="0"/>
-          </a:p>
-          <a:p>
-            <a:pPr lvl="1">
-              <a:lnSpc>
-                <a:spcPct val="150000"/>
-              </a:lnSpc>
-            </a:pPr>
-            <a:r>
-              <a:rPr lang="en-GB" sz="3200" dirty="0"/>
-              <a:t>• Phase 2: Model Development</a:t>
-            </a:r>
-          </a:p>
-          <a:p>
-            <a:pPr lvl="1">
-              <a:lnSpc>
-                <a:spcPct val="150000"/>
-              </a:lnSpc>
-            </a:pPr>
-            <a:r>
-              <a:rPr lang="en-GB" sz="3200" dirty="0"/>
-              <a:t>• Phase 3: Evaluation &amp; Metrics</a:t>
-            </a:r>
-          </a:p>
-          <a:p>
-            <a:pPr lvl="1">
-              <a:lnSpc>
-                <a:spcPct val="150000"/>
-              </a:lnSpc>
-            </a:pPr>
-            <a:r>
-              <a:rPr lang="en-GB" sz="3200" dirty="0"/>
-              <a:t>• Phase 4: UI + Deployment</a:t>
-            </a:r>
-          </a:p>
-          <a:p>
-            <a:pPr lvl="1">
-              <a:lnSpc>
-                <a:spcPct val="150000"/>
-              </a:lnSpc>
-            </a:pPr>
-            <a:r>
-              <a:rPr lang="en-GB" sz="3200" dirty="0"/>
-              <a:t>• Phase 5: Paper publication</a:t>
-            </a:r>
-            <a:endParaRPr lang="en-GB" sz="3200" dirty="0"/>
-          </a:p>
-        </p:txBody>
-      </p:sp>
+          <a:bodyPr/>
+          <a:lstStyle/>
+          <a:p>
+            <a:r>
+              <a:rPr dirty="0"/>
+              <a:t>Literature Survey</a:t>
+            </a:r>
+          </a:p>
+        </p:txBody>
+      </p:sp>
+      <p:graphicFrame>
+        <p:nvGraphicFramePr>
+          <p:cNvPr id="6" name="Content Placeholder 5"/>
+          <p:cNvGraphicFramePr>
+            <a:graphicFrameLocks noGrp="1"/>
+          </p:cNvGraphicFramePr>
+          <p:nvPr>
+            <p:ph idx="4294967295"/>
+            <p:extLst>
+              <p:ext uri="{D42A27DB-BD31-4B8C-83A1-F6EECF244321}">
+                <p14:modId xmlns:p14="http://schemas.microsoft.com/office/powerpoint/2010/main" val="1040912564"/>
+              </p:ext>
+            </p:extLst>
+          </p:nvPr>
+        </p:nvGraphicFramePr>
+        <p:xfrm>
+          <a:off x="701173" y="1520517"/>
+          <a:ext cx="7743030" cy="4544380"/>
+        </p:xfrm>
+        <a:graphic>
+          <a:graphicData uri="http://schemas.openxmlformats.org/drawingml/2006/table">
+            <a:tbl>
+              <a:tblPr>
+                <a:tableStyleId>{284E427A-3D55-4303-BF80-6455036E1DE7}</a:tableStyleId>
+              </a:tblPr>
+              <a:tblGrid>
+                <a:gridCol w="1659472">
+                  <a:extLst>
+                    <a:ext uri="{9D8B030D-6E8A-4147-A177-3AD203B41FA5}">
+                      <a16:colId xmlns:a16="http://schemas.microsoft.com/office/drawing/2014/main" val="529273617"/>
+                    </a:ext>
+                  </a:extLst>
+                </a:gridCol>
+                <a:gridCol w="3228392">
+                  <a:extLst>
+                    <a:ext uri="{9D8B030D-6E8A-4147-A177-3AD203B41FA5}">
+                      <a16:colId xmlns:a16="http://schemas.microsoft.com/office/drawing/2014/main" val="13250625"/>
+                    </a:ext>
+                  </a:extLst>
+                </a:gridCol>
+                <a:gridCol w="2855166">
+                  <a:extLst>
+                    <a:ext uri="{9D8B030D-6E8A-4147-A177-3AD203B41FA5}">
+                      <a16:colId xmlns:a16="http://schemas.microsoft.com/office/drawing/2014/main" val="383078753"/>
+                    </a:ext>
+                  </a:extLst>
+                </a:gridCol>
+              </a:tblGrid>
+              <a:tr h="349567">
+                <a:tc>
+                  <a:txBody>
+                    <a:bodyPr/>
+                    <a:lstStyle/>
+                    <a:p>
+                      <a:r>
+                        <a:rPr lang="en-IN" sz="1600" b="1" i="1" dirty="0"/>
+                        <a:t>Reference </a:t>
+                      </a:r>
+                    </a:p>
+                  </a:txBody>
+                  <a:tcPr marL="37856" marR="37856" marT="18928" marB="18928" anchor="ctr"/>
+                </a:tc>
+                <a:tc>
+                  <a:txBody>
+                    <a:bodyPr/>
+                    <a:lstStyle/>
+                    <a:p>
+                      <a:r>
+                        <a:rPr lang="en-IN" sz="1600" b="1" i="1" dirty="0"/>
+                        <a:t>Key Findings</a:t>
+                      </a:r>
+                    </a:p>
+                  </a:txBody>
+                  <a:tcPr marL="37856" marR="37856" marT="18928" marB="18928" anchor="ctr"/>
+                </a:tc>
+                <a:tc>
+                  <a:txBody>
+                    <a:bodyPr/>
+                    <a:lstStyle/>
+                    <a:p>
+                      <a:r>
+                        <a:rPr lang="en-IN" sz="1600" b="1" i="1" dirty="0"/>
+                        <a:t>Learning for Our Project</a:t>
+                      </a:r>
+                    </a:p>
+                  </a:txBody>
+                  <a:tcPr marL="37856" marR="37856" marT="18928" marB="18928" anchor="ctr"/>
+                </a:tc>
+                <a:extLst>
+                  <a:ext uri="{0D108BD9-81ED-4DB2-BD59-A6C34878D82A}">
+                    <a16:rowId xmlns:a16="http://schemas.microsoft.com/office/drawing/2014/main" val="2978713997"/>
+                  </a:ext>
+                </a:extLst>
+              </a:tr>
+              <a:tr h="1398271">
+                <a:tc>
+                  <a:txBody>
+                    <a:bodyPr/>
+                    <a:lstStyle/>
+                    <a:p>
+                      <a:r>
+                        <a:rPr lang="en-IN" sz="1600" b="0" dirty="0"/>
+                        <a:t>Nigam et al. (2023)</a:t>
+                      </a:r>
+                    </a:p>
+                  </a:txBody>
+                  <a:tcPr marL="37856" marR="37856" marT="18928" marB="18928" anchor="ctr"/>
+                </a:tc>
+                <a:tc>
+                  <a:txBody>
+                    <a:bodyPr/>
+                    <a:lstStyle/>
+                    <a:p>
+                      <a:r>
+                        <a:rPr lang="en-GB" sz="1600" b="0" dirty="0"/>
+                        <a:t>Modern AI models (GPT-based) perform well on Indian legal Q&amp;A tasks, especially factual and short-context queries, but rely heavily on paid APIs and lack transparency.</a:t>
+                      </a:r>
+                    </a:p>
+                  </a:txBody>
+                  <a:tcPr marL="37856" marR="37856" marT="18928" marB="18928" anchor="ctr"/>
+                </a:tc>
+                <a:tc>
+                  <a:txBody>
+                    <a:bodyPr/>
+                    <a:lstStyle/>
+                    <a:p>
+                      <a:r>
+                        <a:rPr lang="en-GB" sz="1600" b="0"/>
+                        <a:t>A strong baseline system is needed that is cost-effective, explainable, and deployable without API dependency for Indian legal use cases.</a:t>
+                      </a:r>
+                    </a:p>
+                  </a:txBody>
+                  <a:tcPr marL="37856" marR="37856" marT="18928" marB="18928" anchor="ctr"/>
+                </a:tc>
+                <a:extLst>
+                  <a:ext uri="{0D108BD9-81ED-4DB2-BD59-A6C34878D82A}">
+                    <a16:rowId xmlns:a16="http://schemas.microsoft.com/office/drawing/2014/main" val="758857908"/>
+                  </a:ext>
+                </a:extLst>
+              </a:tr>
+              <a:tr h="1398271">
+                <a:tc>
+                  <a:txBody>
+                    <a:bodyPr/>
+                    <a:lstStyle/>
+                    <a:p>
+                      <a:r>
+                        <a:rPr lang="en-IN" sz="1600" b="0"/>
+                        <a:t>Akter et al. (2025)</a:t>
+                      </a:r>
+                    </a:p>
+                  </a:txBody>
+                  <a:tcPr marL="37856" marR="37856" marT="18928" marB="18928" anchor="ctr"/>
+                </a:tc>
+                <a:tc>
+                  <a:txBody>
+                    <a:bodyPr/>
+                    <a:lstStyle/>
+                    <a:p>
+                      <a:r>
+                        <a:rPr lang="en-GB" sz="1600" b="0" dirty="0"/>
+                        <a:t>Legal text summarization research lacks domain-specific benchmarks, real-world implementations, and consistent evaluation for long legal documents.</a:t>
+                      </a:r>
+                    </a:p>
+                  </a:txBody>
+                  <a:tcPr marL="37856" marR="37856" marT="18928" marB="18928" anchor="ctr"/>
+                </a:tc>
+                <a:tc>
+                  <a:txBody>
+                    <a:bodyPr/>
+                    <a:lstStyle/>
+                    <a:p>
+                      <a:r>
+                        <a:rPr lang="en-GB" sz="1600" b="0" dirty="0"/>
+                        <a:t>Justifies building a practical, evaluated baseline system focused on Indian legal documents rather than only theoretical analysis.</a:t>
+                      </a:r>
+                    </a:p>
+                  </a:txBody>
+                  <a:tcPr marL="37856" marR="37856" marT="18928" marB="18928" anchor="ctr"/>
+                </a:tc>
+                <a:extLst>
+                  <a:ext uri="{0D108BD9-81ED-4DB2-BD59-A6C34878D82A}">
+                    <a16:rowId xmlns:a16="http://schemas.microsoft.com/office/drawing/2014/main" val="3488047048"/>
+                  </a:ext>
+                </a:extLst>
+              </a:tr>
+              <a:tr h="1398271">
+                <a:tc>
+                  <a:txBody>
+                    <a:bodyPr/>
+                    <a:lstStyle/>
+                    <a:p>
+                      <a:r>
+                        <a:rPr lang="en-IN" sz="1600" b="0"/>
+                        <a:t>Sharma et al. (2024)</a:t>
+                      </a:r>
+                    </a:p>
+                  </a:txBody>
+                  <a:tcPr marL="37856" marR="37856" marT="18928" marB="18928" anchor="ctr"/>
+                </a:tc>
+                <a:tc>
+                  <a:txBody>
+                    <a:bodyPr/>
+                    <a:lstStyle/>
+                    <a:p>
+                      <a:r>
+                        <a:rPr lang="en-GB" sz="1600" b="0"/>
+                        <a:t>Transformer-based models like PEGASUS and T5 achieve superior summarization quality but require high computational resources and large-scale infrastructure.</a:t>
+                      </a:r>
+                    </a:p>
+                  </a:txBody>
+                  <a:tcPr marL="37856" marR="37856" marT="18928" marB="18928" anchor="ctr"/>
+                </a:tc>
+                <a:tc>
+                  <a:txBody>
+                    <a:bodyPr/>
+                    <a:lstStyle/>
+                    <a:p>
+                      <a:r>
+                        <a:rPr lang="en-GB" sz="1600" b="0" dirty="0"/>
+                        <a:t>Confirms the need for a lightweight </a:t>
+                      </a:r>
+                      <a:r>
+                        <a:rPr lang="en-GB" sz="1600" b="0" dirty="0" err="1"/>
+                        <a:t>BiLSTM</a:t>
+                      </a:r>
+                      <a:r>
+                        <a:rPr lang="en-GB" sz="1600" b="0" dirty="0"/>
+                        <a:t> baseline first, with Transformers planned as a future enhancement.</a:t>
+                      </a:r>
+                    </a:p>
+                  </a:txBody>
+                  <a:tcPr marL="37856" marR="37856" marT="18928" marB="18928" anchor="ctr"/>
+                </a:tc>
+                <a:extLst>
+                  <a:ext uri="{0D108BD9-81ED-4DB2-BD59-A6C34878D82A}">
+                    <a16:rowId xmlns:a16="http://schemas.microsoft.com/office/drawing/2014/main" val="3610476278"/>
+                  </a:ext>
+                </a:extLst>
+              </a:tr>
+            </a:tbl>
+          </a:graphicData>
+        </a:graphic>
+      </p:graphicFrame>
     </p:spTree>
+    <p:extLst>
+      <p:ext uri="{BB962C8B-B14F-4D97-AF65-F5344CB8AC3E}">
+        <p14:creationId xmlns:p14="http://schemas.microsoft.com/office/powerpoint/2010/main" val="1833135045"/>
+      </p:ext>
+    </p:extLst>
   </p:cSld>
   <p:clrMapOvr>
     <a:masterClrMapping/>
@@ -8823,10 +10812,41 @@
             <p:ph type="title"/>
           </p:nvPr>
         </p:nvSpPr>
+        <p:spPr/>
+        <p:txBody>
+          <a:bodyPr/>
+          <a:lstStyle/>
+          <a:p>
+            <a:r>
+              <a:rPr dirty="0"/>
+              <a:t>Literature </a:t>
+            </a:r>
+            <a:r>
+              <a:rPr dirty="0" smtClean="0"/>
+              <a:t>Survey</a:t>
+            </a:r>
+            <a:r>
+              <a:rPr lang="en-IN" dirty="0" smtClean="0"/>
+              <a:t> Summary</a:t>
+            </a:r>
+            <a:endParaRPr dirty="0"/>
+          </a:p>
+        </p:txBody>
+      </p:sp>
+      <p:sp>
+        <p:nvSpPr>
+          <p:cNvPr id="3" name="Content Placeholder 2"/>
+          <p:cNvSpPr>
+            <a:spLocks noGrp="1"/>
+          </p:cNvSpPr>
+          <p:nvPr>
+            <p:ph idx="1"/>
+          </p:nvPr>
+        </p:nvSpPr>
         <p:spPr>
           <a:xfrm>
-            <a:off x="682342" y="2692276"/>
-            <a:ext cx="3632202" cy="1371600"/>
+            <a:off x="732020" y="2471131"/>
+            <a:ext cx="7688425" cy="3444997"/>
           </a:xfrm>
         </p:spPr>
         <p:txBody>
@@ -8836,50 +10856,92 @@
           <a:lstStyle/>
           <a:p>
             <a:r>
-              <a:rPr sz="4400" dirty="0"/>
-              <a:t>System Architecture</a:t>
-            </a:r>
-          </a:p>
-        </p:txBody>
-      </p:sp>
-      <p:pic>
-        <p:nvPicPr>
-          <p:cNvPr id="17" name="Picture 16"/>
-          <p:cNvPicPr>
-            <a:picLocks noChangeAspect="1"/>
-          </p:cNvPicPr>
-          <p:nvPr/>
-        </p:nvPicPr>
-        <p:blipFill>
-          <a:blip r:embed="rId2"/>
-          <a:stretch>
-            <a:fillRect/>
-          </a:stretch>
-        </p:blipFill>
-        <p:spPr>
-          <a:xfrm>
-            <a:off x="4520133" y="696967"/>
-            <a:ext cx="2647149" cy="5362218"/>
-          </a:xfrm>
-          <a:prstGeom prst="roundRect">
-            <a:avLst>
-              <a:gd name="adj" fmla="val 8594"/>
-            </a:avLst>
-          </a:prstGeom>
-          <a:solidFill>
-            <a:srgbClr val="FFFFFF">
-              <a:shade val="85000"/>
-            </a:srgbClr>
-          </a:solidFill>
-          <a:ln>
-            <a:noFill/>
-          </a:ln>
-          <a:effectLst>
-            <a:reflection blurRad="12700" stA="38000" endPos="28000" dist="5000" dir="5400000" sy="-100000" algn="bl" rotWithShape="0"/>
-          </a:effectLst>
-        </p:spPr>
-      </p:pic>
+              <a:rPr lang="en-GB" b="1" dirty="0"/>
+              <a:t>Common Findings</a:t>
+            </a:r>
+          </a:p>
+          <a:p>
+            <a:pPr marL="457200" indent="-457200">
+              <a:buFont typeface="+mj-lt"/>
+              <a:buAutoNum type="arabicPeriod"/>
+            </a:pPr>
+            <a:r>
+              <a:rPr lang="en-GB" sz="2000" dirty="0"/>
+              <a:t>Transformers outperform traditional models</a:t>
+            </a:r>
+          </a:p>
+          <a:p>
+            <a:pPr marL="457200" indent="-457200">
+              <a:buFont typeface="+mj-lt"/>
+              <a:buAutoNum type="arabicPeriod"/>
+            </a:pPr>
+            <a:r>
+              <a:rPr lang="en-GB" sz="2000" dirty="0"/>
+              <a:t>Indian legal datasets are underrepresented</a:t>
+            </a:r>
+          </a:p>
+          <a:p>
+            <a:pPr marL="457200" indent="-457200">
+              <a:buFont typeface="+mj-lt"/>
+              <a:buAutoNum type="arabicPeriod"/>
+            </a:pPr>
+            <a:r>
+              <a:rPr lang="en-GB" sz="2000" dirty="0"/>
+              <a:t>Lack of production-ready systems</a:t>
+            </a:r>
+          </a:p>
+          <a:p>
+            <a:r>
+              <a:rPr lang="en-GB" b="1" dirty="0"/>
+              <a:t>Research Gaps Identified</a:t>
+            </a:r>
+          </a:p>
+          <a:p>
+            <a:pPr marL="457200" indent="-457200">
+              <a:buFont typeface="+mj-lt"/>
+              <a:buAutoNum type="arabicPeriod"/>
+            </a:pPr>
+            <a:r>
+              <a:rPr lang="en-GB" sz="2000" dirty="0"/>
+              <a:t>No Indian-focused baseline model</a:t>
+            </a:r>
+          </a:p>
+          <a:p>
+            <a:pPr marL="457200" indent="-457200">
+              <a:buFont typeface="+mj-lt"/>
+              <a:buAutoNum type="arabicPeriod"/>
+            </a:pPr>
+            <a:r>
+              <a:rPr lang="en-GB" sz="2000" dirty="0"/>
+              <a:t>Limited evaluation on real legal documents</a:t>
+            </a:r>
+          </a:p>
+          <a:p>
+            <a:pPr marL="457200" indent="-457200">
+              <a:buFont typeface="+mj-lt"/>
+              <a:buAutoNum type="arabicPeriod"/>
+            </a:pPr>
+            <a:r>
+              <a:rPr lang="en-GB" sz="2000" dirty="0"/>
+              <a:t>Poor </a:t>
+            </a:r>
+            <a:r>
+              <a:rPr lang="en-GB" sz="2000" dirty="0" err="1"/>
+              <a:t>explainability</a:t>
+            </a:r>
+            <a:r>
+              <a:rPr lang="en-GB" sz="2000" dirty="0"/>
+              <a:t> in existing models</a:t>
+            </a:r>
+          </a:p>
+        </p:txBody>
+      </p:sp>
     </p:spTree>
+    <p:extLst>
+      <p:ext uri="{BB962C8B-B14F-4D97-AF65-F5344CB8AC3E}">
+        <p14:creationId xmlns:p14="http://schemas.microsoft.com/office/powerpoint/2010/main" val="1331675241"/>
+      </p:ext>
+    </p:extLst>
   </p:cSld>
   <p:clrMapOvr>
     <a:masterClrMapping/>
@@ -9118,4 +11180,265 @@
     </a:ext>
   </a:extLst>
 </a:theme>
+</file>
+
+<file path=ppt/theme/theme2.xml><?xml version="1.0" encoding="utf-8"?>
+<a:theme xmlns:a="http://schemas.openxmlformats.org/drawingml/2006/main" name="Office Theme">
+  <a:themeElements>
+    <a:clrScheme name="Office">
+      <a:dk1>
+        <a:sysClr val="windowText" lastClr="000000"/>
+      </a:dk1>
+      <a:lt1>
+        <a:sysClr val="window" lastClr="FFFFFF"/>
+      </a:lt1>
+      <a:dk2>
+        <a:srgbClr val="44546A"/>
+      </a:dk2>
+      <a:lt2>
+        <a:srgbClr val="E7E6E6"/>
+      </a:lt2>
+      <a:accent1>
+        <a:srgbClr val="5B9BD5"/>
+      </a:accent1>
+      <a:accent2>
+        <a:srgbClr val="ED7D31"/>
+      </a:accent2>
+      <a:accent3>
+        <a:srgbClr val="A5A5A5"/>
+      </a:accent3>
+      <a:accent4>
+        <a:srgbClr val="FFC000"/>
+      </a:accent4>
+      <a:accent5>
+        <a:srgbClr val="4472C4"/>
+      </a:accent5>
+      <a:accent6>
+        <a:srgbClr val="70AD47"/>
+      </a:accent6>
+      <a:hlink>
+        <a:srgbClr val="0563C1"/>
+      </a:hlink>
+      <a:folHlink>
+        <a:srgbClr val="954F72"/>
+      </a:folHlink>
+    </a:clrScheme>
+    <a:fontScheme name="Office">
+      <a:majorFont>
+        <a:latin typeface="Calibri Light" panose="020F0302020204030204"/>
+        <a:ea typeface=""/>
+        <a:cs typeface=""/>
+        <a:font script="Jpan" typeface="游ゴシック Light"/>
+        <a:font script="Hang" typeface="맑은 고딕"/>
+        <a:font script="Hans" typeface="等线 Light"/>
+        <a:font script="Hant" typeface="新細明體"/>
+        <a:font script="Arab" typeface="Times New Roman"/>
+        <a:font script="Hebr" typeface="Times New Roman"/>
+        <a:font script="Thai" typeface="Angsana New"/>
+        <a:font script="Ethi" typeface="Nyala"/>
+        <a:font script="Beng" typeface="Vrinda"/>
+        <a:font script="Gujr" typeface="Shruti"/>
+        <a:font script="Khmr" typeface="MoolBoran"/>
+        <a:font script="Knda" typeface="Tunga"/>
+        <a:font script="Guru" typeface="Raavi"/>
+        <a:font script="Cans" typeface="Euphemia"/>
+        <a:font script="Cher" typeface="Plantagenet Cherokee"/>
+        <a:font script="Yiii" typeface="Microsoft Yi Baiti"/>
+        <a:font script="Tibt" typeface="Microsoft Himalaya"/>
+        <a:font script="Thaa" typeface="MV Boli"/>
+        <a:font script="Deva" typeface="Mangal"/>
+        <a:font script="Telu" typeface="Gautami"/>
+        <a:font script="Taml" typeface="Latha"/>
+        <a:font script="Syrc" typeface="Estrangelo Edessa"/>
+        <a:font script="Orya" typeface="Kalinga"/>
+        <a:font script="Mlym" typeface="Kartika"/>
+        <a:font script="Laoo" typeface="DokChampa"/>
+        <a:font script="Sinh" typeface="Iskoola Pota"/>
+        <a:font script="Mong" typeface="Mongolian Baiti"/>
+        <a:font script="Viet" typeface="Times New Roman"/>
+        <a:font script="Uigh" typeface="Microsoft Uighur"/>
+        <a:font script="Geor" typeface="Sylfaen"/>
+      </a:majorFont>
+      <a:minorFont>
+        <a:latin typeface="Calibri" panose="020F0502020204030204"/>
+        <a:ea typeface=""/>
+        <a:cs typeface=""/>
+        <a:font script="Jpan" typeface="游ゴシック"/>
+        <a:font script="Hang" typeface="맑은 고딕"/>
+        <a:font script="Hans" typeface="等线"/>
+        <a:font script="Hant" typeface="新細明體"/>
+        <a:font script="Arab" typeface="Arial"/>
+        <a:font script="Hebr" typeface="Arial"/>
+        <a:font script="Thai" typeface="Cordia New"/>
+        <a:font script="Ethi" typeface="Nyala"/>
+        <a:font script="Beng" typeface="Vrinda"/>
+        <a:font script="Gujr" typeface="Shruti"/>
+        <a:font script="Khmr" typeface="DaunPenh"/>
+        <a:font script="Knda" typeface="Tunga"/>
+        <a:font script="Guru" typeface="Raavi"/>
+        <a:font script="Cans" typeface="Euphemia"/>
+        <a:font script="Cher" typeface="Plantagenet Cherokee"/>
+        <a:font script="Yiii" typeface="Microsoft Yi Baiti"/>
+        <a:font script="Tibt" typeface="Microsoft Himalaya"/>
+        <a:font script="Thaa" typeface="MV Boli"/>
+        <a:font script="Deva" typeface="Mangal"/>
+        <a:font script="Telu" typeface="Gautami"/>
+        <a:font script="Taml" typeface="Latha"/>
+        <a:font script="Syrc" typeface="Estrangelo Edessa"/>
+        <a:font script="Orya" typeface="Kalinga"/>
+        <a:font script="Mlym" typeface="Kartika"/>
+        <a:font script="Laoo" typeface="DokChampa"/>
+        <a:font script="Sinh" typeface="Iskoola Pota"/>
+        <a:font script="Mong" typeface="Mongolian Baiti"/>
+        <a:font script="Viet" typeface="Arial"/>
+        <a:font script="Uigh" typeface="Microsoft Uighur"/>
+        <a:font script="Geor" typeface="Sylfaen"/>
+      </a:minorFont>
+    </a:fontScheme>
+    <a:fmtScheme name="Office">
+      <a:fillStyleLst>
+        <a:solidFill>
+          <a:schemeClr val="phClr"/>
+        </a:solidFill>
+        <a:gradFill rotWithShape="1">
+          <a:gsLst>
+            <a:gs pos="0">
+              <a:schemeClr val="phClr">
+                <a:lumMod val="110000"/>
+                <a:satMod val="105000"/>
+                <a:tint val="67000"/>
+              </a:schemeClr>
+            </a:gs>
+            <a:gs pos="50000">
+              <a:schemeClr val="phClr">
+                <a:lumMod val="105000"/>
+                <a:satMod val="103000"/>
+                <a:tint val="73000"/>
+              </a:schemeClr>
+            </a:gs>
+            <a:gs pos="100000">
+              <a:schemeClr val="phClr">
+                <a:lumMod val="105000"/>
+                <a:satMod val="109000"/>
+                <a:tint val="81000"/>
+              </a:schemeClr>
+            </a:gs>
+          </a:gsLst>
+          <a:lin ang="5400000" scaled="0"/>
+        </a:gradFill>
+        <a:gradFill rotWithShape="1">
+          <a:gsLst>
+            <a:gs pos="0">
+              <a:schemeClr val="phClr">
+                <a:satMod val="103000"/>
+                <a:lumMod val="102000"/>
+                <a:tint val="94000"/>
+              </a:schemeClr>
+            </a:gs>
+            <a:gs pos="50000">
+              <a:schemeClr val="phClr">
+                <a:satMod val="110000"/>
+                <a:lumMod val="100000"/>
+                <a:shade val="100000"/>
+              </a:schemeClr>
+            </a:gs>
+            <a:gs pos="100000">
+              <a:schemeClr val="phClr">
+                <a:lumMod val="99000"/>
+                <a:satMod val="120000"/>
+                <a:shade val="78000"/>
+              </a:schemeClr>
+            </a:gs>
+          </a:gsLst>
+          <a:lin ang="5400000" scaled="0"/>
+        </a:gradFill>
+      </a:fillStyleLst>
+      <a:lnStyleLst>
+        <a:ln w="6350" cap="flat" cmpd="sng" algn="ctr">
+          <a:solidFill>
+            <a:schemeClr val="phClr"/>
+          </a:solidFill>
+          <a:prstDash val="solid"/>
+          <a:miter lim="800000"/>
+        </a:ln>
+        <a:ln w="12700" cap="flat" cmpd="sng" algn="ctr">
+          <a:solidFill>
+            <a:schemeClr val="phClr"/>
+          </a:solidFill>
+          <a:prstDash val="solid"/>
+          <a:miter lim="800000"/>
+        </a:ln>
+        <a:ln w="19050" cap="flat" cmpd="sng" algn="ctr">
+          <a:solidFill>
+            <a:schemeClr val="phClr"/>
+          </a:solidFill>
+          <a:prstDash val="solid"/>
+          <a:miter lim="800000"/>
+        </a:ln>
+      </a:lnStyleLst>
+      <a:effectStyleLst>
+        <a:effectStyle>
+          <a:effectLst/>
+        </a:effectStyle>
+        <a:effectStyle>
+          <a:effectLst/>
+        </a:effectStyle>
+        <a:effectStyle>
+          <a:effectLst>
+            <a:outerShdw blurRad="57150" dist="19050" dir="5400000" algn="ctr" rotWithShape="0">
+              <a:srgbClr val="000000">
+                <a:alpha val="63000"/>
+              </a:srgbClr>
+            </a:outerShdw>
+          </a:effectLst>
+        </a:effectStyle>
+      </a:effectStyleLst>
+      <a:bgFillStyleLst>
+        <a:solidFill>
+          <a:schemeClr val="phClr"/>
+        </a:solidFill>
+        <a:solidFill>
+          <a:schemeClr val="phClr">
+            <a:tint val="95000"/>
+            <a:satMod val="170000"/>
+          </a:schemeClr>
+        </a:solidFill>
+        <a:gradFill rotWithShape="1">
+          <a:gsLst>
+            <a:gs pos="0">
+              <a:schemeClr val="phClr">
+                <a:tint val="93000"/>
+                <a:satMod val="150000"/>
+                <a:shade val="98000"/>
+                <a:lumMod val="102000"/>
+              </a:schemeClr>
+            </a:gs>
+            <a:gs pos="50000">
+              <a:schemeClr val="phClr">
+                <a:tint val="98000"/>
+                <a:satMod val="130000"/>
+                <a:shade val="90000"/>
+                <a:lumMod val="103000"/>
+              </a:schemeClr>
+            </a:gs>
+            <a:gs pos="100000">
+              <a:schemeClr val="phClr">
+                <a:shade val="63000"/>
+                <a:satMod val="120000"/>
+              </a:schemeClr>
+            </a:gs>
+          </a:gsLst>
+          <a:lin ang="5400000" scaled="0"/>
+        </a:gradFill>
+      </a:bgFillStyleLst>
+    </a:fmtScheme>
+  </a:themeElements>
+  <a:objectDefaults/>
+  <a:extraClrSchemeLst/>
+  <a:extLst>
+    <a:ext uri="{05A4C25C-085E-4340-85A3-A5531E510DB2}">
+      <thm15:themeFamily xmlns:thm15="http://schemas.microsoft.com/office/thememl/2012/main" name="Office Theme" id="{62F939B6-93AF-4DB8-9C6B-D6C7DFDC589F}" vid="{4A3C46E8-61CC-4603-A589-7422A47A8E4A}"/>
+    </a:ext>
+  </a:extLst>
+</a:theme>
 </file>